--- a/docs/presentation/AML_Traffic_Flow_Forecasting.pptx
+++ b/docs/presentation/AML_Traffic_Flow_Forecasting.pptx
@@ -117,33 +117,33 @@
   <p:extLst>
     <p:ext uri="{521415D9-36F7-43E2-AB2F-B90AF26B5E84}">
       <p14:sectionLst xmlns:p14="http://schemas.microsoft.com/office/powerpoint/2010/main">
-        <p14:section name="Overview" id="{a3518deb-2b64-e858-9d49-43c3e8d5f467}">
+        <p14:section name="Overview" id="{51ae96aa-3824-9b99-d8a1-3881033583d9}">
           <p14:sldIdLst>
             <p14:sldId id="256"/>
             <p14:sldId id="257"/>
           </p14:sldIdLst>
         </p14:section>
-        <p14:section name="Method" id="{2d2205fe-3f44-c032-18d0-4b0ec20a2b85}">
+        <p14:section name="Method" id="{402d6db1-e3c2-177f-3df0-844f27b2a3ed}">
           <p14:sldIdLst>
             <p14:sldId id="258"/>
             <p14:sldId id="259"/>
             <p14:sldId id="260"/>
           </p14:sldIdLst>
         </p14:section>
-        <p14:section name="Results" id="{1522b73d-9287-bb06-9de8-a6637ae2c200}">
+        <p14:section name="Results" id="{ee18a7a2-a9ee-9722-4921-b6d0bc81d572}">
           <p14:sldIdLst>
             <p14:sldId id="261"/>
             <p14:sldId id="262"/>
             <p14:sldId id="263"/>
           </p14:sldIdLst>
         </p14:section>
-        <p14:section name="The gap" id="{ab032d54-c9d8-5688-86e3-26508d33f312}">
+        <p14:section name="The gap" id="{43a3fd91-3f50-2a8a-3871-470d271a1d3d}">
           <p14:sldIdLst>
             <p14:sldId id="264"/>
             <p14:sldId id="265"/>
           </p14:sldIdLst>
         </p14:section>
-        <p14:section name="Wrap-up" id="{ac4e1b3d-0953-0f2a-d95c-640e687bf66e}">
+        <p14:section name="Wrap-up" id="{92003bd1-bd1b-981e-fa76-3f7060fca534}">
           <p14:sldIdLst>
             <p14:sldId id="266"/>
           </p14:sldIdLst>
@@ -6941,7 +6941,25 @@
                   <a:schemeClr val="bg1"/>
                 </a:solidFill>
               </a:rPr>
-              <a:t>Interactive Streamlit dashboard (Sumit)</a:t>
+              <a:t>Live Streamlit dashboard (Sumit)</a:t>
+            </a:r>
+            <a:endParaRPr lang="en-US" sz="1300" dirty="0"/>
+          </a:p>
+          <a:p>
+            <a:pPr marL="342900" indent="-342900">
+              <a:spcAft>
+                <a:spcPts val="400"/>
+              </a:spcAft>
+              <a:buSzPct val="100000"/>
+              <a:buChar char="•"/>
+            </a:pPr>
+            <a:r>
+              <a:rPr lang="en-US" sz="1200" dirty="0">
+                <a:solidFill>
+                  <a:schemeClr val="bg1"/>
+                </a:solidFill>
+              </a:rPr>
+              <a:t>trafficflowamldl.streamlit.app</a:t>
             </a:r>
             <a:endParaRPr lang="en-US" sz="1300" dirty="0"/>
           </a:p>

--- a/docs/presentation/AML_Traffic_Flow_Forecasting.pptx
+++ b/docs/presentation/AML_Traffic_Flow_Forecasting.pptx
@@ -117,33 +117,33 @@
   <p:extLst>
     <p:ext uri="{521415D9-36F7-43E2-AB2F-B90AF26B5E84}">
       <p14:sectionLst xmlns:p14="http://schemas.microsoft.com/office/powerpoint/2010/main">
-        <p14:section name="Overview" id="{51ae96aa-3824-9b99-d8a1-3881033583d9}">
+        <p14:section name="Overview" id="{195d4618-0764-5622-86f0-0725b9a9154e}">
           <p14:sldIdLst>
             <p14:sldId id="256"/>
             <p14:sldId id="257"/>
           </p14:sldIdLst>
         </p14:section>
-        <p14:section name="Method" id="{402d6db1-e3c2-177f-3df0-844f27b2a3ed}">
+        <p14:section name="Method" id="{a7b69f56-3613-9171-e03a-5ca799904926}">
           <p14:sldIdLst>
             <p14:sldId id="258"/>
             <p14:sldId id="259"/>
             <p14:sldId id="260"/>
           </p14:sldIdLst>
         </p14:section>
-        <p14:section name="Results" id="{ee18a7a2-a9ee-9722-4921-b6d0bc81d572}">
+        <p14:section name="Results" id="{77ca55ad-5daf-407a-91d8-a21933541ef3}">
           <p14:sldIdLst>
             <p14:sldId id="261"/>
             <p14:sldId id="262"/>
             <p14:sldId id="263"/>
           </p14:sldIdLst>
         </p14:section>
-        <p14:section name="The gap" id="{43a3fd91-3f50-2a8a-3871-470d271a1d3d}">
+        <p14:section name="The gap" id="{3b3187ef-634f-6911-e3b8-c367058beb17}">
           <p14:sldIdLst>
             <p14:sldId id="264"/>
             <p14:sldId id="265"/>
           </p14:sldIdLst>
         </p14:section>
-        <p14:section name="Wrap-up" id="{92003bd1-bd1b-981e-fa76-3f7060fca534}">
+        <p14:section name="Wrap-up" id="{a3afbad0-0084-e2da-1d57-75b152aff294}">
           <p14:sldIdLst>
             <p14:sldId id="266"/>
           </p14:sldIdLst>
@@ -6923,7 +6923,7 @@
                   <a:schemeClr val="bg1"/>
                 </a:solidFill>
               </a:rPr>
-              <a:t>Reports for Phases 1 to 4, 39 automated tests</a:t>
+              <a:t>LaTeX project report, 40 automated tests</a:t>
             </a:r>
             <a:endParaRPr lang="en-US" sz="1300" dirty="0"/>
           </a:p>
@@ -15448,7 +15448,7 @@
                             <a:srgbClr val="0B1730"/>
                           </a:solidFill>
                         </a:rPr>
-                        <a:t>5.62</a:t>
+                        <a:t>5.61</a:t>
                       </a:r>
                       <a:endParaRPr lang="en-US" sz="1300" dirty="0"/>
                     </a:p>
@@ -16182,7 +16182,7 @@
                             <a:srgbClr val="0B1730"/>
                           </a:solidFill>
                         </a:rPr>
-                        <a:t>7.20</a:t>
+                        <a:t>7.19</a:t>
                       </a:r>
                       <a:endParaRPr lang="en-US" sz="1300" dirty="0"/>
                     </a:p>
@@ -16916,7 +16916,7 @@
                             <a:srgbClr val="0B7A52"/>
                           </a:solidFill>
                         </a:rPr>
-                        <a:t>7.28</a:t>
+                        <a:t>7.27</a:t>
                       </a:r>
                       <a:endParaRPr lang="en-US" sz="1300" dirty="0"/>
                     </a:p>

--- a/docs/presentation/AML_Traffic_Flow_Forecasting.pptx
+++ b/docs/presentation/AML_Traffic_Flow_Forecasting.pptx
@@ -16,9 +16,11 @@
     <p:sldId id="264" r:id="rId10"/>
     <p:sldId id="265" r:id="rId11"/>
     <p:sldId id="266" r:id="rId12"/>
+    <p:sldId id="267" r:id="rId13"/>
+    <p:sldId id="268" r:id="rId14"/>
   </p:sldIdLst>
   <p:notesMasterIdLst>
-    <p:notesMasterId r:id="rId13"/>
+    <p:notesMasterId r:id="rId15"/>
   </p:notesMasterIdLst>
   <p:sldSz cx="9144000" cy="5143500"/>
   <p:notesSz cx="5143500" cy="9144000"/>
@@ -117,35 +119,37 @@
   <p:extLst>
     <p:ext uri="{521415D9-36F7-43E2-AB2F-B90AF26B5E84}">
       <p14:sectionLst xmlns:p14="http://schemas.microsoft.com/office/powerpoint/2010/main">
-        <p14:section name="Overview" id="{195d4618-0764-5622-86f0-0725b9a9154e}">
+        <p14:section name="Overview" id="{82155768-d959-20cf-fad9-3c7fff23891e}">
           <p14:sldIdLst>
             <p14:sldId id="256"/>
             <p14:sldId id="257"/>
+            <p14:sldId id="258"/>
           </p14:sldIdLst>
         </p14:section>
-        <p14:section name="Method" id="{a7b69f56-3613-9171-e03a-5ca799904926}">
+        <p14:section name="Method" id="{8825e7f3-9272-5af2-b62b-ecdae53fb614}">
           <p14:sldIdLst>
-            <p14:sldId id="258"/>
             <p14:sldId id="259"/>
             <p14:sldId id="260"/>
+            <p14:sldId id="261"/>
           </p14:sldIdLst>
         </p14:section>
-        <p14:section name="Results" id="{77ca55ad-5daf-407a-91d8-a21933541ef3}">
+        <p14:section name="Results" id="{5e156301-5005-47bd-69c6-4e750d3d184c}">
           <p14:sldIdLst>
-            <p14:sldId id="261"/>
             <p14:sldId id="262"/>
             <p14:sldId id="263"/>
+            <p14:sldId id="264"/>
           </p14:sldIdLst>
         </p14:section>
-        <p14:section name="The gap" id="{3b3187ef-634f-6911-e3b8-c367058beb17}">
+        <p14:section name="The gap" id="{51f5cc71-5a28-f5b6-d18a-f01d862a39ef}">
           <p14:sldIdLst>
-            <p14:sldId id="264"/>
             <p14:sldId id="265"/>
+            <p14:sldId id="266"/>
           </p14:sldIdLst>
         </p14:section>
-        <p14:section name="Wrap-up" id="{a3afbad0-0084-e2da-1d57-75b152aff294}">
+        <p14:section name="Wrap-up" id="{6fc6f8e8-6a15-c5ef-43a7-b9109bdd0ffe}">
           <p14:sldIdLst>
-            <p14:sldId id="266"/>
+            <p14:sldId id="267"/>
+            <p14:sldId id="268"/>
           </p14:sldIdLst>
         </p14:section>
       </p14:sectionLst>
@@ -3372,7 +3376,7 @@
           <a:p>
             <a:r>
               <a:rPr lang="en-US" dirty="0"/>
-              <a:t>The key experiment. We hand XGBoost summaries of each sensor's neighbours: weighted mean speed now and earlier, the slowest neighbour, and the biggest recent drop. Same depth and budget, no extra tuning. Error falls at every horizon, most with both directions, and downstream neighbours help more than upstream, exactly as the propagation analysis predicts. But gains shrink at 60 minutes and linked residuals stay correlated, because one-hop hand-made features are weak. Learning which neighbours matter, several hops out, is the job of a graph attention or diffusion model.</a:t>
+              <a:t>Three independent pieces of evidence that the per-sensor model misses propagation. One: error grows steadily with horizon. Two: in the 30 minutes after a congestion onset, error is five to six times higher; the model keeps forecasting free flow until the slowdown reaches its own history. Three: residual errors are correlated between sensors that are linked on the road graph (0.12 to 0.20 on one link) and not at all between unconnected sensors, so a shared spatial cause exists that the model ignores.</a:t>
             </a:r>
             <a:endParaRPr lang="en-US" dirty="0"/>
           </a:p>
@@ -3460,7 +3464,7 @@
           <a:p>
             <a:r>
               <a:rPr lang="en-US" dirty="0"/>
-              <a:t>Wrap-up. The AML part is done and reproducible: make targets rebuild data, features, baselines and the gap experiments; 39 tests pass. Limitations to state: METR-LA is speed only, so flow and occupancy come from PeMS in a later phase; the data is 2012 freeways from one city; signal control will be simulation only. Next is Phase 5, the graph models, whose target is XGBoost's 3.02, 3.51 and 4.01 mph.</a:t>
+              <a:t>The key experiment. We hand XGBoost summaries of each sensor's neighbours: weighted mean speed now and earlier, the slowest neighbour, and the biggest recent drop. Same depth and budget, no extra tuning. Error falls at every horizon, most with both directions, and downstream neighbours help more than upstream, exactly as the propagation analysis predicts. But gains shrink at 60 minutes and linked residuals stay correlated, because one-hop hand-made features are weak. Learning which neighbours matter, several hops out, is the job of a graph attention or diffusion model.</a:t>
             </a:r>
             <a:endParaRPr lang="en-US" dirty="0"/>
           </a:p>
@@ -3484,6 +3488,182 @@
             <a:fld id="{F7021451-1387-4CA6-816F-3879F97B5CBC}" type="slidenum">
               <a:rPr lang="en-US"/>
               <a:t>11</a:t>
+            </a:fld>
+            <a:endParaRPr lang="en-US"/>
+          </a:p>
+        </p:txBody>
+      </p:sp>
+    </p:spTree>
+    <p:extLst>
+      <p:ext uri="{BB962C8B-B14F-4D97-AF65-F5344CB8AC3E}">
+        <p14:creationId xmlns:p14="http://schemas.microsoft.com/office/powerpoint/2010/main" val="1024086991"/>
+      </p:ext>
+    </p:extLst>
+  </p:cSld>
+  <p:clrMapOvr>
+    <a:masterClrMapping/>
+  </p:clrMapOvr>
+</p:notes>
+</file>
+
+<file path=ppt/notesSlides/notesSlide12.xml><?xml version="1.0" encoding="utf-8"?>
+<p:notes xmlns:a="http://schemas.openxmlformats.org/drawingml/2006/main" xmlns:r="http://schemas.openxmlformats.org/officeDocument/2006/relationships" xmlns:p="http://schemas.openxmlformats.org/presentationml/2006/main">
+  <p:cSld>
+    <p:spTree>
+      <p:nvGrpSpPr>
+        <p:cNvPr id="1" name=""/>
+        <p:cNvGrpSpPr/>
+        <p:nvPr/>
+      </p:nvGrpSpPr>
+      <p:grpSpPr>
+        <a:xfrm>
+          <a:off x="0" y="0"/>
+          <a:ext cx="0" cy="0"/>
+          <a:chOff x="0" y="0"/>
+          <a:chExt cx="0" cy="0"/>
+        </a:xfrm>
+      </p:grpSpPr>
+      <p:sp>
+        <p:nvSpPr>
+          <p:cNvPr id="2" name="Slide Image Placeholder 1"/>
+          <p:cNvSpPr>
+            <a:spLocks noGrp="1" noRot="1" noChangeAspect="1"/>
+          </p:cNvSpPr>
+          <p:nvPr>
+            <p:ph type="sldImg"/>
+          </p:nvPr>
+        </p:nvSpPr>
+        <p:spPr/>
+      </p:sp>
+      <p:sp>
+        <p:nvSpPr>
+          <p:cNvPr id="3" name="Notes Placeholder 2"/>
+          <p:cNvSpPr>
+            <a:spLocks noGrp="1"/>
+          </p:cNvSpPr>
+          <p:nvPr>
+            <p:ph type="body" idx="1"/>
+          </p:nvPr>
+        </p:nvSpPr>
+        <p:spPr/>
+        <p:txBody>
+          <a:bodyPr/>
+          <a:lstStyle/>
+          <a:p>
+            <a:r>
+              <a:rPr lang="en-US" dirty="0"/>
+              <a:t>Wrap-up. The AML part is done and reproducible: make targets rebuild data, features, baselines and the gap experiments; 39 tests pass. Limitations to state: METR-LA is speed only, so flow and occupancy come from PeMS in a later phase; the data is 2012 freeways from one city; signal control will be simulation only. Next is Phase 5, the graph models, whose target is XGBoost's 3.02, 3.51 and 4.01 mph.</a:t>
+            </a:r>
+            <a:endParaRPr lang="en-US" dirty="0"/>
+          </a:p>
+        </p:txBody>
+      </p:sp>
+      <p:sp>
+        <p:nvSpPr>
+          <p:cNvPr id="4" name="Slide Number Placeholder 3"/>
+          <p:cNvSpPr>
+            <a:spLocks noGrp="1"/>
+          </p:cNvSpPr>
+          <p:nvPr>
+            <p:ph type="sldNum" sz="quarter" idx="10"/>
+          </p:nvPr>
+        </p:nvSpPr>
+        <p:spPr/>
+        <p:txBody>
+          <a:bodyPr/>
+          <a:lstStyle/>
+          <a:p>
+            <a:fld id="{F7021451-1387-4CA6-816F-3879F97B5CBC}" type="slidenum">
+              <a:rPr lang="en-US"/>
+              <a:t>12</a:t>
+            </a:fld>
+            <a:endParaRPr lang="en-US"/>
+          </a:p>
+        </p:txBody>
+      </p:sp>
+    </p:spTree>
+    <p:extLst>
+      <p:ext uri="{BB962C8B-B14F-4D97-AF65-F5344CB8AC3E}">
+        <p14:creationId xmlns:p14="http://schemas.microsoft.com/office/powerpoint/2010/main" val="1024086991"/>
+      </p:ext>
+    </p:extLst>
+  </p:cSld>
+  <p:clrMapOvr>
+    <a:masterClrMapping/>
+  </p:clrMapOvr>
+</p:notes>
+</file>
+
+<file path=ppt/notesSlides/notesSlide13.xml><?xml version="1.0" encoding="utf-8"?>
+<p:notes xmlns:a="http://schemas.openxmlformats.org/drawingml/2006/main" xmlns:r="http://schemas.openxmlformats.org/officeDocument/2006/relationships" xmlns:p="http://schemas.openxmlformats.org/presentationml/2006/main">
+  <p:cSld>
+    <p:spTree>
+      <p:nvGrpSpPr>
+        <p:cNvPr id="1" name=""/>
+        <p:cNvGrpSpPr/>
+        <p:nvPr/>
+      </p:nvGrpSpPr>
+      <p:grpSpPr>
+        <a:xfrm>
+          <a:off x="0" y="0"/>
+          <a:ext cx="0" cy="0"/>
+          <a:chOff x="0" y="0"/>
+          <a:chExt cx="0" cy="0"/>
+        </a:xfrm>
+      </p:grpSpPr>
+      <p:sp>
+        <p:nvSpPr>
+          <p:cNvPr id="2" name="Slide Image Placeholder 1"/>
+          <p:cNvSpPr>
+            <a:spLocks noGrp="1" noRot="1" noChangeAspect="1"/>
+          </p:cNvSpPr>
+          <p:nvPr>
+            <p:ph type="sldImg"/>
+          </p:nvPr>
+        </p:nvSpPr>
+        <p:spPr/>
+      </p:sp>
+      <p:sp>
+        <p:nvSpPr>
+          <p:cNvPr id="3" name="Notes Placeholder 2"/>
+          <p:cNvSpPr>
+            <a:spLocks noGrp="1"/>
+          </p:cNvSpPr>
+          <p:nvPr>
+            <p:ph type="body" idx="1"/>
+          </p:nvPr>
+        </p:nvSpPr>
+        <p:spPr/>
+        <p:txBody>
+          <a:bodyPr/>
+          <a:lstStyle/>
+          <a:p>
+            <a:r>
+              <a:rPr lang="en-US" dirty="0"/>
+              <a:t>The thirteen references used in the report. Each is mapped to its role in the project in Table 1 of the report.</a:t>
+            </a:r>
+            <a:endParaRPr lang="en-US" dirty="0"/>
+          </a:p>
+        </p:txBody>
+      </p:sp>
+      <p:sp>
+        <p:nvSpPr>
+          <p:cNvPr id="4" name="Slide Number Placeholder 3"/>
+          <p:cNvSpPr>
+            <a:spLocks noGrp="1"/>
+          </p:cNvSpPr>
+          <p:nvPr>
+            <p:ph type="sldNum" sz="quarter" idx="10"/>
+          </p:nvPr>
+        </p:nvSpPr>
+        <p:spPr/>
+        <p:txBody>
+          <a:bodyPr/>
+          <a:lstStyle/>
+          <a:p>
+            <a:fld id="{F7021451-1387-4CA6-816F-3879F97B5CBC}" type="slidenum">
+              <a:rPr lang="en-US"/>
+              <a:t>13</a:t>
             </a:fld>
             <a:endParaRPr lang="en-US"/>
           </a:p>
@@ -3636,7 +3816,7 @@
           <a:p>
             <a:r>
               <a:rPr lang="en-US" dirty="0"/>
-              <a:t>Data: METR-LA, 207 loop detectors, four months of 5-minute speeds. Two facts shape the whole project. First, 0 mph means the sensor was down, not that traffic stopped, so outages are masked everywhere. Second, the graph is directed and congestion moves backwards along it, which is why neighbours carry predictive information.</a:t>
+              <a:t>The project builds on the DCRNN study for data, graph and protocol, on graph attention and convolutional graph models as the next stage, on four established learners as baselines, on the leakage and forecast-accuracy literature for the evaluation design, and on CityFlow for the optional simulation-only signal control. From this literature we derived four hypotheses: error grows with horizon, errors concentrate after congestion onsets, residuals correlate along road links, and neighbour information helps but does not close the gap. All four were supported by the experiments.</a:t>
             </a:r>
             <a:endParaRPr lang="en-US" dirty="0"/>
           </a:p>
@@ -3724,7 +3904,7 @@
           <a:p>
             <a:r>
               <a:rPr lang="en-US" dirty="0"/>
-              <a:t>Fairness by construction. We split the timestamps chronologically, then cut windows, and drop the 11 windows whose targets would straddle a boundary. The scaler uses training timestamps only. The common reference script splits windows instead and lets train and validation targets overlap; we built both protocols and proved the overlap in a test. Twelve dedicated leakage tests guard all of this.</a:t>
+              <a:t>Data: METR-LA, 207 loop detectors, four months of 5-minute speeds. Two facts shape the whole project. First, 0 mph means the sensor was down, not that traffic stopped, so outages are masked everywhere. Second, the graph is directed and congestion moves backwards along it, which is why neighbours carry predictive information.</a:t>
             </a:r>
             <a:endParaRPr lang="en-US" dirty="0"/>
           </a:p>
@@ -3812,7 +3992,7 @@
           <a:p>
             <a:r>
               <a:rPr lang="en-US" dirty="0"/>
-              <a:t>The ladder. Each rung is one row in the results. The LSTM shares weights across all sensors and sees no graph, so if a graph model later beats it, the improvement comes from the graph rather than from deep learning in general. XGBoost and the Random Forest are the two models the brief names.</a:t>
+              <a:t>Fairness by construction. We split the timestamps chronologically, then cut windows, and drop the 11 windows whose targets would straddle a boundary. The scaler uses training timestamps only. The common reference script splits windows instead and lets train and validation targets overlap; we built both protocols and proved the overlap in a test. Twelve dedicated leakage tests guard all of this.</a:t>
             </a:r>
             <a:endParaRPr lang="en-US" dirty="0"/>
           </a:p>
@@ -3900,7 +4080,7 @@
           <a:p>
             <a:r>
               <a:rPr lang="en-US" dirty="0"/>
-              <a:t>Main result. XGBoost has the lowest error at 30 and 60 minutes and the lowest RMSE at every horizon; the LSTM edges it at 15 minutes. All models degrade as the horizon grows, which already hints at the gap: beyond about 15 minutes, the information a sensor needs is no longer in its own history.</a:t>
+              <a:t>The ladder. Each rung is one row in the results. The LSTM shares weights across all sensors and sees no graph, so if a graph model later beats it, the improvement comes from the graph rather than from deep learning in general. XGBoost and the Random Forest are the two models the brief names.</a:t>
             </a:r>
             <a:endParaRPr lang="en-US" dirty="0"/>
           </a:p>
@@ -3988,7 +4168,7 @@
           <a:p>
             <a:r>
               <a:rPr lang="en-US" dirty="0"/>
-              <a:t>Every score in one place: MAE, RMSE and MAPE at 15, 30 and 60 minutes, plus the pooled validation MAE. XGBoost is best on 7 of the 9 test columns; the LSTM wins MAE and MAPE at 15 minutes. The validation column is slightly lower than test for every model because the test period has more sensor outages (12 percent of targets masked versus 7 percent).</a:t>
+              <a:t>Main result. XGBoost has the lowest error at 30 and 60 minutes and the lowest RMSE at every horizon; the LSTM edges it at 15 minutes. All models degrade as the horizon grows, which already hints at the gap: beyond about 15 minutes, the information a sensor needs is no longer in its own history.</a:t>
             </a:r>
             <a:endParaRPr lang="en-US" dirty="0"/>
           </a:p>
@@ -4076,7 +4256,7 @@
           <a:p>
             <a:r>
               <a:rPr lang="en-US" dirty="0"/>
-              <a:t>Peak hours follow the brief: weekday 7 to 10 am and 4 to 8 pm on the timestamp being predicted. Every model is 1.4 to 1.95 times worse at peak than off-peak, and the penalty grows with the horizon. Rush hour is exactly when congestion forms and travels, so it is where a network-aware model has the most to gain.</a:t>
+              <a:t>Every score in one place: MAE, RMSE and MAPE at 15, 30 and 60 minutes, plus the pooled validation MAE. XGBoost is best on 7 of the 9 test columns; the LSTM wins MAE and MAPE at 15 minutes. The validation column is slightly lower than test for every model because the test period has more sensor outages (12 percent of targets masked versus 7 percent).</a:t>
             </a:r>
             <a:endParaRPr lang="en-US" dirty="0"/>
           </a:p>
@@ -4164,7 +4344,7 @@
           <a:p>
             <a:r>
               <a:rPr lang="en-US" dirty="0"/>
-              <a:t>Three independent pieces of evidence that the per-sensor model misses propagation. One: error grows steadily with horizon. Two: in the 30 minutes after a congestion onset, error is five to six times higher; the model keeps forecasting free flow until the slowdown reaches its own history. Three: residual errors are correlated between sensors that are linked on the road graph (0.12 to 0.20 on one link) and not at all between unconnected sensors, so a shared spatial cause exists that the model ignores.</a:t>
+              <a:t>Peak hours follow the brief: weekday 7 to 10 am and 4 to 8 pm on the timestamp being predicted. Every model is 1.4 to 1.95 times worse at peak than off-peak, and the penalty grows with the horizon. Rush hour is exactly when congestion forms and travels, so it is where a network-aware model has the most to gain.</a:t>
             </a:r>
             <a:endParaRPr lang="en-US" dirty="0"/>
           </a:p>
@@ -5714,7 +5894,7 @@
                 <a:ea typeface="+mj-lt" pitchFamily="34" charset="-122"/>
                 <a:cs typeface="+mj-lt" pitchFamily="34" charset="-120"/>
               </a:rPr>
-              <a:t>Neighbour speeds close part of the gap</a:t>
+              <a:t>The gap, measured</a:t>
             </a:r>
             <a:endParaRPr lang="en-US" sz="3000" dirty="0"/>
           </a:p>
@@ -5825,7 +6005,7 @@
                   <a:schemeClr val="accent6"/>
                 </a:solidFill>
               </a:rPr>
-              <a:t>XGBoost with hand-made upstream and downstream features, test MAE (mph)</a:t>
+              <a:t>Where an independent per-sensor model fails (XGBoost, test block)</a:t>
             </a:r>
             <a:endParaRPr lang="en-US" sz="1600" dirty="0"/>
           </a:p>
@@ -5833,13 +6013,13 @@
       </p:sp>
       <p:graphicFrame>
         <p:nvGraphicFramePr>
-          <p:cNvPr id="7" name="Neighbour experiment chart" descr=""/>
+          <p:cNvPr id="7" name="Onset error chart" descr=""/>
           <p:cNvGraphicFramePr/>
           <p:nvPr/>
         </p:nvGraphicFramePr>
         <p:xfrm>
           <a:off x="365760" y="1280160"/>
-          <a:ext cx="5212080" cy="3383280"/>
+          <a:ext cx="5120640" cy="3383280"/>
         </p:xfrm>
         <a:graphic xmlns:a="http://schemas.openxmlformats.org/drawingml/2006/main">
           <a:graphicData uri="http://schemas.openxmlformats.org/drawingml/2006/chart">
@@ -5849,24 +6029,26 @@
       </p:graphicFrame>
       <p:sp>
         <p:nvSpPr>
-          <p:cNvPr id="8" name="Badge 1"/>
+          <p:cNvPr id="8" name="Gap card 1"/>
           <p:cNvSpPr/>
           <p:nvPr/>
         </p:nvSpPr>
         <p:spPr>
           <a:xfrm>
-            <a:off x="5806440" y="1545336"/>
-            <a:ext cx="310896" cy="310896"/>
-          </a:xfrm>
-          <a:prstGeom prst="ellipse">
-            <a:avLst/>
+            <a:off x="5669280" y="1325880"/>
+            <a:ext cx="3017520" cy="1005840"/>
+          </a:xfrm>
+          <a:prstGeom prst="roundRect">
+            <a:avLst>
+              <a:gd name="adj" fmla="val 7273"/>
+            </a:avLst>
           </a:prstGeom>
           <a:solidFill>
-            <a:schemeClr val="accent1"/>
+            <a:schemeClr val="bg2"/>
           </a:solidFill>
           <a:ln w="12700">
             <a:solidFill>
-              <a:schemeClr val="accent1"/>
+              <a:schemeClr val="bg2"/>
             </a:solidFill>
             <a:prstDash val="solid"/>
           </a:ln>
@@ -5874,50 +6056,14 @@
       </p:sp>
       <p:sp>
         <p:nvSpPr>
-          <p:cNvPr id="9" name="Badge text 1"/>
+          <p:cNvPr id="9" name="Gap number 1"/>
           <p:cNvSpPr txBox="1"/>
           <p:nvPr/>
         </p:nvSpPr>
         <p:spPr>
           <a:xfrm>
-            <a:off x="5806440" y="1545336"/>
-            <a:ext cx="310896" cy="310896"/>
-          </a:xfrm>
-          <a:prstGeom prst="rect">
-            <a:avLst/>
-          </a:prstGeom>
-          <a:noFill/>
-          <a:ln/>
-        </p:spPr>
-        <p:txBody>
-          <a:bodyPr wrap="square" lIns="0" tIns="0" rIns="0" bIns="0" rtlCol="0" anchor="ctr"/>
-          <a:lstStyle/>
-          <a:p>
-            <a:pPr algn="ctr" indent="0" marL="0">
-              <a:buNone/>
-            </a:pPr>
-            <a:r>
-              <a:rPr lang="en-US" sz="1200" b="1" dirty="0">
-                <a:solidFill>
-                  <a:schemeClr val="bg1"/>
-                </a:solidFill>
-              </a:rPr>
-              <a:t>1</a:t>
-            </a:r>
-            <a:endParaRPr lang="en-US" sz="1200" dirty="0"/>
-          </a:p>
-        </p:txBody>
-      </p:sp>
-      <p:sp>
-        <p:nvSpPr>
-          <p:cNvPr id="10" name="Takeaway 1"/>
-          <p:cNvSpPr txBox="1"/>
-          <p:nvPr/>
-        </p:nvSpPr>
-        <p:spPr>
-          <a:xfrm>
-            <a:off x="6263640" y="1325880"/>
-            <a:ext cx="2423160" cy="749808"/>
+            <a:off x="5806440" y="1389888"/>
+            <a:ext cx="2743200" cy="384048"/>
           </a:xfrm>
           <a:prstGeom prst="rect">
             <a:avLst/>
@@ -5933,52 +6079,30 @@
               <a:buNone/>
             </a:pPr>
             <a:r>
-              <a:rPr lang="en-US" sz="1300" dirty="0">
-                <a:solidFill>
-                  <a:schemeClr val="tx1"/>
-                </a:solidFill>
+              <a:rPr lang="en-US" sz="2200" b="1" dirty="0">
+                <a:solidFill>
+                  <a:schemeClr val="accent5"/>
+                </a:solidFill>
+                <a:latin typeface="+mj-lt" pitchFamily="34" charset="0"/>
+                <a:ea typeface="+mj-lt" pitchFamily="34" charset="-122"/>
+                <a:cs typeface="+mj-lt" pitchFamily="34" charset="-120"/>
               </a:rPr>
-              <a:t>Every variant beats the independent model at every horizon.</a:t>
+              <a:t>5 to 6x</a:t>
             </a:r>
-            <a:endParaRPr lang="en-US" sz="1300" dirty="0"/>
+            <a:endParaRPr lang="en-US" sz="2200" dirty="0"/>
           </a:p>
         </p:txBody>
       </p:sp>
       <p:sp>
         <p:nvSpPr>
-          <p:cNvPr id="11" name="Badge 2"/>
-          <p:cNvSpPr/>
-          <p:nvPr/>
-        </p:nvSpPr>
-        <p:spPr>
-          <a:xfrm>
-            <a:off x="5806440" y="2368296"/>
-            <a:ext cx="310896" cy="310896"/>
-          </a:xfrm>
-          <a:prstGeom prst="ellipse">
-            <a:avLst/>
-          </a:prstGeom>
-          <a:solidFill>
-            <a:schemeClr val="accent1"/>
-          </a:solidFill>
-          <a:ln w="12700">
-            <a:solidFill>
-              <a:schemeClr val="accent1"/>
-            </a:solidFill>
-            <a:prstDash val="solid"/>
-          </a:ln>
-        </p:spPr>
-      </p:sp>
-      <p:sp>
-        <p:nvSpPr>
-          <p:cNvPr id="12" name="Badge text 2"/>
+          <p:cNvPr id="10" name="Gap label 1"/>
           <p:cNvSpPr txBox="1"/>
           <p:nvPr/>
         </p:nvSpPr>
         <p:spPr>
           <a:xfrm>
-            <a:off x="5806440" y="2368296"/>
-            <a:ext cx="310896" cy="310896"/>
+            <a:off x="5806440" y="1801368"/>
+            <a:ext cx="2743200" cy="512064"/>
           </a:xfrm>
           <a:prstGeom prst="rect">
             <a:avLst/>
@@ -5987,80 +6111,46 @@
           <a:ln/>
         </p:spPr>
         <p:txBody>
-          <a:bodyPr wrap="square" lIns="0" tIns="0" rIns="0" bIns="0" rtlCol="0" anchor="ctr"/>
-          <a:lstStyle/>
-          <a:p>
-            <a:pPr algn="ctr" indent="0" marL="0">
-              <a:buNone/>
-            </a:pPr>
-            <a:r>
-              <a:rPr lang="en-US" sz="1200" b="1" dirty="0">
-                <a:solidFill>
-                  <a:schemeClr val="bg1"/>
-                </a:solidFill>
-              </a:rPr>
-              <a:t>2</a:t>
-            </a:r>
-            <a:endParaRPr lang="en-US" sz="1200" dirty="0"/>
-          </a:p>
-        </p:txBody>
-      </p:sp>
-      <p:sp>
-        <p:nvSpPr>
-          <p:cNvPr id="13" name="Takeaway 2"/>
-          <p:cNvSpPr txBox="1"/>
-          <p:nvPr/>
-        </p:nvSpPr>
-        <p:spPr>
-          <a:xfrm>
-            <a:off x="6263640" y="2148840"/>
-            <a:ext cx="2423160" cy="749808"/>
-          </a:xfrm>
-          <a:prstGeom prst="rect">
-            <a:avLst/>
-          </a:prstGeom>
-          <a:noFill/>
-          <a:ln/>
-        </p:spPr>
-        <p:txBody>
-          <a:bodyPr wrap="square" lIns="0" tIns="0" rIns="0" bIns="0" rtlCol="0" anchor="ctr"/>
+          <a:bodyPr wrap="square" lIns="0" tIns="0" rIns="0" bIns="0" rtlCol="0" anchor="t"/>
           <a:lstStyle/>
           <a:p>
             <a:pPr indent="0" marL="0">
               <a:buNone/>
             </a:pPr>
             <a:r>
-              <a:rPr lang="en-US" sz="1300" dirty="0">
+              <a:rPr lang="en-US" sz="1200" dirty="0">
                 <a:solidFill>
                   <a:schemeClr val="tx1"/>
                 </a:solidFill>
               </a:rPr>
-              <a:t>Downstream helps more than upstream: jams travel backwards.</a:t>
+              <a:t>higher error right after a congestion onset: 16.2 vs 2.7 mph at 15 min (3,911 onsets)</a:t>
             </a:r>
-            <a:endParaRPr lang="en-US" sz="1300" dirty="0"/>
+            <a:endParaRPr lang="en-US" sz="1200" dirty="0"/>
           </a:p>
         </p:txBody>
       </p:sp>
       <p:sp>
         <p:nvSpPr>
-          <p:cNvPr id="14" name="Badge 3"/>
+          <p:cNvPr id="11" name="Gap card 2"/>
           <p:cNvSpPr/>
           <p:nvPr/>
         </p:nvSpPr>
         <p:spPr>
           <a:xfrm>
-            <a:off x="5806440" y="3191256"/>
-            <a:ext cx="310896" cy="310896"/>
-          </a:xfrm>
-          <a:prstGeom prst="ellipse">
-            <a:avLst/>
+            <a:off x="5669280" y="2441448"/>
+            <a:ext cx="3017520" cy="1005840"/>
+          </a:xfrm>
+          <a:prstGeom prst="roundRect">
+            <a:avLst>
+              <a:gd name="adj" fmla="val 7273"/>
+            </a:avLst>
           </a:prstGeom>
           <a:solidFill>
-            <a:schemeClr val="accent1"/>
+            <a:schemeClr val="bg2"/>
           </a:solidFill>
           <a:ln w="12700">
             <a:solidFill>
-              <a:schemeClr val="accent1"/>
+              <a:schemeClr val="bg2"/>
             </a:solidFill>
             <a:prstDash val="solid"/>
           </a:ln>
@@ -6068,50 +6158,14 @@
       </p:sp>
       <p:sp>
         <p:nvSpPr>
-          <p:cNvPr id="15" name="Badge text 3"/>
+          <p:cNvPr id="12" name="Gap number 2"/>
           <p:cNvSpPr txBox="1"/>
           <p:nvPr/>
         </p:nvSpPr>
         <p:spPr>
           <a:xfrm>
-            <a:off x="5806440" y="3191256"/>
-            <a:ext cx="310896" cy="310896"/>
-          </a:xfrm>
-          <a:prstGeom prst="rect">
-            <a:avLst/>
-          </a:prstGeom>
-          <a:noFill/>
-          <a:ln/>
-        </p:spPr>
-        <p:txBody>
-          <a:bodyPr wrap="square" lIns="0" tIns="0" rIns="0" bIns="0" rtlCol="0" anchor="ctr"/>
-          <a:lstStyle/>
-          <a:p>
-            <a:pPr algn="ctr" indent="0" marL="0">
-              <a:buNone/>
-            </a:pPr>
-            <a:r>
-              <a:rPr lang="en-US" sz="1200" b="1" dirty="0">
-                <a:solidFill>
-                  <a:schemeClr val="bg1"/>
-                </a:solidFill>
-              </a:rPr>
-              <a:t>3</a:t>
-            </a:r>
-            <a:endParaRPr lang="en-US" sz="1200" dirty="0"/>
-          </a:p>
-        </p:txBody>
-      </p:sp>
-      <p:sp>
-        <p:nvSpPr>
-          <p:cNvPr id="16" name="Takeaway 3"/>
-          <p:cNvSpPr txBox="1"/>
-          <p:nvPr/>
-        </p:nvSpPr>
-        <p:spPr>
-          <a:xfrm>
-            <a:off x="6263640" y="2971800"/>
-            <a:ext cx="2423160" cy="749808"/>
+            <a:off x="5806440" y="2505456"/>
+            <a:ext cx="2743200" cy="384048"/>
           </a:xfrm>
           <a:prstGeom prst="rect">
             <a:avLst/>
@@ -6127,52 +6181,30 @@
               <a:buNone/>
             </a:pPr>
             <a:r>
-              <a:rPr lang="en-US" sz="1300" dirty="0">
-                <a:solidFill>
-                  <a:schemeClr val="tx1"/>
-                </a:solidFill>
+              <a:rPr lang="en-US" sz="2200" b="1" dirty="0">
+                <a:solidFill>
+                  <a:schemeClr val="accent2"/>
+                </a:solidFill>
+                <a:latin typeface="+mj-lt" pitchFamily="34" charset="0"/>
+                <a:ea typeface="+mj-lt" pitchFamily="34" charset="-122"/>
+                <a:cs typeface="+mj-lt" pitchFamily="34" charset="-120"/>
               </a:rPr>
-              <a:t>Both directions: -3.5%, -2.6%, -1.4% MAE, and -11% right after onsets.</a:t>
+              <a:t>0.20 vs 0.00</a:t>
             </a:r>
-            <a:endParaRPr lang="en-US" sz="1300" dirty="0"/>
+            <a:endParaRPr lang="en-US" sz="2200" dirty="0"/>
           </a:p>
         </p:txBody>
       </p:sp>
       <p:sp>
         <p:nvSpPr>
-          <p:cNvPr id="17" name="Badge 4"/>
-          <p:cNvSpPr/>
-          <p:nvPr/>
-        </p:nvSpPr>
-        <p:spPr>
-          <a:xfrm>
-            <a:off x="5806440" y="4014216"/>
-            <a:ext cx="310896" cy="310896"/>
-          </a:xfrm>
-          <a:prstGeom prst="ellipse">
-            <a:avLst/>
-          </a:prstGeom>
-          <a:solidFill>
-            <a:schemeClr val="accent5"/>
-          </a:solidFill>
-          <a:ln w="12700">
-            <a:solidFill>
-              <a:schemeClr val="accent5"/>
-            </a:solidFill>
-            <a:prstDash val="solid"/>
-          </a:ln>
-        </p:spPr>
-      </p:sp>
-      <p:sp>
-        <p:nvSpPr>
-          <p:cNvPr id="18" name="Badge text 4"/>
+          <p:cNvPr id="13" name="Gap label 2"/>
           <p:cNvSpPr txBox="1"/>
           <p:nvPr/>
         </p:nvSpPr>
         <p:spPr>
           <a:xfrm>
-            <a:off x="5806440" y="4014216"/>
-            <a:ext cx="310896" cy="310896"/>
+            <a:off x="5806440" y="2916936"/>
+            <a:ext cx="2743200" cy="512064"/>
           </a:xfrm>
           <a:prstGeom prst="rect">
             <a:avLst/>
@@ -6181,57 +6213,123 @@
           <a:ln/>
         </p:spPr>
         <p:txBody>
-          <a:bodyPr wrap="square" lIns="0" tIns="0" rIns="0" bIns="0" rtlCol="0" anchor="ctr"/>
-          <a:lstStyle/>
-          <a:p>
-            <a:pPr algn="ctr" indent="0" marL="0">
-              <a:buNone/>
-            </a:pPr>
-            <a:r>
-              <a:rPr lang="en-US" sz="1200" b="1" dirty="0">
-                <a:solidFill>
-                  <a:schemeClr val="bg1"/>
-                </a:solidFill>
-              </a:rPr>
-              <a:t>4</a:t>
-            </a:r>
-            <a:endParaRPr lang="en-US" sz="1200" dirty="0"/>
-          </a:p>
-        </p:txBody>
-      </p:sp>
-      <p:sp>
-        <p:nvSpPr>
-          <p:cNvPr id="19" name="Takeaway 4"/>
-          <p:cNvSpPr txBox="1"/>
-          <p:nvPr/>
-        </p:nvSpPr>
-        <p:spPr>
-          <a:xfrm>
-            <a:off x="6263640" y="3794760"/>
-            <a:ext cx="2423160" cy="749808"/>
-          </a:xfrm>
-          <a:prstGeom prst="rect">
-            <a:avLst/>
-          </a:prstGeom>
-          <a:noFill/>
-          <a:ln/>
-        </p:spPr>
-        <p:txBody>
-          <a:bodyPr wrap="square" lIns="0" tIns="0" rIns="0" bIns="0" rtlCol="0" anchor="ctr"/>
+          <a:bodyPr wrap="square" lIns="0" tIns="0" rIns="0" bIns="0" rtlCol="0" anchor="t"/>
           <a:lstStyle/>
           <a:p>
             <a:pPr indent="0" marL="0">
               <a:buNone/>
             </a:pPr>
             <a:r>
-              <a:rPr lang="en-US" sz="1300" dirty="0">
+              <a:rPr lang="en-US" sz="1200" dirty="0">
                 <a:solidFill>
                   <a:schemeClr val="tx1"/>
                 </a:solidFill>
               </a:rPr>
-              <a:t>Not enough: linked errors stay correlated. A graph model must learn which neighbours matter, over several hops.</a:t>
+              <a:t>error correlation of linked vs unconnected sensors at 60 min</a:t>
             </a:r>
-            <a:endParaRPr lang="en-US" sz="1300" dirty="0"/>
+            <a:endParaRPr lang="en-US" sz="1200" dirty="0"/>
+          </a:p>
+        </p:txBody>
+      </p:sp>
+      <p:sp>
+        <p:nvSpPr>
+          <p:cNvPr id="14" name="Gap card 3"/>
+          <p:cNvSpPr/>
+          <p:nvPr/>
+        </p:nvSpPr>
+        <p:spPr>
+          <a:xfrm>
+            <a:off x="5669280" y="3557016"/>
+            <a:ext cx="3017520" cy="1005840"/>
+          </a:xfrm>
+          <a:prstGeom prst="roundRect">
+            <a:avLst>
+              <a:gd name="adj" fmla="val 7273"/>
+            </a:avLst>
+          </a:prstGeom>
+          <a:solidFill>
+            <a:schemeClr val="bg2"/>
+          </a:solidFill>
+          <a:ln w="12700">
+            <a:solidFill>
+              <a:schemeClr val="bg2"/>
+            </a:solidFill>
+            <a:prstDash val="solid"/>
+          </a:ln>
+        </p:spPr>
+      </p:sp>
+      <p:sp>
+        <p:nvSpPr>
+          <p:cNvPr id="15" name="Gap number 3"/>
+          <p:cNvSpPr txBox="1"/>
+          <p:nvPr/>
+        </p:nvSpPr>
+        <p:spPr>
+          <a:xfrm>
+            <a:off x="5806440" y="3621024"/>
+            <a:ext cx="2743200" cy="384048"/>
+          </a:xfrm>
+          <a:prstGeom prst="rect">
+            <a:avLst/>
+          </a:prstGeom>
+          <a:noFill/>
+          <a:ln/>
+        </p:spPr>
+        <p:txBody>
+          <a:bodyPr wrap="square" lIns="0" tIns="0" rIns="0" bIns="0" rtlCol="0" anchor="ctr"/>
+          <a:lstStyle/>
+          <a:p>
+            <a:pPr indent="0" marL="0">
+              <a:buNone/>
+            </a:pPr>
+            <a:r>
+              <a:rPr lang="en-US" sz="2200" b="1" dirty="0">
+                <a:solidFill>
+                  <a:schemeClr val="accent1"/>
+                </a:solidFill>
+                <a:latin typeface="+mj-lt" pitchFamily="34" charset="0"/>
+                <a:ea typeface="+mj-lt" pitchFamily="34" charset="-122"/>
+                <a:cs typeface="+mj-lt" pitchFamily="34" charset="-120"/>
+              </a:rPr>
+              <a:t>3.02 to 4.01</a:t>
+            </a:r>
+            <a:endParaRPr lang="en-US" sz="2200" dirty="0"/>
+          </a:p>
+        </p:txBody>
+      </p:sp>
+      <p:sp>
+        <p:nvSpPr>
+          <p:cNvPr id="16" name="Gap label 3"/>
+          <p:cNvSpPr txBox="1"/>
+          <p:nvPr/>
+        </p:nvSpPr>
+        <p:spPr>
+          <a:xfrm>
+            <a:off x="5806440" y="4032504"/>
+            <a:ext cx="2743200" cy="512064"/>
+          </a:xfrm>
+          <a:prstGeom prst="rect">
+            <a:avLst/>
+          </a:prstGeom>
+          <a:noFill/>
+          <a:ln/>
+        </p:spPr>
+        <p:txBody>
+          <a:bodyPr wrap="square" lIns="0" tIns="0" rIns="0" bIns="0" rtlCol="0" anchor="t"/>
+          <a:lstStyle/>
+          <a:p>
+            <a:pPr indent="0" marL="0">
+              <a:buNone/>
+            </a:pPr>
+            <a:r>
+              <a:rPr lang="en-US" sz="1200" dirty="0">
+                <a:solidFill>
+                  <a:schemeClr val="tx1"/>
+                </a:solidFill>
+              </a:rPr>
+              <a:t>XGBoost MAE (mph) rises from 15 to 60 min</a:t>
+            </a:r>
+            <a:endParaRPr lang="en-US" sz="1200" dirty="0"/>
           </a:p>
         </p:txBody>
       </p:sp>
@@ -6334,13 +6432,13 @@
             <a:r>
               <a:rPr lang="en-US" sz="3000" b="1" dirty="0">
                 <a:solidFill>
-                  <a:schemeClr val="bg1"/>
+                  <a:schemeClr val="tx1"/>
                 </a:solidFill>
                 <a:latin typeface="+mj-lt" pitchFamily="34" charset="0"/>
                 <a:ea typeface="+mj-lt" pitchFamily="34" charset="-122"/>
                 <a:cs typeface="+mj-lt" pitchFamily="34" charset="-120"/>
               </a:rPr>
-              <a:t>Conclusion and next steps</a:t>
+              <a:t>Neighbour speeds close part of the gap</a:t>
             </a:r>
             <a:endParaRPr lang="en-US" sz="3000" dirty="0"/>
           </a:p>
@@ -6448,25 +6546,565 @@
             <a:r>
               <a:rPr lang="en-US" sz="1600" dirty="0">
                 <a:solidFill>
-                  <a:schemeClr val="bg2"/>
+                  <a:schemeClr val="accent6"/>
                 </a:solidFill>
               </a:rPr>
-              <a:t>The AML part is complete: pipeline, six baselines and four gap experiments</a:t>
+              <a:t>XGBoost with hand-made upstream and downstream features, test MAE (mph)</a:t>
             </a:r>
             <a:endParaRPr lang="en-US" sz="1600" dirty="0"/>
           </a:p>
         </p:txBody>
       </p:sp>
-      <p:sp>
-        <p:nvSpPr>
-          <p:cNvPr id="7" name="Badge 1"/>
+      <p:graphicFrame>
+        <p:nvGraphicFramePr>
+          <p:cNvPr id="7" name="Neighbour experiment chart" descr=""/>
+          <p:cNvGraphicFramePr/>
+          <p:nvPr/>
+        </p:nvGraphicFramePr>
+        <p:xfrm>
+          <a:off x="365760" y="1280160"/>
+          <a:ext cx="5212080" cy="3383280"/>
+        </p:xfrm>
+        <a:graphic xmlns:a="http://schemas.openxmlformats.org/drawingml/2006/main">
+          <a:graphicData uri="http://schemas.openxmlformats.org/drawingml/2006/chart">
+            <c:chart xmlns:c="http://schemas.openxmlformats.org/drawingml/2006/chart" r:id="rId1"/>
+          </a:graphicData>
+        </a:graphic>
+      </p:graphicFrame>
+      <p:sp>
+        <p:nvSpPr>
+          <p:cNvPr id="8" name="Badge 1"/>
           <p:cNvSpPr/>
           <p:nvPr/>
         </p:nvSpPr>
         <p:spPr>
           <a:xfrm>
-            <a:off x="457200" y="1682496"/>
-            <a:ext cx="384048" cy="384048"/>
+            <a:off x="5806440" y="1545336"/>
+            <a:ext cx="310896" cy="310896"/>
+          </a:xfrm>
+          <a:prstGeom prst="ellipse">
+            <a:avLst/>
+          </a:prstGeom>
+          <a:solidFill>
+            <a:schemeClr val="accent1"/>
+          </a:solidFill>
+          <a:ln w="12700">
+            <a:solidFill>
+              <a:schemeClr val="accent1"/>
+            </a:solidFill>
+            <a:prstDash val="solid"/>
+          </a:ln>
+        </p:spPr>
+      </p:sp>
+      <p:sp>
+        <p:nvSpPr>
+          <p:cNvPr id="9" name="Badge text 1"/>
+          <p:cNvSpPr txBox="1"/>
+          <p:nvPr/>
+        </p:nvSpPr>
+        <p:spPr>
+          <a:xfrm>
+            <a:off x="5806440" y="1545336"/>
+            <a:ext cx="310896" cy="310896"/>
+          </a:xfrm>
+          <a:prstGeom prst="rect">
+            <a:avLst/>
+          </a:prstGeom>
+          <a:noFill/>
+          <a:ln/>
+        </p:spPr>
+        <p:txBody>
+          <a:bodyPr wrap="square" lIns="0" tIns="0" rIns="0" bIns="0" rtlCol="0" anchor="ctr"/>
+          <a:lstStyle/>
+          <a:p>
+            <a:pPr algn="ctr" indent="0" marL="0">
+              <a:buNone/>
+            </a:pPr>
+            <a:r>
+              <a:rPr lang="en-US" sz="1200" b="1" dirty="0">
+                <a:solidFill>
+                  <a:schemeClr val="bg1"/>
+                </a:solidFill>
+              </a:rPr>
+              <a:t>1</a:t>
+            </a:r>
+            <a:endParaRPr lang="en-US" sz="1200" dirty="0"/>
+          </a:p>
+        </p:txBody>
+      </p:sp>
+      <p:sp>
+        <p:nvSpPr>
+          <p:cNvPr id="10" name="Takeaway 1"/>
+          <p:cNvSpPr txBox="1"/>
+          <p:nvPr/>
+        </p:nvSpPr>
+        <p:spPr>
+          <a:xfrm>
+            <a:off x="6263640" y="1325880"/>
+            <a:ext cx="2423160" cy="749808"/>
+          </a:xfrm>
+          <a:prstGeom prst="rect">
+            <a:avLst/>
+          </a:prstGeom>
+          <a:noFill/>
+          <a:ln/>
+        </p:spPr>
+        <p:txBody>
+          <a:bodyPr wrap="square" lIns="0" tIns="0" rIns="0" bIns="0" rtlCol="0" anchor="ctr"/>
+          <a:lstStyle/>
+          <a:p>
+            <a:pPr indent="0" marL="0">
+              <a:buNone/>
+            </a:pPr>
+            <a:r>
+              <a:rPr lang="en-US" sz="1300" dirty="0">
+                <a:solidFill>
+                  <a:schemeClr val="tx1"/>
+                </a:solidFill>
+              </a:rPr>
+              <a:t>Every variant beats the independent model at every horizon.</a:t>
+            </a:r>
+            <a:endParaRPr lang="en-US" sz="1300" dirty="0"/>
+          </a:p>
+        </p:txBody>
+      </p:sp>
+      <p:sp>
+        <p:nvSpPr>
+          <p:cNvPr id="11" name="Badge 2"/>
+          <p:cNvSpPr/>
+          <p:nvPr/>
+        </p:nvSpPr>
+        <p:spPr>
+          <a:xfrm>
+            <a:off x="5806440" y="2368296"/>
+            <a:ext cx="310896" cy="310896"/>
+          </a:xfrm>
+          <a:prstGeom prst="ellipse">
+            <a:avLst/>
+          </a:prstGeom>
+          <a:solidFill>
+            <a:schemeClr val="accent1"/>
+          </a:solidFill>
+          <a:ln w="12700">
+            <a:solidFill>
+              <a:schemeClr val="accent1"/>
+            </a:solidFill>
+            <a:prstDash val="solid"/>
+          </a:ln>
+        </p:spPr>
+      </p:sp>
+      <p:sp>
+        <p:nvSpPr>
+          <p:cNvPr id="12" name="Badge text 2"/>
+          <p:cNvSpPr txBox="1"/>
+          <p:nvPr/>
+        </p:nvSpPr>
+        <p:spPr>
+          <a:xfrm>
+            <a:off x="5806440" y="2368296"/>
+            <a:ext cx="310896" cy="310896"/>
+          </a:xfrm>
+          <a:prstGeom prst="rect">
+            <a:avLst/>
+          </a:prstGeom>
+          <a:noFill/>
+          <a:ln/>
+        </p:spPr>
+        <p:txBody>
+          <a:bodyPr wrap="square" lIns="0" tIns="0" rIns="0" bIns="0" rtlCol="0" anchor="ctr"/>
+          <a:lstStyle/>
+          <a:p>
+            <a:pPr algn="ctr" indent="0" marL="0">
+              <a:buNone/>
+            </a:pPr>
+            <a:r>
+              <a:rPr lang="en-US" sz="1200" b="1" dirty="0">
+                <a:solidFill>
+                  <a:schemeClr val="bg1"/>
+                </a:solidFill>
+              </a:rPr>
+              <a:t>2</a:t>
+            </a:r>
+            <a:endParaRPr lang="en-US" sz="1200" dirty="0"/>
+          </a:p>
+        </p:txBody>
+      </p:sp>
+      <p:sp>
+        <p:nvSpPr>
+          <p:cNvPr id="13" name="Takeaway 2"/>
+          <p:cNvSpPr txBox="1"/>
+          <p:nvPr/>
+        </p:nvSpPr>
+        <p:spPr>
+          <a:xfrm>
+            <a:off x="6263640" y="2148840"/>
+            <a:ext cx="2423160" cy="749808"/>
+          </a:xfrm>
+          <a:prstGeom prst="rect">
+            <a:avLst/>
+          </a:prstGeom>
+          <a:noFill/>
+          <a:ln/>
+        </p:spPr>
+        <p:txBody>
+          <a:bodyPr wrap="square" lIns="0" tIns="0" rIns="0" bIns="0" rtlCol="0" anchor="ctr"/>
+          <a:lstStyle/>
+          <a:p>
+            <a:pPr indent="0" marL="0">
+              <a:buNone/>
+            </a:pPr>
+            <a:r>
+              <a:rPr lang="en-US" sz="1300" dirty="0">
+                <a:solidFill>
+                  <a:schemeClr val="tx1"/>
+                </a:solidFill>
+              </a:rPr>
+              <a:t>Downstream helps more than upstream: jams travel backwards.</a:t>
+            </a:r>
+            <a:endParaRPr lang="en-US" sz="1300" dirty="0"/>
+          </a:p>
+        </p:txBody>
+      </p:sp>
+      <p:sp>
+        <p:nvSpPr>
+          <p:cNvPr id="14" name="Badge 3"/>
+          <p:cNvSpPr/>
+          <p:nvPr/>
+        </p:nvSpPr>
+        <p:spPr>
+          <a:xfrm>
+            <a:off x="5806440" y="3191256"/>
+            <a:ext cx="310896" cy="310896"/>
+          </a:xfrm>
+          <a:prstGeom prst="ellipse">
+            <a:avLst/>
+          </a:prstGeom>
+          <a:solidFill>
+            <a:schemeClr val="accent1"/>
+          </a:solidFill>
+          <a:ln w="12700">
+            <a:solidFill>
+              <a:schemeClr val="accent1"/>
+            </a:solidFill>
+            <a:prstDash val="solid"/>
+          </a:ln>
+        </p:spPr>
+      </p:sp>
+      <p:sp>
+        <p:nvSpPr>
+          <p:cNvPr id="15" name="Badge text 3"/>
+          <p:cNvSpPr txBox="1"/>
+          <p:nvPr/>
+        </p:nvSpPr>
+        <p:spPr>
+          <a:xfrm>
+            <a:off x="5806440" y="3191256"/>
+            <a:ext cx="310896" cy="310896"/>
+          </a:xfrm>
+          <a:prstGeom prst="rect">
+            <a:avLst/>
+          </a:prstGeom>
+          <a:noFill/>
+          <a:ln/>
+        </p:spPr>
+        <p:txBody>
+          <a:bodyPr wrap="square" lIns="0" tIns="0" rIns="0" bIns="0" rtlCol="0" anchor="ctr"/>
+          <a:lstStyle/>
+          <a:p>
+            <a:pPr algn="ctr" indent="0" marL="0">
+              <a:buNone/>
+            </a:pPr>
+            <a:r>
+              <a:rPr lang="en-US" sz="1200" b="1" dirty="0">
+                <a:solidFill>
+                  <a:schemeClr val="bg1"/>
+                </a:solidFill>
+              </a:rPr>
+              <a:t>3</a:t>
+            </a:r>
+            <a:endParaRPr lang="en-US" sz="1200" dirty="0"/>
+          </a:p>
+        </p:txBody>
+      </p:sp>
+      <p:sp>
+        <p:nvSpPr>
+          <p:cNvPr id="16" name="Takeaway 3"/>
+          <p:cNvSpPr txBox="1"/>
+          <p:nvPr/>
+        </p:nvSpPr>
+        <p:spPr>
+          <a:xfrm>
+            <a:off x="6263640" y="2971800"/>
+            <a:ext cx="2423160" cy="749808"/>
+          </a:xfrm>
+          <a:prstGeom prst="rect">
+            <a:avLst/>
+          </a:prstGeom>
+          <a:noFill/>
+          <a:ln/>
+        </p:spPr>
+        <p:txBody>
+          <a:bodyPr wrap="square" lIns="0" tIns="0" rIns="0" bIns="0" rtlCol="0" anchor="ctr"/>
+          <a:lstStyle/>
+          <a:p>
+            <a:pPr indent="0" marL="0">
+              <a:buNone/>
+            </a:pPr>
+            <a:r>
+              <a:rPr lang="en-US" sz="1300" dirty="0">
+                <a:solidFill>
+                  <a:schemeClr val="tx1"/>
+                </a:solidFill>
+              </a:rPr>
+              <a:t>Both directions: -3.5%, -2.6%, -1.4% MAE, and -11% right after onsets.</a:t>
+            </a:r>
+            <a:endParaRPr lang="en-US" sz="1300" dirty="0"/>
+          </a:p>
+        </p:txBody>
+      </p:sp>
+      <p:sp>
+        <p:nvSpPr>
+          <p:cNvPr id="17" name="Badge 4"/>
+          <p:cNvSpPr/>
+          <p:nvPr/>
+        </p:nvSpPr>
+        <p:spPr>
+          <a:xfrm>
+            <a:off x="5806440" y="4014216"/>
+            <a:ext cx="310896" cy="310896"/>
+          </a:xfrm>
+          <a:prstGeom prst="ellipse">
+            <a:avLst/>
+          </a:prstGeom>
+          <a:solidFill>
+            <a:schemeClr val="accent5"/>
+          </a:solidFill>
+          <a:ln w="12700">
+            <a:solidFill>
+              <a:schemeClr val="accent5"/>
+            </a:solidFill>
+            <a:prstDash val="solid"/>
+          </a:ln>
+        </p:spPr>
+      </p:sp>
+      <p:sp>
+        <p:nvSpPr>
+          <p:cNvPr id="18" name="Badge text 4"/>
+          <p:cNvSpPr txBox="1"/>
+          <p:nvPr/>
+        </p:nvSpPr>
+        <p:spPr>
+          <a:xfrm>
+            <a:off x="5806440" y="4014216"/>
+            <a:ext cx="310896" cy="310896"/>
+          </a:xfrm>
+          <a:prstGeom prst="rect">
+            <a:avLst/>
+          </a:prstGeom>
+          <a:noFill/>
+          <a:ln/>
+        </p:spPr>
+        <p:txBody>
+          <a:bodyPr wrap="square" lIns="0" tIns="0" rIns="0" bIns="0" rtlCol="0" anchor="ctr"/>
+          <a:lstStyle/>
+          <a:p>
+            <a:pPr algn="ctr" indent="0" marL="0">
+              <a:buNone/>
+            </a:pPr>
+            <a:r>
+              <a:rPr lang="en-US" sz="1200" b="1" dirty="0">
+                <a:solidFill>
+                  <a:schemeClr val="bg1"/>
+                </a:solidFill>
+              </a:rPr>
+              <a:t>4</a:t>
+            </a:r>
+            <a:endParaRPr lang="en-US" sz="1200" dirty="0"/>
+          </a:p>
+        </p:txBody>
+      </p:sp>
+      <p:sp>
+        <p:nvSpPr>
+          <p:cNvPr id="19" name="Takeaway 4"/>
+          <p:cNvSpPr txBox="1"/>
+          <p:nvPr/>
+        </p:nvSpPr>
+        <p:spPr>
+          <a:xfrm>
+            <a:off x="6263640" y="3794760"/>
+            <a:ext cx="2423160" cy="749808"/>
+          </a:xfrm>
+          <a:prstGeom prst="rect">
+            <a:avLst/>
+          </a:prstGeom>
+          <a:noFill/>
+          <a:ln/>
+        </p:spPr>
+        <p:txBody>
+          <a:bodyPr wrap="square" lIns="0" tIns="0" rIns="0" bIns="0" rtlCol="0" anchor="ctr"/>
+          <a:lstStyle/>
+          <a:p>
+            <a:pPr indent="0" marL="0">
+              <a:buNone/>
+            </a:pPr>
+            <a:r>
+              <a:rPr lang="en-US" sz="1300" dirty="0">
+                <a:solidFill>
+                  <a:schemeClr val="tx1"/>
+                </a:solidFill>
+              </a:rPr>
+              <a:t>Not enough: linked errors stay correlated. A graph model must learn which neighbours matter, over several hops.</a:t>
+            </a:r>
+            <a:endParaRPr lang="en-US" sz="1300" dirty="0"/>
+          </a:p>
+        </p:txBody>
+      </p:sp>
+      <p:sp>
+        <p:nvSpPr>
+          <p:cNvPr id="25" name="Slide Number Placeholder 0"/>
+          <p:cNvSpPr>
+            <a:spLocks noGrp="1"/>
+          </p:cNvSpPr>
+          <p:nvPr>
+            <p:ph type="sldNum" sz="quarter" idx="4294967295"/>
+          </p:nvPr>
+        </p:nvSpPr>
+        <p:spPr>
+          <a:xfrm>
+            <a:off x="8138160" y="4754880"/>
+            <a:ext cx="548640" cy="228600"/>
+          </a:xfrm>
+          <a:prstGeom prst="rect">
+            <a:avLst/>
+          </a:prstGeom>
+          <a:extLst>
+            <a:ext uri="{C572A759-6A51-4108-AA02-DFA0A04FC94B}">
+              <ma14:wrappingTextBoxFlag xmlns:ma14="http://schemas.microsoft.com/office/mac/drawingml/2011/main" val="0"/>
+            </a:ext>
+          </a:extLst>
+        </p:spPr>
+        <p:txBody>
+          <a:bodyPr/>
+          <a:lstStyle>
+            <a:lvl1pPr>
+              <a:defRPr sz="1000">
+                <a:solidFill>
+                  <a:schemeClr val="accent6"/>
+                </a:solidFill>
+              </a:defRPr>
+            </a:lvl1pPr>
+          </a:lstStyle>
+          <a:p>
+            <a:pPr algn="r"/>
+            <a:fld id="{F7021451-1387-4CA6-816F-3879F97B5CBC}" type="slidenum">
+              <a:rPr b="0" lang="en-US"/>
+              <a:t>11</a:t>
+            </a:fld>
+            <a:endParaRPr lang="en-US"/>
+          </a:p>
+        </p:txBody>
+      </p:sp>
+    </p:spTree>
+  </p:cSld>
+  <p:clrMapOvr>
+    <a:masterClrMapping/>
+  </p:clrMapOvr>
+</p:sld>
+</file>
+
+<file path=ppt/slides/slide12.xml><?xml version="1.0" encoding="utf-8"?>
+<p:sld xmlns:a="http://schemas.openxmlformats.org/drawingml/2006/main" xmlns:r="http://schemas.openxmlformats.org/officeDocument/2006/relationships" xmlns:p="http://schemas.openxmlformats.org/presentationml/2006/main">
+  <p:cSld name="Slide 12">
+    <p:spTree>
+      <p:nvGrpSpPr>
+        <p:cNvPr id="1" name=""/>
+        <p:cNvGrpSpPr/>
+        <p:nvPr/>
+      </p:nvGrpSpPr>
+      <p:grpSpPr>
+        <a:xfrm>
+          <a:off x="0" y="0"/>
+          <a:ext cx="0" cy="0"/>
+          <a:chOff x="0" y="0"/>
+          <a:chExt cx="0" cy="0"/>
+        </a:xfrm>
+      </p:grpSpPr>
+      <p:sp>
+        <p:nvSpPr>
+          <p:cNvPr id="2" name="Text 1"/>
+          <p:cNvSpPr/>
+          <p:nvPr>
+            <p:ph idx="101" type="title" hasCustomPrompt="1"/>
+          </p:nvPr>
+        </p:nvSpPr>
+        <p:spPr>
+          <a:xfrm>
+            <a:off x="457200" y="292608"/>
+            <a:ext cx="7406640" cy="566928"/>
+          </a:xfrm>
+          <a:prstGeom prst="rect">
+            <a:avLst/>
+          </a:prstGeom>
+          <a:noFill/>
+          <a:ln/>
+        </p:spPr>
+        <p:txBody>
+          <a:bodyPr wrap="square" lIns="0" tIns="0" rIns="0" bIns="0" rtlCol="0" anchor="ctr"/>
+          <a:lstStyle/>
+          <a:p>
+            <a:pPr algn="l" indent="0" marL="0">
+              <a:buNone/>
+            </a:pPr>
+            <a:r>
+              <a:rPr lang="en-US" sz="3000" b="1" dirty="0">
+                <a:solidFill>
+                  <a:schemeClr val="bg1"/>
+                </a:solidFill>
+                <a:latin typeface="+mj-lt" pitchFamily="34" charset="0"/>
+                <a:ea typeface="+mj-lt" pitchFamily="34" charset="-122"/>
+                <a:cs typeface="+mj-lt" pitchFamily="34" charset="-120"/>
+              </a:rPr>
+              <a:t>Conclusion and next steps</a:t>
+            </a:r>
+            <a:endParaRPr lang="en-US" sz="3000" dirty="0"/>
+          </a:p>
+        </p:txBody>
+      </p:sp>
+      <p:sp>
+        <p:nvSpPr>
+          <p:cNvPr id="3" name="Signal red"/>
+          <p:cNvSpPr/>
+          <p:nvPr/>
+        </p:nvSpPr>
+        <p:spPr>
+          <a:xfrm>
+            <a:off x="8028432" y="457200"/>
+            <a:ext cx="146304" cy="146304"/>
+          </a:xfrm>
+          <a:prstGeom prst="ellipse">
+            <a:avLst/>
+          </a:prstGeom>
+          <a:solidFill>
+            <a:schemeClr val="accent5"/>
+          </a:solidFill>
+          <a:ln w="12700">
+            <a:solidFill>
+              <a:schemeClr val="accent5"/>
+            </a:solidFill>
+            <a:prstDash val="solid"/>
+          </a:ln>
+        </p:spPr>
+      </p:sp>
+      <p:sp>
+        <p:nvSpPr>
+          <p:cNvPr id="4" name="Signal amber"/>
+          <p:cNvSpPr/>
+          <p:nvPr/>
+        </p:nvSpPr>
+        <p:spPr>
+          <a:xfrm>
+            <a:off x="8247888" y="457200"/>
+            <a:ext cx="146304" cy="146304"/>
           </a:xfrm>
           <a:prstGeom prst="ellipse">
             <a:avLst/>
@@ -6484,50 +7122,39 @@
       </p:sp>
       <p:sp>
         <p:nvSpPr>
-          <p:cNvPr id="8" name="Badge text 1"/>
+          <p:cNvPr id="5" name="Signal green"/>
+          <p:cNvSpPr/>
+          <p:nvPr/>
+        </p:nvSpPr>
+        <p:spPr>
+          <a:xfrm>
+            <a:off x="8467344" y="457200"/>
+            <a:ext cx="146304" cy="146304"/>
+          </a:xfrm>
+          <a:prstGeom prst="ellipse">
+            <a:avLst/>
+          </a:prstGeom>
+          <a:solidFill>
+            <a:schemeClr val="accent3"/>
+          </a:solidFill>
+          <a:ln w="12700">
+            <a:solidFill>
+              <a:schemeClr val="accent3"/>
+            </a:solidFill>
+            <a:prstDash val="solid"/>
+          </a:ln>
+        </p:spPr>
+      </p:sp>
+      <p:sp>
+        <p:nvSpPr>
+          <p:cNvPr id="6" name="Subtitle"/>
           <p:cNvSpPr txBox="1"/>
           <p:nvPr/>
         </p:nvSpPr>
         <p:spPr>
           <a:xfrm>
-            <a:off x="457200" y="1682496"/>
-            <a:ext cx="384048" cy="384048"/>
-          </a:xfrm>
-          <a:prstGeom prst="rect">
-            <a:avLst/>
-          </a:prstGeom>
-          <a:noFill/>
-          <a:ln/>
-        </p:spPr>
-        <p:txBody>
-          <a:bodyPr wrap="square" lIns="0" tIns="0" rIns="0" bIns="0" rtlCol="0" anchor="ctr"/>
-          <a:lstStyle/>
-          <a:p>
-            <a:pPr algn="ctr" indent="0" marL="0">
-              <a:buNone/>
-            </a:pPr>
-            <a:r>
-              <a:rPr lang="en-US" sz="1500" b="1" dirty="0">
-                <a:solidFill>
-                  <a:schemeClr val="tx1"/>
-                </a:solidFill>
-              </a:rPr>
-              <a:t>1</a:t>
-            </a:r>
-            <a:endParaRPr lang="en-US" sz="1500" dirty="0"/>
-          </a:p>
-        </p:txBody>
-      </p:sp>
-      <p:sp>
-        <p:nvSpPr>
-          <p:cNvPr id="9" name="Conclusion 1"/>
-          <p:cNvSpPr txBox="1"/>
-          <p:nvPr/>
-        </p:nvSpPr>
-        <p:spPr>
-          <a:xfrm>
-            <a:off x="1051560" y="1417320"/>
-            <a:ext cx="3566160" cy="914400"/>
+            <a:off x="457200" y="896112"/>
+            <a:ext cx="8138160" cy="292608"/>
           </a:xfrm>
           <a:prstGeom prst="rect">
             <a:avLst/>
@@ -6543,26 +7170,26 @@
               <a:buNone/>
             </a:pPr>
             <a:r>
-              <a:rPr lang="en-US" sz="1400" dirty="0">
-                <a:solidFill>
-                  <a:schemeClr val="bg1"/>
+              <a:rPr lang="en-US" sz="1600" dirty="0">
+                <a:solidFill>
+                  <a:schemeClr val="bg2"/>
                 </a:solidFill>
               </a:rPr>
-              <a:t>XGBoost is the best independent baseline: 3.02, 3.51 and 4.01 mph MAE at 15, 30 and 60 minutes.</a:t>
+              <a:t>The AML part is complete: pipeline, six baselines and four gap experiments</a:t>
             </a:r>
-            <a:endParaRPr lang="en-US" sz="1400" dirty="0"/>
+            <a:endParaRPr lang="en-US" sz="1600" dirty="0"/>
           </a:p>
         </p:txBody>
       </p:sp>
       <p:sp>
         <p:nvSpPr>
-          <p:cNvPr id="10" name="Badge 2"/>
+          <p:cNvPr id="7" name="Badge 1"/>
           <p:cNvSpPr/>
           <p:nvPr/>
         </p:nvSpPr>
         <p:spPr>
           <a:xfrm>
-            <a:off x="457200" y="2706624"/>
+            <a:off x="457200" y="1682496"/>
             <a:ext cx="384048" cy="384048"/>
           </a:xfrm>
           <a:prstGeom prst="ellipse">
@@ -6581,13 +7208,13 @@
       </p:sp>
       <p:sp>
         <p:nvSpPr>
-          <p:cNvPr id="11" name="Badge text 2"/>
+          <p:cNvPr id="8" name="Badge text 1"/>
           <p:cNvSpPr txBox="1"/>
           <p:nvPr/>
         </p:nvSpPr>
         <p:spPr>
           <a:xfrm>
-            <a:off x="457200" y="2706624"/>
+            <a:off x="457200" y="1682496"/>
             <a:ext cx="384048" cy="384048"/>
           </a:xfrm>
           <a:prstGeom prst="rect">
@@ -6609,7 +7236,7 @@
                   <a:schemeClr val="tx1"/>
                 </a:solidFill>
               </a:rPr>
-              <a:t>2</a:t>
+              <a:t>1</a:t>
             </a:r>
             <a:endParaRPr lang="en-US" sz="1500" dirty="0"/>
           </a:p>
@@ -6617,13 +7244,13 @@
       </p:sp>
       <p:sp>
         <p:nvSpPr>
-          <p:cNvPr id="12" name="Conclusion 2"/>
+          <p:cNvPr id="9" name="Conclusion 1"/>
           <p:cNvSpPr txBox="1"/>
           <p:nvPr/>
         </p:nvSpPr>
         <p:spPr>
           <a:xfrm>
-            <a:off x="1051560" y="2441448"/>
+            <a:off x="1051560" y="1417320"/>
             <a:ext cx="3566160" cy="914400"/>
           </a:xfrm>
           <a:prstGeom prst="rect">
@@ -6645,7 +7272,7 @@
                   <a:schemeClr val="bg1"/>
                 </a:solidFill>
               </a:rPr>
-              <a:t>Its errors concentrate right after congestion starts and are shared between linked sensors.</a:t>
+              <a:t>XGBoost is the best independent baseline: 3.02, 3.51 and 4.01 mph MAE at 15, 30 and 60 minutes.</a:t>
             </a:r>
             <a:endParaRPr lang="en-US" sz="1400" dirty="0"/>
           </a:p>
@@ -6653,13 +7280,13 @@
       </p:sp>
       <p:sp>
         <p:nvSpPr>
-          <p:cNvPr id="13" name="Badge 3"/>
+          <p:cNvPr id="10" name="Badge 2"/>
           <p:cNvSpPr/>
           <p:nvPr/>
         </p:nvSpPr>
         <p:spPr>
           <a:xfrm>
-            <a:off x="457200" y="3730752"/>
+            <a:off x="457200" y="2706624"/>
             <a:ext cx="384048" cy="384048"/>
           </a:xfrm>
           <a:prstGeom prst="ellipse">
@@ -6678,6 +7305,103 @@
       </p:sp>
       <p:sp>
         <p:nvSpPr>
+          <p:cNvPr id="11" name="Badge text 2"/>
+          <p:cNvSpPr txBox="1"/>
+          <p:nvPr/>
+        </p:nvSpPr>
+        <p:spPr>
+          <a:xfrm>
+            <a:off x="457200" y="2706624"/>
+            <a:ext cx="384048" cy="384048"/>
+          </a:xfrm>
+          <a:prstGeom prst="rect">
+            <a:avLst/>
+          </a:prstGeom>
+          <a:noFill/>
+          <a:ln/>
+        </p:spPr>
+        <p:txBody>
+          <a:bodyPr wrap="square" lIns="0" tIns="0" rIns="0" bIns="0" rtlCol="0" anchor="ctr"/>
+          <a:lstStyle/>
+          <a:p>
+            <a:pPr algn="ctr" indent="0" marL="0">
+              <a:buNone/>
+            </a:pPr>
+            <a:r>
+              <a:rPr lang="en-US" sz="1500" b="1" dirty="0">
+                <a:solidFill>
+                  <a:schemeClr val="tx1"/>
+                </a:solidFill>
+              </a:rPr>
+              <a:t>2</a:t>
+            </a:r>
+            <a:endParaRPr lang="en-US" sz="1500" dirty="0"/>
+          </a:p>
+        </p:txBody>
+      </p:sp>
+      <p:sp>
+        <p:nvSpPr>
+          <p:cNvPr id="12" name="Conclusion 2"/>
+          <p:cNvSpPr txBox="1"/>
+          <p:nvPr/>
+        </p:nvSpPr>
+        <p:spPr>
+          <a:xfrm>
+            <a:off x="1051560" y="2441448"/>
+            <a:ext cx="3566160" cy="914400"/>
+          </a:xfrm>
+          <a:prstGeom prst="rect">
+            <a:avLst/>
+          </a:prstGeom>
+          <a:noFill/>
+          <a:ln/>
+        </p:spPr>
+        <p:txBody>
+          <a:bodyPr wrap="square" lIns="0" tIns="0" rIns="0" bIns="0" rtlCol="0" anchor="ctr"/>
+          <a:lstStyle/>
+          <a:p>
+            <a:pPr indent="0" marL="0">
+              <a:buNone/>
+            </a:pPr>
+            <a:r>
+              <a:rPr lang="en-US" sz="1400" dirty="0">
+                <a:solidFill>
+                  <a:schemeClr val="bg1"/>
+                </a:solidFill>
+              </a:rPr>
+              <a:t>Its errors concentrate right after congestion starts and are shared between linked sensors.</a:t>
+            </a:r>
+            <a:endParaRPr lang="en-US" sz="1400" dirty="0"/>
+          </a:p>
+        </p:txBody>
+      </p:sp>
+      <p:sp>
+        <p:nvSpPr>
+          <p:cNvPr id="13" name="Badge 3"/>
+          <p:cNvSpPr/>
+          <p:nvPr/>
+        </p:nvSpPr>
+        <p:spPr>
+          <a:xfrm>
+            <a:off x="457200" y="3730752"/>
+            <a:ext cx="384048" cy="384048"/>
+          </a:xfrm>
+          <a:prstGeom prst="ellipse">
+            <a:avLst/>
+          </a:prstGeom>
+          <a:solidFill>
+            <a:schemeClr val="accent4"/>
+          </a:solidFill>
+          <a:ln w="12700">
+            <a:solidFill>
+              <a:schemeClr val="accent4"/>
+            </a:solidFill>
+            <a:prstDash val="solid"/>
+          </a:ln>
+        </p:spPr>
+      </p:sp>
+      <p:sp>
+        <p:nvSpPr>
           <p:cNvPr id="14" name="Badge text 3"/>
           <p:cNvSpPr txBox="1"/>
           <p:nvPr/>
@@ -7022,7 +7746,494 @@
             <a:pPr algn="r"/>
             <a:fld id="{F7021451-1387-4CA6-816F-3879F97B5CBC}" type="slidenum">
               <a:rPr b="0" lang="en-US"/>
-              <a:t>11</a:t>
+              <a:t>12</a:t>
+            </a:fld>
+            <a:endParaRPr lang="en-US"/>
+          </a:p>
+        </p:txBody>
+      </p:sp>
+    </p:spTree>
+  </p:cSld>
+  <p:clrMapOvr>
+    <a:masterClrMapping/>
+  </p:clrMapOvr>
+</p:sld>
+</file>
+
+<file path=ppt/slides/slide13.xml><?xml version="1.0" encoding="utf-8"?>
+<p:sld xmlns:a="http://schemas.openxmlformats.org/drawingml/2006/main" xmlns:r="http://schemas.openxmlformats.org/officeDocument/2006/relationships" xmlns:p="http://schemas.openxmlformats.org/presentationml/2006/main">
+  <p:cSld name="Slide 13">
+    <p:spTree>
+      <p:nvGrpSpPr>
+        <p:cNvPr id="1" name=""/>
+        <p:cNvGrpSpPr/>
+        <p:nvPr/>
+      </p:nvGrpSpPr>
+      <p:grpSpPr>
+        <a:xfrm>
+          <a:off x="0" y="0"/>
+          <a:ext cx="0" cy="0"/>
+          <a:chOff x="0" y="0"/>
+          <a:chExt cx="0" cy="0"/>
+        </a:xfrm>
+      </p:grpSpPr>
+      <p:sp>
+        <p:nvSpPr>
+          <p:cNvPr id="2" name="Text 1"/>
+          <p:cNvSpPr/>
+          <p:nvPr>
+            <p:ph idx="101" type="title" hasCustomPrompt="1"/>
+          </p:nvPr>
+        </p:nvSpPr>
+        <p:spPr>
+          <a:xfrm>
+            <a:off x="457200" y="292608"/>
+            <a:ext cx="7406640" cy="566928"/>
+          </a:xfrm>
+          <a:prstGeom prst="rect">
+            <a:avLst/>
+          </a:prstGeom>
+          <a:noFill/>
+          <a:ln/>
+        </p:spPr>
+        <p:txBody>
+          <a:bodyPr wrap="square" lIns="0" tIns="0" rIns="0" bIns="0" rtlCol="0" anchor="ctr"/>
+          <a:lstStyle/>
+          <a:p>
+            <a:pPr algn="l" indent="0" marL="0">
+              <a:buNone/>
+            </a:pPr>
+            <a:r>
+              <a:rPr lang="en-US" sz="3000" b="1" dirty="0">
+                <a:solidFill>
+                  <a:schemeClr val="tx1"/>
+                </a:solidFill>
+                <a:latin typeface="+mj-lt" pitchFamily="34" charset="0"/>
+                <a:ea typeface="+mj-lt" pitchFamily="34" charset="-122"/>
+                <a:cs typeface="+mj-lt" pitchFamily="34" charset="-120"/>
+              </a:rPr>
+              <a:t>References</a:t>
+            </a:r>
+            <a:endParaRPr lang="en-US" sz="3000" dirty="0"/>
+          </a:p>
+        </p:txBody>
+      </p:sp>
+      <p:sp>
+        <p:nvSpPr>
+          <p:cNvPr id="3" name="Signal red"/>
+          <p:cNvSpPr/>
+          <p:nvPr/>
+        </p:nvSpPr>
+        <p:spPr>
+          <a:xfrm>
+            <a:off x="8028432" y="457200"/>
+            <a:ext cx="146304" cy="146304"/>
+          </a:xfrm>
+          <a:prstGeom prst="ellipse">
+            <a:avLst/>
+          </a:prstGeom>
+          <a:solidFill>
+            <a:schemeClr val="accent5"/>
+          </a:solidFill>
+          <a:ln w="12700">
+            <a:solidFill>
+              <a:schemeClr val="accent5"/>
+            </a:solidFill>
+            <a:prstDash val="solid"/>
+          </a:ln>
+        </p:spPr>
+      </p:sp>
+      <p:sp>
+        <p:nvSpPr>
+          <p:cNvPr id="4" name="Signal amber"/>
+          <p:cNvSpPr/>
+          <p:nvPr/>
+        </p:nvSpPr>
+        <p:spPr>
+          <a:xfrm>
+            <a:off x="8247888" y="457200"/>
+            <a:ext cx="146304" cy="146304"/>
+          </a:xfrm>
+          <a:prstGeom prst="ellipse">
+            <a:avLst/>
+          </a:prstGeom>
+          <a:solidFill>
+            <a:schemeClr val="accent4"/>
+          </a:solidFill>
+          <a:ln w="12700">
+            <a:solidFill>
+              <a:schemeClr val="accent4"/>
+            </a:solidFill>
+            <a:prstDash val="solid"/>
+          </a:ln>
+        </p:spPr>
+      </p:sp>
+      <p:sp>
+        <p:nvSpPr>
+          <p:cNvPr id="5" name="Signal green"/>
+          <p:cNvSpPr/>
+          <p:nvPr/>
+        </p:nvSpPr>
+        <p:spPr>
+          <a:xfrm>
+            <a:off x="8467344" y="457200"/>
+            <a:ext cx="146304" cy="146304"/>
+          </a:xfrm>
+          <a:prstGeom prst="ellipse">
+            <a:avLst/>
+          </a:prstGeom>
+          <a:solidFill>
+            <a:schemeClr val="accent3"/>
+          </a:solidFill>
+          <a:ln w="12700">
+            <a:solidFill>
+              <a:schemeClr val="accent3"/>
+            </a:solidFill>
+            <a:prstDash val="solid"/>
+          </a:ln>
+        </p:spPr>
+      </p:sp>
+      <p:sp>
+        <p:nvSpPr>
+          <p:cNvPr id="6" name="Subtitle"/>
+          <p:cNvSpPr txBox="1"/>
+          <p:nvPr/>
+        </p:nvSpPr>
+        <p:spPr>
+          <a:xfrm>
+            <a:off x="457200" y="896112"/>
+            <a:ext cx="8138160" cy="292608"/>
+          </a:xfrm>
+          <a:prstGeom prst="rect">
+            <a:avLst/>
+          </a:prstGeom>
+          <a:noFill/>
+          <a:ln/>
+        </p:spPr>
+        <p:txBody>
+          <a:bodyPr wrap="square" lIns="0" tIns="0" rIns="0" bIns="0" rtlCol="0" anchor="ctr"/>
+          <a:lstStyle/>
+          <a:p>
+            <a:pPr indent="0" marL="0">
+              <a:buNone/>
+            </a:pPr>
+            <a:r>
+              <a:rPr lang="en-US" sz="1600" dirty="0">
+                <a:solidFill>
+                  <a:schemeClr val="accent6"/>
+                </a:solidFill>
+              </a:rPr>
+              <a:t>Full bibliography with DOIs and arXiv identifiers: docs/report/references.bib</a:t>
+            </a:r>
+            <a:endParaRPr lang="en-US" sz="1600" dirty="0"/>
+          </a:p>
+        </p:txBody>
+      </p:sp>
+      <p:sp>
+        <p:nvSpPr>
+          <p:cNvPr id="7" name="References column 1"/>
+          <p:cNvSpPr txBox="1"/>
+          <p:nvPr/>
+        </p:nvSpPr>
+        <p:spPr>
+          <a:xfrm>
+            <a:off x="457200" y="1325880"/>
+            <a:ext cx="4023360" cy="3246120"/>
+          </a:xfrm>
+          <a:prstGeom prst="rect">
+            <a:avLst/>
+          </a:prstGeom>
+          <a:noFill/>
+          <a:ln/>
+        </p:spPr>
+        <p:txBody>
+          <a:bodyPr wrap="square" lIns="0" tIns="0" rIns="0" bIns="0" rtlCol="0" anchor="t"/>
+          <a:lstStyle/>
+          <a:p>
+            <a:pPr indent="0" marL="0">
+              <a:spcAft>
+                <a:spcPts val="700"/>
+              </a:spcAft>
+              <a:buNone/>
+            </a:pPr>
+            <a:r>
+              <a:rPr lang="en-US" sz="1100" dirty="0">
+                <a:solidFill>
+                  <a:schemeClr val="tx1"/>
+                </a:solidFill>
+              </a:rPr>
+              <a:t>[1] Li, Yu, Shahabi, Liu. Diffusion Convolutional Recurrent Neural Network: Data-Driven Traffic Forecasting. ICLR 2018.</a:t>
+            </a:r>
+            <a:endParaRPr lang="en-US" sz="1100" dirty="0"/>
+          </a:p>
+          <a:p>
+            <a:pPr indent="0" marL="0">
+              <a:spcAft>
+                <a:spcPts val="700"/>
+              </a:spcAft>
+              <a:buNone/>
+            </a:pPr>
+            <a:r>
+              <a:rPr lang="en-US" sz="1100" dirty="0">
+                <a:solidFill>
+                  <a:schemeClr val="tx1"/>
+                </a:solidFill>
+              </a:rPr>
+              <a:t>[2] Veličković, Cucurull, Casanova, Romero, Liò, Bengio. Graph Attention Networks. ICLR 2018.</a:t>
+            </a:r>
+            <a:endParaRPr lang="en-US" sz="1100" dirty="0"/>
+          </a:p>
+          <a:p>
+            <a:pPr indent="0" marL="0">
+              <a:spcAft>
+                <a:spcPts val="700"/>
+              </a:spcAft>
+              <a:buNone/>
+            </a:pPr>
+            <a:r>
+              <a:rPr lang="en-US" sz="1100" dirty="0">
+                <a:solidFill>
+                  <a:schemeClr val="tx1"/>
+                </a:solidFill>
+              </a:rPr>
+              <a:t>[3] Yu, Yin, Zhu. Spatio-Temporal Graph Convolutional Networks. IJCAI 2018.</a:t>
+            </a:r>
+            <a:endParaRPr lang="en-US" sz="1100" dirty="0"/>
+          </a:p>
+          <a:p>
+            <a:pPr indent="0" marL="0">
+              <a:spcAft>
+                <a:spcPts val="700"/>
+              </a:spcAft>
+              <a:buNone/>
+            </a:pPr>
+            <a:r>
+              <a:rPr lang="en-US" sz="1100" dirty="0">
+                <a:solidFill>
+                  <a:schemeClr val="tx1"/>
+                </a:solidFill>
+              </a:rPr>
+              <a:t>[4] Wu, Pan, Long, Jiang, Zhang. Graph WaveNet for Deep Spatial-Temporal Graph Modeling. IJCAI 2019.</a:t>
+            </a:r>
+            <a:endParaRPr lang="en-US" sz="1100" dirty="0"/>
+          </a:p>
+          <a:p>
+            <a:pPr indent="0" marL="0">
+              <a:spcAft>
+                <a:spcPts val="700"/>
+              </a:spcAft>
+              <a:buNone/>
+            </a:pPr>
+            <a:r>
+              <a:rPr lang="en-US" sz="1100" dirty="0">
+                <a:solidFill>
+                  <a:schemeClr val="tx1"/>
+                </a:solidFill>
+              </a:rPr>
+              <a:t>[5] Zhang et al. CityFlow: A Multi-Agent Reinforcement Learning Environment for Large Scale City Traffic Scenario. WWW 2019.</a:t>
+            </a:r>
+            <a:endParaRPr lang="en-US" sz="1100" dirty="0"/>
+          </a:p>
+          <a:p>
+            <a:pPr indent="0" marL="0">
+              <a:spcAft>
+                <a:spcPts val="700"/>
+              </a:spcAft>
+              <a:buNone/>
+            </a:pPr>
+            <a:r>
+              <a:rPr lang="en-US" sz="1100" dirty="0">
+                <a:solidFill>
+                  <a:schemeClr val="tx1"/>
+                </a:solidFill>
+              </a:rPr>
+              <a:t>[6] Chen, Guestrin. XGBoost: A Scalable Tree Boosting System. KDD 2016.</a:t>
+            </a:r>
+            <a:endParaRPr lang="en-US" sz="1100" dirty="0"/>
+          </a:p>
+          <a:p>
+            <a:pPr indent="0" marL="0">
+              <a:spcAft>
+                <a:spcPts val="700"/>
+              </a:spcAft>
+              <a:buNone/>
+            </a:pPr>
+            <a:r>
+              <a:rPr lang="en-US" sz="1100" dirty="0">
+                <a:solidFill>
+                  <a:schemeClr val="tx1"/>
+                </a:solidFill>
+              </a:rPr>
+              <a:t>[7] Breiman. Random Forests. Machine Learning 45(1), 2001.</a:t>
+            </a:r>
+            <a:endParaRPr lang="en-US" sz="1100" dirty="0"/>
+          </a:p>
+        </p:txBody>
+      </p:sp>
+      <p:sp>
+        <p:nvSpPr>
+          <p:cNvPr id="8" name="References column 2"/>
+          <p:cNvSpPr txBox="1"/>
+          <p:nvPr/>
+        </p:nvSpPr>
+        <p:spPr>
+          <a:xfrm>
+            <a:off x="4663440" y="1325880"/>
+            <a:ext cx="4023360" cy="3246120"/>
+          </a:xfrm>
+          <a:prstGeom prst="rect">
+            <a:avLst/>
+          </a:prstGeom>
+          <a:noFill/>
+          <a:ln/>
+        </p:spPr>
+        <p:txBody>
+          <a:bodyPr wrap="square" lIns="0" tIns="0" rIns="0" bIns="0" rtlCol="0" anchor="t"/>
+          <a:lstStyle/>
+          <a:p>
+            <a:pPr indent="0" marL="0">
+              <a:spcAft>
+                <a:spcPts val="700"/>
+              </a:spcAft>
+              <a:buNone/>
+            </a:pPr>
+            <a:r>
+              <a:rPr lang="en-US" sz="1100" dirty="0">
+                <a:solidFill>
+                  <a:schemeClr val="tx1"/>
+                </a:solidFill>
+              </a:rPr>
+              <a:t>[8] Hochreiter, Schmidhuber. Long Short-Term Memory. Neural Computation 9(8), 1997.</a:t>
+            </a:r>
+            <a:endParaRPr lang="en-US" sz="1100" dirty="0"/>
+          </a:p>
+          <a:p>
+            <a:pPr indent="0" marL="0">
+              <a:spcAft>
+                <a:spcPts val="700"/>
+              </a:spcAft>
+              <a:buNone/>
+            </a:pPr>
+            <a:r>
+              <a:rPr lang="en-US" sz="1100" dirty="0">
+                <a:solidFill>
+                  <a:schemeClr val="tx1"/>
+                </a:solidFill>
+              </a:rPr>
+              <a:t>[9] Hoerl, Kennard. Ridge Regression: Biased Estimation for Nonorthogonal Problems. Technometrics 12(1), 1970.</a:t>
+            </a:r>
+            <a:endParaRPr lang="en-US" sz="1100" dirty="0"/>
+          </a:p>
+          <a:p>
+            <a:pPr indent="0" marL="0">
+              <a:spcAft>
+                <a:spcPts val="700"/>
+              </a:spcAft>
+              <a:buNone/>
+            </a:pPr>
+            <a:r>
+              <a:rPr lang="en-US" sz="1100" dirty="0">
+                <a:solidFill>
+                  <a:schemeClr val="tx1"/>
+                </a:solidFill>
+              </a:rPr>
+              <a:t>[10] Kingma, Ba. Adam: A Method for Stochastic Optimization. ICLR 2015.</a:t>
+            </a:r>
+            <a:endParaRPr lang="en-US" sz="1100" dirty="0"/>
+          </a:p>
+          <a:p>
+            <a:pPr indent="0" marL="0">
+              <a:spcAft>
+                <a:spcPts val="700"/>
+              </a:spcAft>
+              <a:buNone/>
+            </a:pPr>
+            <a:r>
+              <a:rPr lang="en-US" sz="1100" dirty="0">
+                <a:solidFill>
+                  <a:schemeClr val="tx1"/>
+                </a:solidFill>
+              </a:rPr>
+              <a:t>[11] Jagadish et al. Big Data and Its Technical Challenges. Communications of the ACM 57(7), 2014.</a:t>
+            </a:r>
+            <a:endParaRPr lang="en-US" sz="1100" dirty="0"/>
+          </a:p>
+          <a:p>
+            <a:pPr indent="0" marL="0">
+              <a:spcAft>
+                <a:spcPts val="700"/>
+              </a:spcAft>
+              <a:buNone/>
+            </a:pPr>
+            <a:r>
+              <a:rPr lang="en-US" sz="1100" dirty="0">
+                <a:solidFill>
+                  <a:schemeClr val="tx1"/>
+                </a:solidFill>
+              </a:rPr>
+              <a:t>[12] Kaufman, Rosset, Perlich, Stitelman. Leakage in Data Mining: Formulation, Detection, and Avoidance. ACM TKDD 6(4), 2012.</a:t>
+            </a:r>
+            <a:endParaRPr lang="en-US" sz="1100" dirty="0"/>
+          </a:p>
+          <a:p>
+            <a:pPr indent="0" marL="0">
+              <a:spcAft>
+                <a:spcPts val="700"/>
+              </a:spcAft>
+              <a:buNone/>
+            </a:pPr>
+            <a:r>
+              <a:rPr lang="en-US" sz="1100" dirty="0">
+                <a:solidFill>
+                  <a:schemeClr val="tx1"/>
+                </a:solidFill>
+              </a:rPr>
+              <a:t>[13] Hyndman, Koehler. Another Look at Measures of Forecast Accuracy. International Journal of Forecasting 22(4), 2006.</a:t>
+            </a:r>
+            <a:endParaRPr lang="en-US" sz="1100" dirty="0"/>
+          </a:p>
+        </p:txBody>
+      </p:sp>
+      <p:sp>
+        <p:nvSpPr>
+          <p:cNvPr id="25" name="Slide Number Placeholder 0"/>
+          <p:cNvSpPr>
+            <a:spLocks noGrp="1"/>
+          </p:cNvSpPr>
+          <p:nvPr>
+            <p:ph type="sldNum" sz="quarter" idx="4294967295"/>
+          </p:nvPr>
+        </p:nvSpPr>
+        <p:spPr>
+          <a:xfrm>
+            <a:off x="8138160" y="4754880"/>
+            <a:ext cx="548640" cy="228600"/>
+          </a:xfrm>
+          <a:prstGeom prst="rect">
+            <a:avLst/>
+          </a:prstGeom>
+          <a:extLst>
+            <a:ext uri="{C572A759-6A51-4108-AA02-DFA0A04FC94B}">
+              <ma14:wrappingTextBoxFlag xmlns:ma14="http://schemas.microsoft.com/office/mac/drawingml/2011/main" val="0"/>
+            </a:ext>
+          </a:extLst>
+        </p:spPr>
+        <p:txBody>
+          <a:bodyPr/>
+          <a:lstStyle>
+            <a:lvl1pPr>
+              <a:defRPr sz="1000">
+                <a:solidFill>
+                  <a:schemeClr val="accent6"/>
+                </a:solidFill>
+              </a:defRPr>
+            </a:lvl1pPr>
+          </a:lstStyle>
+          <a:p>
+            <a:pPr algn="r"/>
+            <a:fld id="{F7021451-1387-4CA6-816F-3879F97B5CBC}" type="slidenum">
+              <a:rPr b="0" lang="en-US"/>
+              <a:t>13</a:t>
             </a:fld>
             <a:endParaRPr lang="en-US"/>
           </a:p>
@@ -8101,7 +9312,7 @@
                 <a:ea typeface="+mj-lt" pitchFamily="34" charset="-122"/>
                 <a:cs typeface="+mj-lt" pitchFamily="34" charset="-120"/>
               </a:rPr>
-              <a:t>METR-LA at a glance</a:t>
+              <a:t>Research foundation</a:t>
             </a:r>
             <a:endParaRPr lang="en-US" sz="3000" dirty="0"/>
           </a:p>
@@ -8212,7 +9423,7 @@
                   <a:schemeClr val="accent6"/>
                 </a:solidFill>
               </a:rPr>
-              <a:t>207 freeway sensors in Los Angeles, one speed reading every 5 minutes</a:t>
+              <a:t>The published work this project builds on, and how each piece is used</a:t>
             </a:r>
             <a:endParaRPr lang="en-US" sz="1600" dirty="0"/>
           </a:p>
@@ -8220,18 +9431,18 @@
       </p:sp>
       <p:sp>
         <p:nvSpPr>
-          <p:cNvPr id="7" name="Stat card 1"/>
+          <p:cNvPr id="7" name="Reference card 1"/>
           <p:cNvSpPr/>
           <p:nvPr/>
         </p:nvSpPr>
         <p:spPr>
           <a:xfrm>
-            <a:off x="457200" y="1371600"/>
-            <a:ext cx="1920240" cy="1417320"/>
+            <a:off x="457200" y="1298448"/>
+            <a:ext cx="2560320" cy="1325880"/>
           </a:xfrm>
           <a:prstGeom prst="roundRect">
             <a:avLst>
-              <a:gd name="adj" fmla="val 5161"/>
+              <a:gd name="adj" fmla="val 5517"/>
             </a:avLst>
           </a:prstGeom>
           <a:solidFill>
@@ -8247,14 +9458,75 @@
       </p:sp>
       <p:sp>
         <p:nvSpPr>
-          <p:cNvPr id="8" name="Stat 1"/>
+          <p:cNvPr id="8" name="Badge 1"/>
+          <p:cNvSpPr/>
+          <p:nvPr/>
+        </p:nvSpPr>
+        <p:spPr>
+          <a:xfrm>
+            <a:off x="594360" y="1426464"/>
+            <a:ext cx="292608" cy="292608"/>
+          </a:xfrm>
+          <a:prstGeom prst="ellipse">
+            <a:avLst/>
+          </a:prstGeom>
+          <a:solidFill>
+            <a:schemeClr val="accent1"/>
+          </a:solidFill>
+          <a:ln w="12700">
+            <a:solidFill>
+              <a:schemeClr val="accent1"/>
+            </a:solidFill>
+            <a:prstDash val="solid"/>
+          </a:ln>
+        </p:spPr>
+      </p:sp>
+      <p:sp>
+        <p:nvSpPr>
+          <p:cNvPr id="9" name="Badge text 1"/>
           <p:cNvSpPr txBox="1"/>
           <p:nvPr/>
         </p:nvSpPr>
         <p:spPr>
           <a:xfrm>
-            <a:off x="594360" y="1463040"/>
-            <a:ext cx="1645920" cy="548640"/>
+            <a:off x="594360" y="1426464"/>
+            <a:ext cx="292608" cy="292608"/>
+          </a:xfrm>
+          <a:prstGeom prst="rect">
+            <a:avLst/>
+          </a:prstGeom>
+          <a:noFill/>
+          <a:ln/>
+        </p:spPr>
+        <p:txBody>
+          <a:bodyPr wrap="square" lIns="0" tIns="0" rIns="0" bIns="0" rtlCol="0" anchor="ctr"/>
+          <a:lstStyle/>
+          <a:p>
+            <a:pPr algn="ctr" indent="0" marL="0">
+              <a:buNone/>
+            </a:pPr>
+            <a:r>
+              <a:rPr lang="en-US" sz="1200" b="1" dirty="0">
+                <a:solidFill>
+                  <a:schemeClr val="bg1"/>
+                </a:solidFill>
+              </a:rPr>
+              <a:t>1</a:t>
+            </a:r>
+            <a:endParaRPr lang="en-US" sz="1200" dirty="0"/>
+          </a:p>
+        </p:txBody>
+      </p:sp>
+      <p:sp>
+        <p:nvSpPr>
+          <p:cNvPr id="10" name="Reference name 1"/>
+          <p:cNvSpPr txBox="1"/>
+          <p:nvPr/>
+        </p:nvSpPr>
+        <p:spPr>
+          <a:xfrm>
+            <a:off x="987552" y="1408176"/>
+            <a:ext cx="1920240" cy="329184"/>
           </a:xfrm>
           <a:prstGeom prst="rect">
             <a:avLst/>
@@ -8270,30 +9542,30 @@
               <a:buNone/>
             </a:pPr>
             <a:r>
-              <a:rPr lang="en-US" sz="3000" b="1" dirty="0">
-                <a:solidFill>
-                  <a:schemeClr val="accent1"/>
+              <a:rPr lang="en-US" sz="1400" b="1" dirty="0">
+                <a:solidFill>
+                  <a:schemeClr val="tx1"/>
                 </a:solidFill>
                 <a:latin typeface="+mj-lt" pitchFamily="34" charset="0"/>
                 <a:ea typeface="+mj-lt" pitchFamily="34" charset="-122"/>
                 <a:cs typeface="+mj-lt" pitchFamily="34" charset="-120"/>
               </a:rPr>
-              <a:t>207</a:t>
+              <a:t>DCRNN</a:t>
             </a:r>
-            <a:endParaRPr lang="en-US" sz="3000" dirty="0"/>
+            <a:endParaRPr lang="en-US" sz="1400" dirty="0"/>
           </a:p>
         </p:txBody>
       </p:sp>
       <p:sp>
         <p:nvSpPr>
-          <p:cNvPr id="9" name="Stat label 1"/>
+          <p:cNvPr id="11" name="Reference source 1"/>
           <p:cNvSpPr txBox="1"/>
           <p:nvPr/>
         </p:nvSpPr>
         <p:spPr>
           <a:xfrm>
-            <a:off x="594360" y="2057400"/>
-            <a:ext cx="1645920" cy="685800"/>
+            <a:off x="594360" y="1773936"/>
+            <a:ext cx="2286000" cy="274320"/>
           </a:xfrm>
           <a:prstGeom prst="rect">
             <a:avLst/>
@@ -8309,31 +9581,67 @@
               <a:buNone/>
             </a:pPr>
             <a:r>
-              <a:rPr lang="en-US" sz="1300" dirty="0">
+              <a:rPr lang="en-US" sz="1000" i="1" dirty="0">
+                <a:solidFill>
+                  <a:schemeClr val="accent6"/>
+                </a:solidFill>
+              </a:rPr>
+              <a:t>Li et al., ICLR 2018</a:t>
+            </a:r>
+            <a:endParaRPr lang="en-US" sz="1000" dirty="0"/>
+          </a:p>
+        </p:txBody>
+      </p:sp>
+      <p:sp>
+        <p:nvSpPr>
+          <p:cNvPr id="12" name="Reference role 1"/>
+          <p:cNvSpPr txBox="1"/>
+          <p:nvPr/>
+        </p:nvSpPr>
+        <p:spPr>
+          <a:xfrm>
+            <a:off x="594360" y="2048256"/>
+            <a:ext cx="2286000" cy="548640"/>
+          </a:xfrm>
+          <a:prstGeom prst="rect">
+            <a:avLst/>
+          </a:prstGeom>
+          <a:noFill/>
+          <a:ln/>
+        </p:spPr>
+        <p:txBody>
+          <a:bodyPr wrap="square" lIns="0" tIns="0" rIns="0" bIns="0" rtlCol="0" anchor="t"/>
+          <a:lstStyle/>
+          <a:p>
+            <a:pPr indent="0" marL="0">
+              <a:buNone/>
+            </a:pPr>
+            <a:r>
+              <a:rPr lang="en-US" sz="1100" dirty="0">
                 <a:solidFill>
                   <a:schemeClr val="tx1"/>
                 </a:solidFill>
               </a:rPr>
-              <a:t>sensors on a directed road graph</a:t>
+              <a:t>Diffusion on a directed graph; 12 to 15% gain over its baselines. Our data, graph and protocol reference.</a:t>
             </a:r>
-            <a:endParaRPr lang="en-US" sz="1300" dirty="0"/>
+            <a:endParaRPr lang="en-US" sz="1100" dirty="0"/>
           </a:p>
         </p:txBody>
       </p:sp>
       <p:sp>
         <p:nvSpPr>
-          <p:cNvPr id="10" name="Stat card 2"/>
+          <p:cNvPr id="13" name="Reference card 2"/>
           <p:cNvSpPr/>
           <p:nvPr/>
         </p:nvSpPr>
         <p:spPr>
           <a:xfrm>
-            <a:off x="2542032" y="1371600"/>
-            <a:ext cx="1920240" cy="1417320"/>
+            <a:off x="3291840" y="1298448"/>
+            <a:ext cx="2560320" cy="1325880"/>
           </a:xfrm>
           <a:prstGeom prst="roundRect">
             <a:avLst>
-              <a:gd name="adj" fmla="val 5161"/>
+              <a:gd name="adj" fmla="val 5517"/>
             </a:avLst>
           </a:prstGeom>
           <a:solidFill>
@@ -8349,14 +9657,75 @@
       </p:sp>
       <p:sp>
         <p:nvSpPr>
-          <p:cNvPr id="11" name="Stat 2"/>
+          <p:cNvPr id="14" name="Badge 2"/>
+          <p:cNvSpPr/>
+          <p:nvPr/>
+        </p:nvSpPr>
+        <p:spPr>
+          <a:xfrm>
+            <a:off x="3429000" y="1426464"/>
+            <a:ext cx="292608" cy="292608"/>
+          </a:xfrm>
+          <a:prstGeom prst="ellipse">
+            <a:avLst/>
+          </a:prstGeom>
+          <a:solidFill>
+            <a:schemeClr val="accent1"/>
+          </a:solidFill>
+          <a:ln w="12700">
+            <a:solidFill>
+              <a:schemeClr val="accent1"/>
+            </a:solidFill>
+            <a:prstDash val="solid"/>
+          </a:ln>
+        </p:spPr>
+      </p:sp>
+      <p:sp>
+        <p:nvSpPr>
+          <p:cNvPr id="15" name="Badge text 2"/>
           <p:cNvSpPr txBox="1"/>
           <p:nvPr/>
         </p:nvSpPr>
         <p:spPr>
           <a:xfrm>
-            <a:off x="2679192" y="1463040"/>
-            <a:ext cx="1645920" cy="548640"/>
+            <a:off x="3429000" y="1426464"/>
+            <a:ext cx="292608" cy="292608"/>
+          </a:xfrm>
+          <a:prstGeom prst="rect">
+            <a:avLst/>
+          </a:prstGeom>
+          <a:noFill/>
+          <a:ln/>
+        </p:spPr>
+        <p:txBody>
+          <a:bodyPr wrap="square" lIns="0" tIns="0" rIns="0" bIns="0" rtlCol="0" anchor="ctr"/>
+          <a:lstStyle/>
+          <a:p>
+            <a:pPr algn="ctr" indent="0" marL="0">
+              <a:buNone/>
+            </a:pPr>
+            <a:r>
+              <a:rPr lang="en-US" sz="1200" b="1" dirty="0">
+                <a:solidFill>
+                  <a:schemeClr val="bg1"/>
+                </a:solidFill>
+              </a:rPr>
+              <a:t>2</a:t>
+            </a:r>
+            <a:endParaRPr lang="en-US" sz="1200" dirty="0"/>
+          </a:p>
+        </p:txBody>
+      </p:sp>
+      <p:sp>
+        <p:nvSpPr>
+          <p:cNvPr id="16" name="Reference name 2"/>
+          <p:cNvSpPr txBox="1"/>
+          <p:nvPr/>
+        </p:nvSpPr>
+        <p:spPr>
+          <a:xfrm>
+            <a:off x="3822192" y="1408176"/>
+            <a:ext cx="1920240" cy="329184"/>
           </a:xfrm>
           <a:prstGeom prst="rect">
             <a:avLst/>
@@ -8372,30 +9741,30 @@
               <a:buNone/>
             </a:pPr>
             <a:r>
-              <a:rPr lang="en-US" sz="3000" b="1" dirty="0">
-                <a:solidFill>
-                  <a:schemeClr val="accent1"/>
+              <a:rPr lang="en-US" sz="1400" b="1" dirty="0">
+                <a:solidFill>
+                  <a:schemeClr val="tx1"/>
                 </a:solidFill>
                 <a:latin typeface="+mj-lt" pitchFamily="34" charset="0"/>
                 <a:ea typeface="+mj-lt" pitchFamily="34" charset="-122"/>
                 <a:cs typeface="+mj-lt" pitchFamily="34" charset="-120"/>
               </a:rPr>
-              <a:t>34,272</a:t>
+              <a:t>Graph attention</a:t>
             </a:r>
-            <a:endParaRPr lang="en-US" sz="3000" dirty="0"/>
+            <a:endParaRPr lang="en-US" sz="1400" dirty="0"/>
           </a:p>
         </p:txBody>
       </p:sp>
       <p:sp>
         <p:nvSpPr>
-          <p:cNvPr id="12" name="Stat label 2"/>
+          <p:cNvPr id="17" name="Reference source 2"/>
           <p:cNvSpPr txBox="1"/>
           <p:nvPr/>
         </p:nvSpPr>
         <p:spPr>
           <a:xfrm>
-            <a:off x="2679192" y="2057400"/>
-            <a:ext cx="1645920" cy="685800"/>
+            <a:off x="3429000" y="1773936"/>
+            <a:ext cx="2286000" cy="274320"/>
           </a:xfrm>
           <a:prstGeom prst="rect">
             <a:avLst/>
@@ -8411,31 +9780,67 @@
               <a:buNone/>
             </a:pPr>
             <a:r>
-              <a:rPr lang="en-US" sz="1300" dirty="0">
+              <a:rPr lang="en-US" sz="1000" i="1" dirty="0">
+                <a:solidFill>
+                  <a:schemeClr val="accent6"/>
+                </a:solidFill>
+              </a:rPr>
+              <a:t>Veličković et al., ICLR 2018</a:t>
+            </a:r>
+            <a:endParaRPr lang="en-US" sz="1000" dirty="0"/>
+          </a:p>
+        </p:txBody>
+      </p:sp>
+      <p:sp>
+        <p:nvSpPr>
+          <p:cNvPr id="18" name="Reference role 2"/>
+          <p:cNvSpPr txBox="1"/>
+          <p:nvPr/>
+        </p:nvSpPr>
+        <p:spPr>
+          <a:xfrm>
+            <a:off x="3429000" y="2048256"/>
+            <a:ext cx="2286000" cy="548640"/>
+          </a:xfrm>
+          <a:prstGeom prst="rect">
+            <a:avLst/>
+          </a:prstGeom>
+          <a:noFill/>
+          <a:ln/>
+        </p:spPr>
+        <p:txBody>
+          <a:bodyPr wrap="square" lIns="0" tIns="0" rIns="0" bIns="0" rtlCol="0" anchor="t"/>
+          <a:lstStyle/>
+          <a:p>
+            <a:pPr indent="0" marL="0">
+              <a:buNone/>
+            </a:pPr>
+            <a:r>
+              <a:rPr lang="en-US" sz="1100" dirty="0">
                 <a:solidFill>
                   <a:schemeClr val="tx1"/>
                 </a:solidFill>
               </a:rPr>
-              <a:t>readings per sensor, Mar to Jun 2012</a:t>
+              <a:t>Attention over neighbours. The attention model named in the brief.</a:t>
             </a:r>
-            <a:endParaRPr lang="en-US" sz="1300" dirty="0"/>
+            <a:endParaRPr lang="en-US" sz="1100" dirty="0"/>
           </a:p>
         </p:txBody>
       </p:sp>
       <p:sp>
         <p:nvSpPr>
-          <p:cNvPr id="13" name="Stat card 3"/>
+          <p:cNvPr id="19" name="Reference card 3"/>
           <p:cNvSpPr/>
           <p:nvPr/>
         </p:nvSpPr>
         <p:spPr>
           <a:xfrm>
-            <a:off x="4626864" y="1371600"/>
-            <a:ext cx="1920240" cy="1417320"/>
+            <a:off x="6126480" y="1298448"/>
+            <a:ext cx="2560320" cy="1325880"/>
           </a:xfrm>
           <a:prstGeom prst="roundRect">
             <a:avLst>
-              <a:gd name="adj" fmla="val 5161"/>
+              <a:gd name="adj" fmla="val 5517"/>
             </a:avLst>
           </a:prstGeom>
           <a:solidFill>
@@ -8451,14 +9856,75 @@
       </p:sp>
       <p:sp>
         <p:nvSpPr>
-          <p:cNvPr id="14" name="Stat 3"/>
+          <p:cNvPr id="20" name="Badge 3"/>
+          <p:cNvSpPr/>
+          <p:nvPr/>
+        </p:nvSpPr>
+        <p:spPr>
+          <a:xfrm>
+            <a:off x="6263640" y="1426464"/>
+            <a:ext cx="292608" cy="292608"/>
+          </a:xfrm>
+          <a:prstGeom prst="ellipse">
+            <a:avLst/>
+          </a:prstGeom>
+          <a:solidFill>
+            <a:schemeClr val="accent1"/>
+          </a:solidFill>
+          <a:ln w="12700">
+            <a:solidFill>
+              <a:schemeClr val="accent1"/>
+            </a:solidFill>
+            <a:prstDash val="solid"/>
+          </a:ln>
+        </p:spPr>
+      </p:sp>
+      <p:sp>
+        <p:nvSpPr>
+          <p:cNvPr id="21" name="Badge text 3"/>
           <p:cNvSpPr txBox="1"/>
           <p:nvPr/>
         </p:nvSpPr>
         <p:spPr>
           <a:xfrm>
-            <a:off x="4764024" y="1463040"/>
-            <a:ext cx="1645920" cy="548640"/>
+            <a:off x="6263640" y="1426464"/>
+            <a:ext cx="292608" cy="292608"/>
+          </a:xfrm>
+          <a:prstGeom prst="rect">
+            <a:avLst/>
+          </a:prstGeom>
+          <a:noFill/>
+          <a:ln/>
+        </p:spPr>
+        <p:txBody>
+          <a:bodyPr wrap="square" lIns="0" tIns="0" rIns="0" bIns="0" rtlCol="0" anchor="ctr"/>
+          <a:lstStyle/>
+          <a:p>
+            <a:pPr algn="ctr" indent="0" marL="0">
+              <a:buNone/>
+            </a:pPr>
+            <a:r>
+              <a:rPr lang="en-US" sz="1200" b="1" dirty="0">
+                <a:solidFill>
+                  <a:schemeClr val="bg1"/>
+                </a:solidFill>
+              </a:rPr>
+              <a:t>3</a:t>
+            </a:r>
+            <a:endParaRPr lang="en-US" sz="1200" dirty="0"/>
+          </a:p>
+        </p:txBody>
+      </p:sp>
+      <p:sp>
+        <p:nvSpPr>
+          <p:cNvPr id="22" name="Reference name 3"/>
+          <p:cNvSpPr txBox="1"/>
+          <p:nvPr/>
+        </p:nvSpPr>
+        <p:spPr>
+          <a:xfrm>
+            <a:off x="6656832" y="1408176"/>
+            <a:ext cx="1920240" cy="329184"/>
           </a:xfrm>
           <a:prstGeom prst="rect">
             <a:avLst/>
@@ -8474,30 +9940,30 @@
               <a:buNone/>
             </a:pPr>
             <a:r>
-              <a:rPr lang="en-US" sz="3000" b="1" dirty="0">
-                <a:solidFill>
-                  <a:schemeClr val="accent5"/>
+              <a:rPr lang="en-US" sz="1400" b="1" dirty="0">
+                <a:solidFill>
+                  <a:schemeClr val="tx1"/>
                 </a:solidFill>
                 <a:latin typeface="+mj-lt" pitchFamily="34" charset="0"/>
                 <a:ea typeface="+mj-lt" pitchFamily="34" charset="-122"/>
                 <a:cs typeface="+mj-lt" pitchFamily="34" charset="-120"/>
               </a:rPr>
-              <a:t>8.1%</a:t>
+              <a:t>STGCN, Graph WaveNet</a:t>
             </a:r>
-            <a:endParaRPr lang="en-US" sz="3000" dirty="0"/>
+            <a:endParaRPr lang="en-US" sz="1400" dirty="0"/>
           </a:p>
         </p:txBody>
       </p:sp>
       <p:sp>
         <p:nvSpPr>
-          <p:cNvPr id="15" name="Stat label 3"/>
+          <p:cNvPr id="23" name="Reference source 3"/>
           <p:cNvSpPr txBox="1"/>
           <p:nvPr/>
         </p:nvSpPr>
         <p:spPr>
           <a:xfrm>
-            <a:off x="4764024" y="2057400"/>
-            <a:ext cx="1645920" cy="685800"/>
+            <a:off x="6263640" y="1773936"/>
+            <a:ext cx="2286000" cy="274320"/>
           </a:xfrm>
           <a:prstGeom prst="rect">
             <a:avLst/>
@@ -8513,31 +9979,67 @@
               <a:buNone/>
             </a:pPr>
             <a:r>
-              <a:rPr lang="en-US" sz="1300" dirty="0">
+              <a:rPr lang="en-US" sz="1000" i="1" dirty="0">
+                <a:solidFill>
+                  <a:schemeClr val="accent6"/>
+                </a:solidFill>
+              </a:rPr>
+              <a:t>Yu 2018; Wu 2019 (IJCAI)</a:t>
+            </a:r>
+            <a:endParaRPr lang="en-US" sz="1000" dirty="0"/>
+          </a:p>
+        </p:txBody>
+      </p:sp>
+      <p:sp>
+        <p:nvSpPr>
+          <p:cNvPr id="24" name="Reference role 3"/>
+          <p:cNvSpPr txBox="1"/>
+          <p:nvPr/>
+        </p:nvSpPr>
+        <p:spPr>
+          <a:xfrm>
+            <a:off x="6263640" y="2048256"/>
+            <a:ext cx="2286000" cy="548640"/>
+          </a:xfrm>
+          <a:prstGeom prst="rect">
+            <a:avLst/>
+          </a:prstGeom>
+          <a:noFill/>
+          <a:ln/>
+        </p:spPr>
+        <p:txBody>
+          <a:bodyPr wrap="square" lIns="0" tIns="0" rIns="0" bIns="0" rtlCol="0" anchor="t"/>
+          <a:lstStyle/>
+          <a:p>
+            <a:pPr indent="0" marL="0">
+              <a:buNone/>
+            </a:pPr>
+            <a:r>
+              <a:rPr lang="en-US" sz="1100" dirty="0">
                 <a:solidFill>
                   <a:schemeClr val="tx1"/>
                 </a:solidFill>
               </a:rPr>
-              <a:t>of readings are outages: masked, never zero traffic</a:t>
+              <a:t>Convolutional graph forecasting and a learned adjacency. Graph baselines and ablations ahead.</a:t>
             </a:r>
-            <a:endParaRPr lang="en-US" sz="1300" dirty="0"/>
+            <a:endParaRPr lang="en-US" sz="1100" dirty="0"/>
           </a:p>
         </p:txBody>
       </p:sp>
       <p:sp>
         <p:nvSpPr>
-          <p:cNvPr id="16" name="Stat card 4"/>
+          <p:cNvPr id="25" name="Reference card 4"/>
           <p:cNvSpPr/>
           <p:nvPr/>
         </p:nvSpPr>
         <p:spPr>
           <a:xfrm>
-            <a:off x="6711696" y="1371600"/>
-            <a:ext cx="1920240" cy="1417320"/>
+            <a:off x="457200" y="2715768"/>
+            <a:ext cx="2560320" cy="1325880"/>
           </a:xfrm>
           <a:prstGeom prst="roundRect">
             <a:avLst>
-              <a:gd name="adj" fmla="val 5161"/>
+              <a:gd name="adj" fmla="val 5517"/>
             </a:avLst>
           </a:prstGeom>
           <a:solidFill>
@@ -8553,14 +10055,75 @@
       </p:sp>
       <p:sp>
         <p:nvSpPr>
-          <p:cNvPr id="17" name="Stat 4"/>
+          <p:cNvPr id="26" name="Badge 4"/>
+          <p:cNvSpPr/>
+          <p:nvPr/>
+        </p:nvSpPr>
+        <p:spPr>
+          <a:xfrm>
+            <a:off x="594360" y="2843784"/>
+            <a:ext cx="292608" cy="292608"/>
+          </a:xfrm>
+          <a:prstGeom prst="ellipse">
+            <a:avLst/>
+          </a:prstGeom>
+          <a:solidFill>
+            <a:schemeClr val="accent1"/>
+          </a:solidFill>
+          <a:ln w="12700">
+            <a:solidFill>
+              <a:schemeClr val="accent1"/>
+            </a:solidFill>
+            <a:prstDash val="solid"/>
+          </a:ln>
+        </p:spPr>
+      </p:sp>
+      <p:sp>
+        <p:nvSpPr>
+          <p:cNvPr id="27" name="Badge text 4"/>
           <p:cNvSpPr txBox="1"/>
           <p:nvPr/>
         </p:nvSpPr>
         <p:spPr>
           <a:xfrm>
-            <a:off x="6848856" y="1463040"/>
-            <a:ext cx="1645920" cy="548640"/>
+            <a:off x="594360" y="2843784"/>
+            <a:ext cx="292608" cy="292608"/>
+          </a:xfrm>
+          <a:prstGeom prst="rect">
+            <a:avLst/>
+          </a:prstGeom>
+          <a:noFill/>
+          <a:ln/>
+        </p:spPr>
+        <p:txBody>
+          <a:bodyPr wrap="square" lIns="0" tIns="0" rIns="0" bIns="0" rtlCol="0" anchor="ctr"/>
+          <a:lstStyle/>
+          <a:p>
+            <a:pPr algn="ctr" indent="0" marL="0">
+              <a:buNone/>
+            </a:pPr>
+            <a:r>
+              <a:rPr lang="en-US" sz="1200" b="1" dirty="0">
+                <a:solidFill>
+                  <a:schemeClr val="bg1"/>
+                </a:solidFill>
+              </a:rPr>
+              <a:t>4</a:t>
+            </a:r>
+            <a:endParaRPr lang="en-US" sz="1200" dirty="0"/>
+          </a:p>
+        </p:txBody>
+      </p:sp>
+      <p:sp>
+        <p:nvSpPr>
+          <p:cNvPr id="28" name="Reference name 4"/>
+          <p:cNvSpPr txBox="1"/>
+          <p:nvPr/>
+        </p:nvSpPr>
+        <p:spPr>
+          <a:xfrm>
+            <a:off x="987552" y="2825496"/>
+            <a:ext cx="1920240" cy="329184"/>
           </a:xfrm>
           <a:prstGeom prst="rect">
             <a:avLst/>
@@ -8576,30 +10139,30 @@
               <a:buNone/>
             </a:pPr>
             <a:r>
-              <a:rPr lang="en-US" sz="3000" b="1" dirty="0">
-                <a:solidFill>
-                  <a:schemeClr val="accent2"/>
+              <a:rPr lang="en-US" sz="1400" b="1" dirty="0">
+                <a:solidFill>
+                  <a:schemeClr val="tx1"/>
                 </a:solidFill>
                 <a:latin typeface="+mj-lt" pitchFamily="34" charset="0"/>
                 <a:ea typeface="+mj-lt" pitchFamily="34" charset="-122"/>
                 <a:cs typeface="+mj-lt" pitchFamily="34" charset="-120"/>
               </a:rPr>
-              <a:t>16 km/h</a:t>
+              <a:t>Learned baselines</a:t>
             </a:r>
-            <a:endParaRPr lang="en-US" sz="3000" dirty="0"/>
+            <a:endParaRPr lang="en-US" sz="1400" dirty="0"/>
           </a:p>
         </p:txBody>
       </p:sp>
       <p:sp>
         <p:nvSpPr>
-          <p:cNvPr id="18" name="Stat label 4"/>
+          <p:cNvPr id="29" name="Reference source 4"/>
           <p:cNvSpPr txBox="1"/>
           <p:nvPr/>
         </p:nvSpPr>
         <p:spPr>
           <a:xfrm>
-            <a:off x="6848856" y="2057400"/>
-            <a:ext cx="1645920" cy="685800"/>
+            <a:off x="594360" y="3191256"/>
+            <a:ext cx="2286000" cy="274320"/>
           </a:xfrm>
           <a:prstGeom prst="rect">
             <a:avLst/>
@@ -8615,31 +10178,67 @@
               <a:buNone/>
             </a:pPr>
             <a:r>
-              <a:rPr lang="en-US" sz="1300" dirty="0">
+              <a:rPr lang="en-US" sz="1000" i="1" dirty="0">
+                <a:solidFill>
+                  <a:schemeClr val="accent6"/>
+                </a:solidFill>
+              </a:rPr>
+              <a:t>Chen, Breiman, Hochreiter, Hoerl</a:t>
+            </a:r>
+            <a:endParaRPr lang="en-US" sz="1000" dirty="0"/>
+          </a:p>
+        </p:txBody>
+      </p:sp>
+      <p:sp>
+        <p:nvSpPr>
+          <p:cNvPr id="30" name="Reference role 4"/>
+          <p:cNvSpPr txBox="1"/>
+          <p:nvPr/>
+        </p:nvSpPr>
+        <p:spPr>
+          <a:xfrm>
+            <a:off x="594360" y="3465576"/>
+            <a:ext cx="2286000" cy="548640"/>
+          </a:xfrm>
+          <a:prstGeom prst="rect">
+            <a:avLst/>
+          </a:prstGeom>
+          <a:noFill/>
+          <a:ln/>
+        </p:spPr>
+        <p:txBody>
+          <a:bodyPr wrap="square" lIns="0" tIns="0" rIns="0" bIns="0" rtlCol="0" anchor="t"/>
+          <a:lstStyle/>
+          <a:p>
+            <a:pPr indent="0" marL="0">
+              <a:buNone/>
+            </a:pPr>
+            <a:r>
+              <a:rPr lang="en-US" sz="1100" dirty="0">
                 <a:solidFill>
                   <a:schemeClr val="tx1"/>
                 </a:solidFill>
               </a:rPr>
-              <a:t>speed at which congestion travels backwards</a:t>
+              <a:t>XGBoost, Random Forest, LSTM and Ridge: our four trained baselines.</a:t>
             </a:r>
-            <a:endParaRPr lang="en-US" sz="1300" dirty="0"/>
+            <a:endParaRPr lang="en-US" sz="1100" dirty="0"/>
           </a:p>
         </p:txBody>
       </p:sp>
       <p:sp>
         <p:nvSpPr>
-          <p:cNvPr id="19" name="Insight card 1"/>
+          <p:cNvPr id="31" name="Reference card 5"/>
           <p:cNvSpPr/>
           <p:nvPr/>
         </p:nvSpPr>
         <p:spPr>
           <a:xfrm>
-            <a:off x="457200" y="2971800"/>
-            <a:ext cx="4023360" cy="1600200"/>
+            <a:off x="3291840" y="2715768"/>
+            <a:ext cx="2560320" cy="1325880"/>
           </a:xfrm>
           <a:prstGeom prst="roundRect">
             <a:avLst>
-              <a:gd name="adj" fmla="val 4571"/>
+              <a:gd name="adj" fmla="val 5517"/>
             </a:avLst>
           </a:prstGeom>
           <a:solidFill>
@@ -8655,14 +10254,14 @@
       </p:sp>
       <p:sp>
         <p:nvSpPr>
-          <p:cNvPr id="20" name="Badge 1"/>
+          <p:cNvPr id="32" name="Badge 5"/>
           <p:cNvSpPr/>
           <p:nvPr/>
         </p:nvSpPr>
         <p:spPr>
           <a:xfrm>
-            <a:off x="640080" y="3127248"/>
-            <a:ext cx="310896" cy="310896"/>
+            <a:off x="3429000" y="2843784"/>
+            <a:ext cx="292608" cy="292608"/>
           </a:xfrm>
           <a:prstGeom prst="ellipse">
             <a:avLst/>
@@ -8680,14 +10279,14 @@
       </p:sp>
       <p:sp>
         <p:nvSpPr>
-          <p:cNvPr id="21" name="Badge text 1"/>
+          <p:cNvPr id="33" name="Badge text 5"/>
           <p:cNvSpPr txBox="1"/>
           <p:nvPr/>
         </p:nvSpPr>
         <p:spPr>
           <a:xfrm>
-            <a:off x="640080" y="3127248"/>
-            <a:ext cx="310896" cy="310896"/>
+            <a:off x="3429000" y="2843784"/>
+            <a:ext cx="292608" cy="292608"/>
           </a:xfrm>
           <a:prstGeom prst="rect">
             <a:avLst/>
@@ -8708,7 +10307,7 @@
                   <a:schemeClr val="bg1"/>
                 </a:solidFill>
               </a:rPr>
-              <a:t>1</a:t>
+              <a:t>5</a:t>
             </a:r>
             <a:endParaRPr lang="en-US" sz="1200" dirty="0"/>
           </a:p>
@@ -8716,14 +10315,14 @@
       </p:sp>
       <p:sp>
         <p:nvSpPr>
-          <p:cNvPr id="22" name="Insight title 1"/>
+          <p:cNvPr id="34" name="Reference name 5"/>
           <p:cNvSpPr txBox="1"/>
           <p:nvPr/>
         </p:nvSpPr>
         <p:spPr>
           <a:xfrm>
-            <a:off x="1097280" y="3127248"/>
-            <a:ext cx="3200400" cy="310896"/>
+            <a:off x="3822192" y="2825496"/>
+            <a:ext cx="1920240" cy="329184"/>
           </a:xfrm>
           <a:prstGeom prst="rect">
             <a:avLst/>
@@ -8739,27 +10338,30 @@
               <a:buNone/>
             </a:pPr>
             <a:r>
-              <a:rPr lang="en-US" sz="1600" b="1" dirty="0">
+              <a:rPr lang="en-US" sz="1400" b="1" dirty="0">
                 <a:solidFill>
                   <a:schemeClr val="tx1"/>
                 </a:solidFill>
+                <a:latin typeface="+mj-lt" pitchFamily="34" charset="0"/>
+                <a:ea typeface="+mj-lt" pitchFamily="34" charset="-122"/>
+                <a:cs typeface="+mj-lt" pitchFamily="34" charset="-120"/>
               </a:rPr>
-              <a:t>Missing data is mostly systemic</a:t>
+              <a:t>Leakage and metrics</a:t>
             </a:r>
-            <a:endParaRPr lang="en-US" sz="1600" dirty="0"/>
+            <a:endParaRPr lang="en-US" sz="1400" dirty="0"/>
           </a:p>
         </p:txBody>
       </p:sp>
       <p:sp>
         <p:nvSpPr>
-          <p:cNvPr id="23" name="Insight body 1"/>
+          <p:cNvPr id="35" name="Reference source 5"/>
           <p:cNvSpPr txBox="1"/>
           <p:nvPr/>
         </p:nvSpPr>
         <p:spPr>
           <a:xfrm>
-            <a:off x="640080" y="3547872"/>
-            <a:ext cx="3657600" cy="960120"/>
+            <a:off x="3429000" y="3191256"/>
+            <a:ext cx="2286000" cy="274320"/>
           </a:xfrm>
           <a:prstGeom prst="rect">
             <a:avLst/>
@@ -8775,31 +10377,67 @@
               <a:buNone/>
             </a:pPr>
             <a:r>
-              <a:rPr lang="en-US" sz="1400" dirty="0">
+              <a:rPr lang="en-US" sz="1000" i="1" dirty="0">
+                <a:solidFill>
+                  <a:schemeClr val="accent6"/>
+                </a:solidFill>
+              </a:rPr>
+              <a:t>Kaufman 2012; Hyndman 2006</a:t>
+            </a:r>
+            <a:endParaRPr lang="en-US" sz="1000" dirty="0"/>
+          </a:p>
+        </p:txBody>
+      </p:sp>
+      <p:sp>
+        <p:nvSpPr>
+          <p:cNvPr id="36" name="Reference role 5"/>
+          <p:cNvSpPr txBox="1"/>
+          <p:nvPr/>
+        </p:nvSpPr>
+        <p:spPr>
+          <a:xfrm>
+            <a:off x="3429000" y="3465576"/>
+            <a:ext cx="2286000" cy="548640"/>
+          </a:xfrm>
+          <a:prstGeom prst="rect">
+            <a:avLst/>
+          </a:prstGeom>
+          <a:noFill/>
+          <a:ln/>
+        </p:spPr>
+        <p:txBody>
+          <a:bodyPr wrap="square" lIns="0" tIns="0" rIns="0" bIns="0" rtlCol="0" anchor="t"/>
+          <a:lstStyle/>
+          <a:p>
+            <a:pPr indent="0" marL="0">
+              <a:buNone/>
+            </a:pPr>
+            <a:r>
+              <a:rPr lang="en-US" sz="1100" dirty="0">
                 <a:solidFill>
                   <a:schemeClr val="tx1"/>
                 </a:solidFill>
               </a:rPr>
-              <a:t>6.3 of the 8.1 points are whole-network outages (2,148 timestamps, up to 31.8 hours). Only 1.8 points are single-sensor failures.</a:t>
+              <a:t>Why the split is purged, and how to read MAE and MAPE.</a:t>
             </a:r>
-            <a:endParaRPr lang="en-US" sz="1400" dirty="0"/>
+            <a:endParaRPr lang="en-US" sz="1100" dirty="0"/>
           </a:p>
         </p:txBody>
       </p:sp>
       <p:sp>
         <p:nvSpPr>
-          <p:cNvPr id="24" name="Insight card 2"/>
+          <p:cNvPr id="37" name="Reference card 6"/>
           <p:cNvSpPr/>
           <p:nvPr/>
         </p:nvSpPr>
         <p:spPr>
           <a:xfrm>
-            <a:off x="4663440" y="2971800"/>
-            <a:ext cx="4023360" cy="1600200"/>
+            <a:off x="6126480" y="2715768"/>
+            <a:ext cx="2560320" cy="1325880"/>
           </a:xfrm>
           <a:prstGeom prst="roundRect">
             <a:avLst>
-              <a:gd name="adj" fmla="val 4571"/>
+              <a:gd name="adj" fmla="val 5517"/>
             </a:avLst>
           </a:prstGeom>
           <a:solidFill>
@@ -8815,14 +10453,14 @@
       </p:sp>
       <p:sp>
         <p:nvSpPr>
-          <p:cNvPr id="25" name="Badge 2"/>
+          <p:cNvPr id="38" name="Badge 6"/>
           <p:cNvSpPr/>
           <p:nvPr/>
         </p:nvSpPr>
         <p:spPr>
           <a:xfrm>
-            <a:off x="4846320" y="3127248"/>
-            <a:ext cx="310896" cy="310896"/>
+            <a:off x="6263640" y="2843784"/>
+            <a:ext cx="292608" cy="292608"/>
           </a:xfrm>
           <a:prstGeom prst="ellipse">
             <a:avLst/>
@@ -8840,14 +10478,14 @@
       </p:sp>
       <p:sp>
         <p:nvSpPr>
-          <p:cNvPr id="26" name="Badge text 2"/>
+          <p:cNvPr id="39" name="Badge text 6"/>
           <p:cNvSpPr txBox="1"/>
           <p:nvPr/>
         </p:nvSpPr>
         <p:spPr>
           <a:xfrm>
-            <a:off x="4846320" y="3127248"/>
-            <a:ext cx="310896" cy="310896"/>
+            <a:off x="6263640" y="2843784"/>
+            <a:ext cx="292608" cy="292608"/>
           </a:xfrm>
           <a:prstGeom prst="rect">
             <a:avLst/>
@@ -8868,7 +10506,7 @@
                   <a:schemeClr val="bg1"/>
                 </a:solidFill>
               </a:rPr>
-              <a:t>2</a:t>
+              <a:t>6</a:t>
             </a:r>
             <a:endParaRPr lang="en-US" sz="1200" dirty="0"/>
           </a:p>
@@ -8876,14 +10514,14 @@
       </p:sp>
       <p:sp>
         <p:nvSpPr>
-          <p:cNvPr id="27" name="Insight title 2"/>
+          <p:cNvPr id="40" name="Reference name 6"/>
           <p:cNvSpPr txBox="1"/>
           <p:nvPr/>
         </p:nvSpPr>
         <p:spPr>
           <a:xfrm>
-            <a:off x="5303520" y="3127248"/>
-            <a:ext cx="3200400" cy="310896"/>
+            <a:off x="6656832" y="2825496"/>
+            <a:ext cx="1920240" cy="329184"/>
           </a:xfrm>
           <a:prstGeom prst="rect">
             <a:avLst/>
@@ -8899,27 +10537,30 @@
               <a:buNone/>
             </a:pPr>
             <a:r>
-              <a:rPr lang="en-US" sz="1600" b="1" dirty="0">
+              <a:rPr lang="en-US" sz="1400" b="1" dirty="0">
                 <a:solidFill>
                   <a:schemeClr val="tx1"/>
                 </a:solidFill>
+                <a:latin typeface="+mj-lt" pitchFamily="34" charset="0"/>
+                <a:ea typeface="+mj-lt" pitchFamily="34" charset="-122"/>
+                <a:cs typeface="+mj-lt" pitchFamily="34" charset="-120"/>
               </a:rPr>
-              <a:t>Direction matters</a:t>
+              <a:t>CityFlow</a:t>
             </a:r>
-            <a:endParaRPr lang="en-US" sz="1600" dirty="0"/>
+            <a:endParaRPr lang="en-US" sz="1400" dirty="0"/>
           </a:p>
         </p:txBody>
       </p:sp>
       <p:sp>
         <p:nvSpPr>
-          <p:cNvPr id="28" name="Insight body 2"/>
+          <p:cNvPr id="41" name="Reference source 6"/>
           <p:cNvSpPr txBox="1"/>
           <p:nvPr/>
         </p:nvSpPr>
         <p:spPr>
           <a:xfrm>
-            <a:off x="4846320" y="3547872"/>
-            <a:ext cx="3657600" cy="960120"/>
+            <a:off x="6263640" y="3191256"/>
+            <a:ext cx="2286000" cy="274320"/>
           </a:xfrm>
           <a:prstGeom prst="rect">
             <a:avLst/>
@@ -8935,12 +10576,111 @@
               <a:buNone/>
             </a:pPr>
             <a:r>
-              <a:rPr lang="en-US" sz="1400" dirty="0">
+              <a:rPr lang="en-US" sz="1000" i="1" dirty="0">
+                <a:solidFill>
+                  <a:schemeClr val="accent6"/>
+                </a:solidFill>
+              </a:rPr>
+              <a:t>Zhang et al., WWW 2019</a:t>
+            </a:r>
+            <a:endParaRPr lang="en-US" sz="1000" dirty="0"/>
+          </a:p>
+        </p:txBody>
+      </p:sp>
+      <p:sp>
+        <p:nvSpPr>
+          <p:cNvPr id="42" name="Reference role 6"/>
+          <p:cNvSpPr txBox="1"/>
+          <p:nvPr/>
+        </p:nvSpPr>
+        <p:spPr>
+          <a:xfrm>
+            <a:off x="6263640" y="3465576"/>
+            <a:ext cx="2286000" cy="548640"/>
+          </a:xfrm>
+          <a:prstGeom prst="rect">
+            <a:avLst/>
+          </a:prstGeom>
+          <a:noFill/>
+          <a:ln/>
+        </p:spPr>
+        <p:txBody>
+          <a:bodyPr wrap="square" lIns="0" tIns="0" rIns="0" bIns="0" rtlCol="0" anchor="t"/>
+          <a:lstStyle/>
+          <a:p>
+            <a:pPr indent="0" marL="0">
+              <a:buNone/>
+            </a:pPr>
+            <a:r>
+              <a:rPr lang="en-US" sz="1100" dirty="0">
                 <a:solidFill>
                   <a:schemeClr val="tx1"/>
                 </a:solidFill>
               </a:rPr>
-              <a:t>Only 27% of 1,515 links are two-way. The downstream sensor slows first about 4 times more often, so a per-sensor model cannot see a jam coming.</a:t>
+              <a:t>Reinforcement-learning signal simulator. Simulation only, an optional later phase.</a:t>
+            </a:r>
+            <a:endParaRPr lang="en-US" sz="1100" dirty="0"/>
+          </a:p>
+        </p:txBody>
+      </p:sp>
+      <p:sp>
+        <p:nvSpPr>
+          <p:cNvPr id="43" name="Hypotheses banner"/>
+          <p:cNvSpPr/>
+          <p:nvPr/>
+        </p:nvSpPr>
+        <p:spPr>
+          <a:xfrm>
+            <a:off x="457200" y="4187952"/>
+            <a:ext cx="8229600" cy="457200"/>
+          </a:xfrm>
+          <a:prstGeom prst="roundRect">
+            <a:avLst>
+              <a:gd name="adj" fmla="val 16000"/>
+            </a:avLst>
+          </a:prstGeom>
+          <a:solidFill>
+            <a:schemeClr val="tx1"/>
+          </a:solidFill>
+          <a:ln w="12700">
+            <a:solidFill>
+              <a:schemeClr val="tx1"/>
+            </a:solidFill>
+            <a:prstDash val="solid"/>
+          </a:ln>
+        </p:spPr>
+      </p:sp>
+      <p:sp>
+        <p:nvSpPr>
+          <p:cNvPr id="44" name="Hypotheses text"/>
+          <p:cNvSpPr txBox="1"/>
+          <p:nvPr/>
+        </p:nvSpPr>
+        <p:spPr>
+          <a:xfrm>
+            <a:off x="640080" y="4187952"/>
+            <a:ext cx="7863840" cy="457200"/>
+          </a:xfrm>
+          <a:prstGeom prst="rect">
+            <a:avLst/>
+          </a:prstGeom>
+          <a:noFill/>
+          <a:ln/>
+        </p:spPr>
+        <p:txBody>
+          <a:bodyPr wrap="square" lIns="0" tIns="0" rIns="0" bIns="0" rtlCol="0" anchor="ctr"/>
+          <a:lstStyle/>
+          <a:p>
+            <a:pPr indent="0" marL="0">
+              <a:buNone/>
+            </a:pPr>
+            <a:r>
+              <a:rPr lang="en-US" sz="1400" b="1" dirty="0">
+                <a:solidFill>
+                  <a:schemeClr val="bg1"/>
+                </a:solidFill>
+              </a:rPr>
+              <a:t>Four hypotheses drawn from this literature were tested: all supported (report, Section 8.1).</a:t>
             </a:r>
             <a:endParaRPr lang="en-US" sz="1400" dirty="0"/>
           </a:p>
@@ -9051,7 +10791,7 @@
                 <a:ea typeface="+mj-lt" pitchFamily="34" charset="-122"/>
                 <a:cs typeface="+mj-lt" pitchFamily="34" charset="-120"/>
               </a:rPr>
-              <a:t>Leak-free by design</a:t>
+              <a:t>METR-LA at a glance</a:t>
             </a:r>
             <a:endParaRPr lang="en-US" sz="3000" dirty="0"/>
           </a:p>
@@ -9162,7 +10902,7 @@
                   <a:schemeClr val="accent6"/>
                 </a:solidFill>
               </a:rPr>
-              <a:t>Nothing the model is scored on may influence anything it is trained on</a:t>
+              <a:t>207 freeway sensors in Los Angeles, one speed reading every 5 minutes</a:t>
             </a:r>
             <a:endParaRPr lang="en-US" sz="1600" dirty="0"/>
           </a:p>
@@ -9170,16 +10910,451 @@
       </p:sp>
       <p:sp>
         <p:nvSpPr>
-          <p:cNvPr id="7" name="Split bar Train 70%"/>
+          <p:cNvPr id="7" name="Stat card 1"/>
           <p:cNvSpPr/>
           <p:nvPr/>
         </p:nvSpPr>
         <p:spPr>
           <a:xfrm>
             <a:off x="457200" y="1371600"/>
-            <a:ext cx="5683910" cy="502920"/>
+            <a:ext cx="1920240" cy="1417320"/>
+          </a:xfrm>
+          <a:prstGeom prst="roundRect">
+            <a:avLst>
+              <a:gd name="adj" fmla="val 5161"/>
+            </a:avLst>
+          </a:prstGeom>
+          <a:solidFill>
+            <a:schemeClr val="bg2"/>
+          </a:solidFill>
+          <a:ln w="12700">
+            <a:solidFill>
+              <a:schemeClr val="bg2"/>
+            </a:solidFill>
+            <a:prstDash val="solid"/>
+          </a:ln>
+        </p:spPr>
+      </p:sp>
+      <p:sp>
+        <p:nvSpPr>
+          <p:cNvPr id="8" name="Stat 1"/>
+          <p:cNvSpPr txBox="1"/>
+          <p:nvPr/>
+        </p:nvSpPr>
+        <p:spPr>
+          <a:xfrm>
+            <a:off x="594360" y="1463040"/>
+            <a:ext cx="1645920" cy="548640"/>
           </a:xfrm>
           <a:prstGeom prst="rect">
+            <a:avLst/>
+          </a:prstGeom>
+          <a:noFill/>
+          <a:ln/>
+        </p:spPr>
+        <p:txBody>
+          <a:bodyPr wrap="square" lIns="0" tIns="0" rIns="0" bIns="0" rtlCol="0" anchor="ctr"/>
+          <a:lstStyle/>
+          <a:p>
+            <a:pPr indent="0" marL="0">
+              <a:buNone/>
+            </a:pPr>
+            <a:r>
+              <a:rPr lang="en-US" sz="3000" b="1" dirty="0">
+                <a:solidFill>
+                  <a:schemeClr val="accent1"/>
+                </a:solidFill>
+                <a:latin typeface="+mj-lt" pitchFamily="34" charset="0"/>
+                <a:ea typeface="+mj-lt" pitchFamily="34" charset="-122"/>
+                <a:cs typeface="+mj-lt" pitchFamily="34" charset="-120"/>
+              </a:rPr>
+              <a:t>207</a:t>
+            </a:r>
+            <a:endParaRPr lang="en-US" sz="3000" dirty="0"/>
+          </a:p>
+        </p:txBody>
+      </p:sp>
+      <p:sp>
+        <p:nvSpPr>
+          <p:cNvPr id="9" name="Stat label 1"/>
+          <p:cNvSpPr txBox="1"/>
+          <p:nvPr/>
+        </p:nvSpPr>
+        <p:spPr>
+          <a:xfrm>
+            <a:off x="594360" y="2057400"/>
+            <a:ext cx="1645920" cy="685800"/>
+          </a:xfrm>
+          <a:prstGeom prst="rect">
+            <a:avLst/>
+          </a:prstGeom>
+          <a:noFill/>
+          <a:ln/>
+        </p:spPr>
+        <p:txBody>
+          <a:bodyPr wrap="square" lIns="0" tIns="0" rIns="0" bIns="0" rtlCol="0" anchor="t"/>
+          <a:lstStyle/>
+          <a:p>
+            <a:pPr indent="0" marL="0">
+              <a:buNone/>
+            </a:pPr>
+            <a:r>
+              <a:rPr lang="en-US" sz="1300" dirty="0">
+                <a:solidFill>
+                  <a:schemeClr val="tx1"/>
+                </a:solidFill>
+              </a:rPr>
+              <a:t>sensors on a directed road graph</a:t>
+            </a:r>
+            <a:endParaRPr lang="en-US" sz="1300" dirty="0"/>
+          </a:p>
+        </p:txBody>
+      </p:sp>
+      <p:sp>
+        <p:nvSpPr>
+          <p:cNvPr id="10" name="Stat card 2"/>
+          <p:cNvSpPr/>
+          <p:nvPr/>
+        </p:nvSpPr>
+        <p:spPr>
+          <a:xfrm>
+            <a:off x="2542032" y="1371600"/>
+            <a:ext cx="1920240" cy="1417320"/>
+          </a:xfrm>
+          <a:prstGeom prst="roundRect">
+            <a:avLst>
+              <a:gd name="adj" fmla="val 5161"/>
+            </a:avLst>
+          </a:prstGeom>
+          <a:solidFill>
+            <a:schemeClr val="bg2"/>
+          </a:solidFill>
+          <a:ln w="12700">
+            <a:solidFill>
+              <a:schemeClr val="bg2"/>
+            </a:solidFill>
+            <a:prstDash val="solid"/>
+          </a:ln>
+        </p:spPr>
+      </p:sp>
+      <p:sp>
+        <p:nvSpPr>
+          <p:cNvPr id="11" name="Stat 2"/>
+          <p:cNvSpPr txBox="1"/>
+          <p:nvPr/>
+        </p:nvSpPr>
+        <p:spPr>
+          <a:xfrm>
+            <a:off x="2679192" y="1463040"/>
+            <a:ext cx="1645920" cy="548640"/>
+          </a:xfrm>
+          <a:prstGeom prst="rect">
+            <a:avLst/>
+          </a:prstGeom>
+          <a:noFill/>
+          <a:ln/>
+        </p:spPr>
+        <p:txBody>
+          <a:bodyPr wrap="square" lIns="0" tIns="0" rIns="0" bIns="0" rtlCol="0" anchor="ctr"/>
+          <a:lstStyle/>
+          <a:p>
+            <a:pPr indent="0" marL="0">
+              <a:buNone/>
+            </a:pPr>
+            <a:r>
+              <a:rPr lang="en-US" sz="3000" b="1" dirty="0">
+                <a:solidFill>
+                  <a:schemeClr val="accent1"/>
+                </a:solidFill>
+                <a:latin typeface="+mj-lt" pitchFamily="34" charset="0"/>
+                <a:ea typeface="+mj-lt" pitchFamily="34" charset="-122"/>
+                <a:cs typeface="+mj-lt" pitchFamily="34" charset="-120"/>
+              </a:rPr>
+              <a:t>34,272</a:t>
+            </a:r>
+            <a:endParaRPr lang="en-US" sz="3000" dirty="0"/>
+          </a:p>
+        </p:txBody>
+      </p:sp>
+      <p:sp>
+        <p:nvSpPr>
+          <p:cNvPr id="12" name="Stat label 2"/>
+          <p:cNvSpPr txBox="1"/>
+          <p:nvPr/>
+        </p:nvSpPr>
+        <p:spPr>
+          <a:xfrm>
+            <a:off x="2679192" y="2057400"/>
+            <a:ext cx="1645920" cy="685800"/>
+          </a:xfrm>
+          <a:prstGeom prst="rect">
+            <a:avLst/>
+          </a:prstGeom>
+          <a:noFill/>
+          <a:ln/>
+        </p:spPr>
+        <p:txBody>
+          <a:bodyPr wrap="square" lIns="0" tIns="0" rIns="0" bIns="0" rtlCol="0" anchor="t"/>
+          <a:lstStyle/>
+          <a:p>
+            <a:pPr indent="0" marL="0">
+              <a:buNone/>
+            </a:pPr>
+            <a:r>
+              <a:rPr lang="en-US" sz="1300" dirty="0">
+                <a:solidFill>
+                  <a:schemeClr val="tx1"/>
+                </a:solidFill>
+              </a:rPr>
+              <a:t>readings per sensor, Mar to Jun 2012</a:t>
+            </a:r>
+            <a:endParaRPr lang="en-US" sz="1300" dirty="0"/>
+          </a:p>
+        </p:txBody>
+      </p:sp>
+      <p:sp>
+        <p:nvSpPr>
+          <p:cNvPr id="13" name="Stat card 3"/>
+          <p:cNvSpPr/>
+          <p:nvPr/>
+        </p:nvSpPr>
+        <p:spPr>
+          <a:xfrm>
+            <a:off x="4626864" y="1371600"/>
+            <a:ext cx="1920240" cy="1417320"/>
+          </a:xfrm>
+          <a:prstGeom prst="roundRect">
+            <a:avLst>
+              <a:gd name="adj" fmla="val 5161"/>
+            </a:avLst>
+          </a:prstGeom>
+          <a:solidFill>
+            <a:schemeClr val="bg2"/>
+          </a:solidFill>
+          <a:ln w="12700">
+            <a:solidFill>
+              <a:schemeClr val="bg2"/>
+            </a:solidFill>
+            <a:prstDash val="solid"/>
+          </a:ln>
+        </p:spPr>
+      </p:sp>
+      <p:sp>
+        <p:nvSpPr>
+          <p:cNvPr id="14" name="Stat 3"/>
+          <p:cNvSpPr txBox="1"/>
+          <p:nvPr/>
+        </p:nvSpPr>
+        <p:spPr>
+          <a:xfrm>
+            <a:off x="4764024" y="1463040"/>
+            <a:ext cx="1645920" cy="548640"/>
+          </a:xfrm>
+          <a:prstGeom prst="rect">
+            <a:avLst/>
+          </a:prstGeom>
+          <a:noFill/>
+          <a:ln/>
+        </p:spPr>
+        <p:txBody>
+          <a:bodyPr wrap="square" lIns="0" tIns="0" rIns="0" bIns="0" rtlCol="0" anchor="ctr"/>
+          <a:lstStyle/>
+          <a:p>
+            <a:pPr indent="0" marL="0">
+              <a:buNone/>
+            </a:pPr>
+            <a:r>
+              <a:rPr lang="en-US" sz="3000" b="1" dirty="0">
+                <a:solidFill>
+                  <a:schemeClr val="accent5"/>
+                </a:solidFill>
+                <a:latin typeface="+mj-lt" pitchFamily="34" charset="0"/>
+                <a:ea typeface="+mj-lt" pitchFamily="34" charset="-122"/>
+                <a:cs typeface="+mj-lt" pitchFamily="34" charset="-120"/>
+              </a:rPr>
+              <a:t>8.1%</a:t>
+            </a:r>
+            <a:endParaRPr lang="en-US" sz="3000" dirty="0"/>
+          </a:p>
+        </p:txBody>
+      </p:sp>
+      <p:sp>
+        <p:nvSpPr>
+          <p:cNvPr id="15" name="Stat label 3"/>
+          <p:cNvSpPr txBox="1"/>
+          <p:nvPr/>
+        </p:nvSpPr>
+        <p:spPr>
+          <a:xfrm>
+            <a:off x="4764024" y="2057400"/>
+            <a:ext cx="1645920" cy="685800"/>
+          </a:xfrm>
+          <a:prstGeom prst="rect">
+            <a:avLst/>
+          </a:prstGeom>
+          <a:noFill/>
+          <a:ln/>
+        </p:spPr>
+        <p:txBody>
+          <a:bodyPr wrap="square" lIns="0" tIns="0" rIns="0" bIns="0" rtlCol="0" anchor="t"/>
+          <a:lstStyle/>
+          <a:p>
+            <a:pPr indent="0" marL="0">
+              <a:buNone/>
+            </a:pPr>
+            <a:r>
+              <a:rPr lang="en-US" sz="1300" dirty="0">
+                <a:solidFill>
+                  <a:schemeClr val="tx1"/>
+                </a:solidFill>
+              </a:rPr>
+              <a:t>of readings are outages: masked, never zero traffic</a:t>
+            </a:r>
+            <a:endParaRPr lang="en-US" sz="1300" dirty="0"/>
+          </a:p>
+        </p:txBody>
+      </p:sp>
+      <p:sp>
+        <p:nvSpPr>
+          <p:cNvPr id="16" name="Stat card 4"/>
+          <p:cNvSpPr/>
+          <p:nvPr/>
+        </p:nvSpPr>
+        <p:spPr>
+          <a:xfrm>
+            <a:off x="6711696" y="1371600"/>
+            <a:ext cx="1920240" cy="1417320"/>
+          </a:xfrm>
+          <a:prstGeom prst="roundRect">
+            <a:avLst>
+              <a:gd name="adj" fmla="val 5161"/>
+            </a:avLst>
+          </a:prstGeom>
+          <a:solidFill>
+            <a:schemeClr val="bg2"/>
+          </a:solidFill>
+          <a:ln w="12700">
+            <a:solidFill>
+              <a:schemeClr val="bg2"/>
+            </a:solidFill>
+            <a:prstDash val="solid"/>
+          </a:ln>
+        </p:spPr>
+      </p:sp>
+      <p:sp>
+        <p:nvSpPr>
+          <p:cNvPr id="17" name="Stat 4"/>
+          <p:cNvSpPr txBox="1"/>
+          <p:nvPr/>
+        </p:nvSpPr>
+        <p:spPr>
+          <a:xfrm>
+            <a:off x="6848856" y="1463040"/>
+            <a:ext cx="1645920" cy="548640"/>
+          </a:xfrm>
+          <a:prstGeom prst="rect">
+            <a:avLst/>
+          </a:prstGeom>
+          <a:noFill/>
+          <a:ln/>
+        </p:spPr>
+        <p:txBody>
+          <a:bodyPr wrap="square" lIns="0" tIns="0" rIns="0" bIns="0" rtlCol="0" anchor="ctr"/>
+          <a:lstStyle/>
+          <a:p>
+            <a:pPr indent="0" marL="0">
+              <a:buNone/>
+            </a:pPr>
+            <a:r>
+              <a:rPr lang="en-US" sz="3000" b="1" dirty="0">
+                <a:solidFill>
+                  <a:schemeClr val="accent2"/>
+                </a:solidFill>
+                <a:latin typeface="+mj-lt" pitchFamily="34" charset="0"/>
+                <a:ea typeface="+mj-lt" pitchFamily="34" charset="-122"/>
+                <a:cs typeface="+mj-lt" pitchFamily="34" charset="-120"/>
+              </a:rPr>
+              <a:t>16 km/h</a:t>
+            </a:r>
+            <a:endParaRPr lang="en-US" sz="3000" dirty="0"/>
+          </a:p>
+        </p:txBody>
+      </p:sp>
+      <p:sp>
+        <p:nvSpPr>
+          <p:cNvPr id="18" name="Stat label 4"/>
+          <p:cNvSpPr txBox="1"/>
+          <p:nvPr/>
+        </p:nvSpPr>
+        <p:spPr>
+          <a:xfrm>
+            <a:off x="6848856" y="2057400"/>
+            <a:ext cx="1645920" cy="685800"/>
+          </a:xfrm>
+          <a:prstGeom prst="rect">
+            <a:avLst/>
+          </a:prstGeom>
+          <a:noFill/>
+          <a:ln/>
+        </p:spPr>
+        <p:txBody>
+          <a:bodyPr wrap="square" lIns="0" tIns="0" rIns="0" bIns="0" rtlCol="0" anchor="t"/>
+          <a:lstStyle/>
+          <a:p>
+            <a:pPr indent="0" marL="0">
+              <a:buNone/>
+            </a:pPr>
+            <a:r>
+              <a:rPr lang="en-US" sz="1300" dirty="0">
+                <a:solidFill>
+                  <a:schemeClr val="tx1"/>
+                </a:solidFill>
+              </a:rPr>
+              <a:t>speed at which congestion travels backwards</a:t>
+            </a:r>
+            <a:endParaRPr lang="en-US" sz="1300" dirty="0"/>
+          </a:p>
+        </p:txBody>
+      </p:sp>
+      <p:sp>
+        <p:nvSpPr>
+          <p:cNvPr id="19" name="Insight card 1"/>
+          <p:cNvSpPr/>
+          <p:nvPr/>
+        </p:nvSpPr>
+        <p:spPr>
+          <a:xfrm>
+            <a:off x="457200" y="2971800"/>
+            <a:ext cx="4023360" cy="1600200"/>
+          </a:xfrm>
+          <a:prstGeom prst="roundRect">
+            <a:avLst>
+              <a:gd name="adj" fmla="val 4571"/>
+            </a:avLst>
+          </a:prstGeom>
+          <a:solidFill>
+            <a:schemeClr val="bg2"/>
+          </a:solidFill>
+          <a:ln w="12700">
+            <a:solidFill>
+              <a:schemeClr val="bg2"/>
+            </a:solidFill>
+            <a:prstDash val="solid"/>
+          </a:ln>
+        </p:spPr>
+      </p:sp>
+      <p:sp>
+        <p:nvSpPr>
+          <p:cNvPr id="20" name="Badge 1"/>
+          <p:cNvSpPr/>
+          <p:nvPr/>
+        </p:nvSpPr>
+        <p:spPr>
+          <a:xfrm>
+            <a:off x="640080" y="3127248"/>
+            <a:ext cx="310896" cy="310896"/>
+          </a:xfrm>
+          <a:prstGeom prst="ellipse">
             <a:avLst/>
           </a:prstGeom>
           <a:solidFill>
@@ -9195,14 +11370,14 @@
       </p:sp>
       <p:sp>
         <p:nvSpPr>
-          <p:cNvPr id="8" name="Split label Train 70%"/>
+          <p:cNvPr id="21" name="Badge text 1"/>
           <p:cNvSpPr txBox="1"/>
           <p:nvPr/>
         </p:nvSpPr>
         <p:spPr>
           <a:xfrm>
-            <a:off x="457200" y="1371600"/>
-            <a:ext cx="5683910" cy="502920"/>
+            <a:off x="640080" y="3127248"/>
+            <a:ext cx="310896" cy="310896"/>
           </a:xfrm>
           <a:prstGeom prst="rect">
             <a:avLst/>
@@ -9218,37 +11393,111 @@
               <a:buNone/>
             </a:pPr>
             <a:r>
-              <a:rPr lang="en-US" sz="1300" b="1" dirty="0">
+              <a:rPr lang="en-US" sz="1200" b="1" dirty="0">
                 <a:solidFill>
                   <a:schemeClr val="bg1"/>
                 </a:solidFill>
               </a:rPr>
-              <a:t>Train 70%</a:t>
+              <a:t>1</a:t>
             </a:r>
-            <a:endParaRPr lang="en-US" sz="1300" dirty="0"/>
+            <a:endParaRPr lang="en-US" sz="1200" dirty="0"/>
           </a:p>
         </p:txBody>
       </p:sp>
       <p:sp>
         <p:nvSpPr>
-          <p:cNvPr id="9" name="Split bar Val"/>
+          <p:cNvPr id="22" name="Insight title 1"/>
+          <p:cNvSpPr txBox="1"/>
+          <p:nvPr/>
+        </p:nvSpPr>
+        <p:spPr>
+          <a:xfrm>
+            <a:off x="1097280" y="3127248"/>
+            <a:ext cx="3200400" cy="310896"/>
+          </a:xfrm>
+          <a:prstGeom prst="rect">
+            <a:avLst/>
+          </a:prstGeom>
+          <a:noFill/>
+          <a:ln/>
+        </p:spPr>
+        <p:txBody>
+          <a:bodyPr wrap="square" lIns="0" tIns="0" rIns="0" bIns="0" rtlCol="0" anchor="ctr"/>
+          <a:lstStyle/>
+          <a:p>
+            <a:pPr indent="0" marL="0">
+              <a:buNone/>
+            </a:pPr>
+            <a:r>
+              <a:rPr lang="en-US" sz="1600" b="1" dirty="0">
+                <a:solidFill>
+                  <a:schemeClr val="tx1"/>
+                </a:solidFill>
+              </a:rPr>
+              <a:t>Missing data is mostly systemic</a:t>
+            </a:r>
+            <a:endParaRPr lang="en-US" sz="1600" dirty="0"/>
+          </a:p>
+        </p:txBody>
+      </p:sp>
+      <p:sp>
+        <p:nvSpPr>
+          <p:cNvPr id="23" name="Insight body 1"/>
+          <p:cNvSpPr txBox="1"/>
+          <p:nvPr/>
+        </p:nvSpPr>
+        <p:spPr>
+          <a:xfrm>
+            <a:off x="640080" y="3547872"/>
+            <a:ext cx="3657600" cy="960120"/>
+          </a:xfrm>
+          <a:prstGeom prst="rect">
+            <a:avLst/>
+          </a:prstGeom>
+          <a:noFill/>
+          <a:ln/>
+        </p:spPr>
+        <p:txBody>
+          <a:bodyPr wrap="square" lIns="0" tIns="0" rIns="0" bIns="0" rtlCol="0" anchor="t"/>
+          <a:lstStyle/>
+          <a:p>
+            <a:pPr indent="0" marL="0">
+              <a:buNone/>
+            </a:pPr>
+            <a:r>
+              <a:rPr lang="en-US" sz="1400" dirty="0">
+                <a:solidFill>
+                  <a:schemeClr val="tx1"/>
+                </a:solidFill>
+              </a:rPr>
+              <a:t>6.3 of the 8.1 points are whole-network outages (2,148 timestamps, up to 31.8 hours). Only 1.8 points are single-sensor failures.</a:t>
+            </a:r>
+            <a:endParaRPr lang="en-US" sz="1400" dirty="0"/>
+          </a:p>
+        </p:txBody>
+      </p:sp>
+      <p:sp>
+        <p:nvSpPr>
+          <p:cNvPr id="24" name="Insight card 2"/>
           <p:cNvSpPr/>
           <p:nvPr/>
         </p:nvSpPr>
         <p:spPr>
           <a:xfrm>
-            <a:off x="6195974" y="1371600"/>
-            <a:ext cx="811987" cy="502920"/>
-          </a:xfrm>
-          <a:prstGeom prst="rect">
-            <a:avLst/>
+            <a:off x="4663440" y="2971800"/>
+            <a:ext cx="4023360" cy="1600200"/>
+          </a:xfrm>
+          <a:prstGeom prst="roundRect">
+            <a:avLst>
+              <a:gd name="adj" fmla="val 4571"/>
+            </a:avLst>
           </a:prstGeom>
           <a:solidFill>
-            <a:schemeClr val="accent4"/>
+            <a:schemeClr val="bg2"/>
           </a:solidFill>
           <a:ln w="12700">
             <a:solidFill>
-              <a:schemeClr val="accent4"/>
+              <a:schemeClr val="bg2"/>
             </a:solidFill>
             <a:prstDash val="solid"/>
           </a:ln>
@@ -9256,113 +11505,16 @@
       </p:sp>
       <p:sp>
         <p:nvSpPr>
-          <p:cNvPr id="10" name="Split label Val"/>
-          <p:cNvSpPr txBox="1"/>
-          <p:nvPr/>
-        </p:nvSpPr>
-        <p:spPr>
-          <a:xfrm>
-            <a:off x="6195974" y="1371600"/>
-            <a:ext cx="811987" cy="502920"/>
-          </a:xfrm>
-          <a:prstGeom prst="rect">
-            <a:avLst/>
-          </a:prstGeom>
-          <a:noFill/>
-          <a:ln/>
-        </p:spPr>
-        <p:txBody>
-          <a:bodyPr wrap="square" lIns="0" tIns="0" rIns="0" bIns="0" rtlCol="0" anchor="ctr"/>
-          <a:lstStyle/>
-          <a:p>
-            <a:pPr algn="ctr" indent="0" marL="0">
-              <a:buNone/>
-            </a:pPr>
-            <a:r>
-              <a:rPr lang="en-US" sz="1300" b="1" dirty="0">
-                <a:solidFill>
-                  <a:schemeClr val="tx1"/>
-                </a:solidFill>
-              </a:rPr>
-              <a:t>Val</a:t>
-            </a:r>
-            <a:endParaRPr lang="en-US" sz="1300" dirty="0"/>
-          </a:p>
-        </p:txBody>
-      </p:sp>
-      <p:sp>
-        <p:nvSpPr>
-          <p:cNvPr id="11" name="Split bar Test 20%"/>
+          <p:cNvPr id="25" name="Badge 2"/>
           <p:cNvSpPr/>
           <p:nvPr/>
         </p:nvSpPr>
         <p:spPr>
           <a:xfrm>
-            <a:off x="7062826" y="1371600"/>
-            <a:ext cx="1623974" cy="502920"/>
-          </a:xfrm>
-          <a:prstGeom prst="rect">
-            <a:avLst/>
-          </a:prstGeom>
-          <a:solidFill>
-            <a:schemeClr val="accent2"/>
-          </a:solidFill>
-          <a:ln w="12700">
-            <a:solidFill>
-              <a:schemeClr val="accent2"/>
-            </a:solidFill>
-            <a:prstDash val="solid"/>
-          </a:ln>
-        </p:spPr>
-      </p:sp>
-      <p:sp>
-        <p:nvSpPr>
-          <p:cNvPr id="12" name="Split label Test 20%"/>
-          <p:cNvSpPr txBox="1"/>
-          <p:nvPr/>
-        </p:nvSpPr>
-        <p:spPr>
-          <a:xfrm>
-            <a:off x="7062826" y="1371600"/>
-            <a:ext cx="1623974" cy="502920"/>
-          </a:xfrm>
-          <a:prstGeom prst="rect">
-            <a:avLst/>
-          </a:prstGeom>
-          <a:noFill/>
-          <a:ln/>
-        </p:spPr>
-        <p:txBody>
-          <a:bodyPr wrap="square" lIns="0" tIns="0" rIns="0" bIns="0" rtlCol="0" anchor="ctr"/>
-          <a:lstStyle/>
-          <a:p>
-            <a:pPr algn="ctr" indent="0" marL="0">
-              <a:buNone/>
-            </a:pPr>
-            <a:r>
-              <a:rPr lang="en-US" sz="1300" b="1" dirty="0">
-                <a:solidFill>
-                  <a:schemeClr val="bg1"/>
-                </a:solidFill>
-              </a:rPr>
-              <a:t>Test 20%</a:t>
-            </a:r>
-            <a:endParaRPr lang="en-US" sz="1300" dirty="0"/>
-          </a:p>
-        </p:txBody>
-      </p:sp>
-      <p:sp>
-        <p:nvSpPr>
-          <p:cNvPr id="13" name="Legend swatch Train"/>
-          <p:cNvSpPr/>
-          <p:nvPr/>
-        </p:nvSpPr>
-        <p:spPr>
-          <a:xfrm>
-            <a:off x="457200" y="2084832"/>
-            <a:ext cx="146304" cy="146304"/>
-          </a:xfrm>
-          <a:prstGeom prst="rect">
+            <a:off x="4846320" y="3127248"/>
+            <a:ext cx="310896" cy="310896"/>
+          </a:xfrm>
+          <a:prstGeom prst="ellipse">
             <a:avLst/>
           </a:prstGeom>
           <a:solidFill>
@@ -9378,256 +11530,13 @@
       </p:sp>
       <p:sp>
         <p:nvSpPr>
-          <p:cNvPr id="14" name="Legend Train"/>
+          <p:cNvPr id="26" name="Badge text 2"/>
           <p:cNvSpPr txBox="1"/>
           <p:nvPr/>
         </p:nvSpPr>
         <p:spPr>
           <a:xfrm>
-            <a:off x="685800" y="2011680"/>
-            <a:ext cx="2560320" cy="292608"/>
-          </a:xfrm>
-          <a:prstGeom prst="rect">
-            <a:avLst/>
-          </a:prstGeom>
-          <a:noFill/>
-          <a:ln/>
-        </p:spPr>
-        <p:txBody>
-          <a:bodyPr wrap="square" lIns="0" tIns="0" rIns="0" bIns="0" rtlCol="0" anchor="ctr"/>
-          <a:lstStyle/>
-          <a:p>
-            <a:pPr indent="0" marL="0">
-              <a:buNone/>
-            </a:pPr>
-            <a:r>
-              <a:rPr lang="en-US" sz="1200" b="1" dirty="0">
-                <a:solidFill>
-                  <a:schemeClr val="tx1"/>
-                </a:solidFill>
-              </a:rPr>
-              <a:t>Train  </a:t>
-            </a:r>
-            <a:pPr indent="0" marL="0">
-              <a:buNone/>
-            </a:pPr>
-            <a:r>
-              <a:rPr lang="en-US" sz="1200" dirty="0">
-                <a:solidFill>
-                  <a:schemeClr val="tx1"/>
-                </a:solidFill>
-              </a:rPr>
-              <a:t>22,933 windows, 1 Mar to 23 May</a:t>
-            </a:r>
-            <a:endParaRPr lang="en-US" sz="1200" dirty="0"/>
-          </a:p>
-        </p:txBody>
-      </p:sp>
-      <p:sp>
-        <p:nvSpPr>
-          <p:cNvPr id="15" name="Legend swatch Val"/>
-          <p:cNvSpPr/>
-          <p:nvPr/>
-        </p:nvSpPr>
-        <p:spPr>
-          <a:xfrm>
-            <a:off x="3291840" y="2084832"/>
-            <a:ext cx="146304" cy="146304"/>
-          </a:xfrm>
-          <a:prstGeom prst="rect">
-            <a:avLst/>
-          </a:prstGeom>
-          <a:solidFill>
-            <a:schemeClr val="accent4"/>
-          </a:solidFill>
-          <a:ln w="12700">
-            <a:solidFill>
-              <a:schemeClr val="accent4"/>
-            </a:solidFill>
-            <a:prstDash val="solid"/>
-          </a:ln>
-        </p:spPr>
-      </p:sp>
-      <p:sp>
-        <p:nvSpPr>
-          <p:cNvPr id="16" name="Legend Val"/>
-          <p:cNvSpPr txBox="1"/>
-          <p:nvPr/>
-        </p:nvSpPr>
-        <p:spPr>
-          <a:xfrm>
-            <a:off x="3520440" y="2011680"/>
-            <a:ext cx="2560320" cy="292608"/>
-          </a:xfrm>
-          <a:prstGeom prst="rect">
-            <a:avLst/>
-          </a:prstGeom>
-          <a:noFill/>
-          <a:ln/>
-        </p:spPr>
-        <p:txBody>
-          <a:bodyPr wrap="square" lIns="0" tIns="0" rIns="0" bIns="0" rtlCol="0" anchor="ctr"/>
-          <a:lstStyle/>
-          <a:p>
-            <a:pPr indent="0" marL="0">
-              <a:buNone/>
-            </a:pPr>
-            <a:r>
-              <a:rPr lang="en-US" sz="1200" b="1" dirty="0">
-                <a:solidFill>
-                  <a:schemeClr val="tx1"/>
-                </a:solidFill>
-              </a:rPr>
-              <a:t>Val  </a:t>
-            </a:r>
-            <a:pPr indent="0" marL="0">
-              <a:buNone/>
-            </a:pPr>
-            <a:r>
-              <a:rPr lang="en-US" sz="1200" dirty="0">
-                <a:solidFill>
-                  <a:schemeClr val="tx1"/>
-                </a:solidFill>
-              </a:rPr>
-              <a:t>3,417 windows, to 4 Jun</a:t>
-            </a:r>
-            <a:endParaRPr lang="en-US" sz="1200" dirty="0"/>
-          </a:p>
-        </p:txBody>
-      </p:sp>
-      <p:sp>
-        <p:nvSpPr>
-          <p:cNvPr id="17" name="Legend swatch Test"/>
-          <p:cNvSpPr/>
-          <p:nvPr/>
-        </p:nvSpPr>
-        <p:spPr>
-          <a:xfrm>
-            <a:off x="6126480" y="2084832"/>
-            <a:ext cx="146304" cy="146304"/>
-          </a:xfrm>
-          <a:prstGeom prst="rect">
-            <a:avLst/>
-          </a:prstGeom>
-          <a:solidFill>
-            <a:schemeClr val="accent2"/>
-          </a:solidFill>
-          <a:ln w="12700">
-            <a:solidFill>
-              <a:schemeClr val="accent2"/>
-            </a:solidFill>
-            <a:prstDash val="solid"/>
-          </a:ln>
-        </p:spPr>
-      </p:sp>
-      <p:sp>
-        <p:nvSpPr>
-          <p:cNvPr id="18" name="Legend Test"/>
-          <p:cNvSpPr txBox="1"/>
-          <p:nvPr/>
-        </p:nvSpPr>
-        <p:spPr>
-          <a:xfrm>
-            <a:off x="6355080" y="2011680"/>
-            <a:ext cx="2560320" cy="292608"/>
-          </a:xfrm>
-          <a:prstGeom prst="rect">
-            <a:avLst/>
-          </a:prstGeom>
-          <a:noFill/>
-          <a:ln/>
-        </p:spPr>
-        <p:txBody>
-          <a:bodyPr wrap="square" lIns="0" tIns="0" rIns="0" bIns="0" rtlCol="0" anchor="ctr"/>
-          <a:lstStyle/>
-          <a:p>
-            <a:pPr indent="0" marL="0">
-              <a:buNone/>
-            </a:pPr>
-            <a:r>
-              <a:rPr lang="en-US" sz="1200" b="1" dirty="0">
-                <a:solidFill>
-                  <a:schemeClr val="tx1"/>
-                </a:solidFill>
-              </a:rPr>
-              <a:t>Test  </a:t>
-            </a:r>
-            <a:pPr indent="0" marL="0">
-              <a:buNone/>
-            </a:pPr>
-            <a:r>
-              <a:rPr lang="en-US" sz="1200" dirty="0">
-                <a:solidFill>
-                  <a:schemeClr val="tx1"/>
-                </a:solidFill>
-              </a:rPr>
-              <a:t>6,843 windows, 4 to 27 Jun</a:t>
-            </a:r>
-            <a:endParaRPr lang="en-US" sz="1200" dirty="0"/>
-          </a:p>
-        </p:txBody>
-      </p:sp>
-      <p:sp>
-        <p:nvSpPr>
-          <p:cNvPr id="19" name="Rule card 1"/>
-          <p:cNvSpPr/>
-          <p:nvPr/>
-        </p:nvSpPr>
-        <p:spPr>
-          <a:xfrm>
-            <a:off x="457200" y="2514600"/>
-            <a:ext cx="4023360" cy="749808"/>
-          </a:xfrm>
-          <a:prstGeom prst="roundRect">
-            <a:avLst>
-              <a:gd name="adj" fmla="val 9756"/>
-            </a:avLst>
-          </a:prstGeom>
-          <a:solidFill>
-            <a:schemeClr val="bg2"/>
-          </a:solidFill>
-          <a:ln w="12700">
-            <a:solidFill>
-              <a:schemeClr val="bg2"/>
-            </a:solidFill>
-            <a:prstDash val="solid"/>
-          </a:ln>
-        </p:spPr>
-      </p:sp>
-      <p:sp>
-        <p:nvSpPr>
-          <p:cNvPr id="20" name="Badge 1"/>
-          <p:cNvSpPr/>
-          <p:nvPr/>
-        </p:nvSpPr>
-        <p:spPr>
-          <a:xfrm>
-            <a:off x="594360" y="2734056"/>
-            <a:ext cx="310896" cy="310896"/>
-          </a:xfrm>
-          <a:prstGeom prst="ellipse">
-            <a:avLst/>
-          </a:prstGeom>
-          <a:solidFill>
-            <a:schemeClr val="accent3"/>
-          </a:solidFill>
-          <a:ln w="12700">
-            <a:solidFill>
-              <a:schemeClr val="accent3"/>
-            </a:solidFill>
-            <a:prstDash val="solid"/>
-          </a:ln>
-        </p:spPr>
-      </p:sp>
-      <p:sp>
-        <p:nvSpPr>
-          <p:cNvPr id="21" name="Badge text 1"/>
-          <p:cNvSpPr txBox="1"/>
-          <p:nvPr/>
-        </p:nvSpPr>
-        <p:spPr>
-          <a:xfrm>
-            <a:off x="594360" y="2734056"/>
+            <a:off x="4846320" y="3127248"/>
             <a:ext cx="310896" cy="310896"/>
           </a:xfrm>
           <a:prstGeom prst="rect">
@@ -9649,7 +11558,7 @@
                   <a:schemeClr val="bg1"/>
                 </a:solidFill>
               </a:rPr>
-              <a:t>1</a:t>
+              <a:t>2</a:t>
             </a:r>
             <a:endParaRPr lang="en-US" sz="1200" dirty="0"/>
           </a:p>
@@ -9657,14 +11566,14 @@
       </p:sp>
       <p:sp>
         <p:nvSpPr>
-          <p:cNvPr id="22" name="Rule text 1"/>
+          <p:cNvPr id="27" name="Insight title 2"/>
           <p:cNvSpPr txBox="1"/>
           <p:nvPr/>
         </p:nvSpPr>
         <p:spPr>
           <a:xfrm>
-            <a:off x="1024128" y="2560320"/>
-            <a:ext cx="3383280" cy="658368"/>
+            <a:off x="5303520" y="3127248"/>
+            <a:ext cx="3200400" cy="310896"/>
           </a:xfrm>
           <a:prstGeom prst="rect">
             <a:avLst/>
@@ -9680,464 +11589,48 @@
               <a:buNone/>
             </a:pPr>
             <a:r>
-              <a:rPr lang="en-US" sz="1300" b="1" dirty="0">
+              <a:rPr lang="en-US" sz="1600" b="1" dirty="0">
                 <a:solidFill>
                   <a:schemeClr val="tx1"/>
                 </a:solidFill>
               </a:rPr>
-              <a:t>Purge gap: </a:t>
+              <a:t>Direction matters</a:t>
             </a:r>
+            <a:endParaRPr lang="en-US" sz="1600" dirty="0"/>
+          </a:p>
+        </p:txBody>
+      </p:sp>
+      <p:sp>
+        <p:nvSpPr>
+          <p:cNvPr id="28" name="Insight body 2"/>
+          <p:cNvSpPr txBox="1"/>
+          <p:nvPr/>
+        </p:nvSpPr>
+        <p:spPr>
+          <a:xfrm>
+            <a:off x="4846320" y="3547872"/>
+            <a:ext cx="3657600" cy="960120"/>
+          </a:xfrm>
+          <a:prstGeom prst="rect">
+            <a:avLst/>
+          </a:prstGeom>
+          <a:noFill/>
+          <a:ln/>
+        </p:spPr>
+        <p:txBody>
+          <a:bodyPr wrap="square" lIns="0" tIns="0" rIns="0" bIns="0" rtlCol="0" anchor="t"/>
+          <a:lstStyle/>
+          <a:p>
             <a:pPr indent="0" marL="0">
               <a:buNone/>
             </a:pPr>
             <a:r>
-              <a:rPr lang="en-US" sz="1300" dirty="0">
+              <a:rPr lang="en-US" sz="1400" dirty="0">
                 <a:solidFill>
                   <a:schemeClr val="tx1"/>
                 </a:solidFill>
               </a:rPr>
-              <a:t>11 boundary windows dropped per split, so no target lies in two splits.</a:t>
-            </a:r>
-            <a:endParaRPr lang="en-US" sz="1300" dirty="0"/>
-          </a:p>
-        </p:txBody>
-      </p:sp>
-      <p:sp>
-        <p:nvSpPr>
-          <p:cNvPr id="23" name="Rule card 2"/>
-          <p:cNvSpPr/>
-          <p:nvPr/>
-        </p:nvSpPr>
-        <p:spPr>
-          <a:xfrm>
-            <a:off x="4663440" y="2514600"/>
-            <a:ext cx="4023360" cy="749808"/>
-          </a:xfrm>
-          <a:prstGeom prst="roundRect">
-            <a:avLst>
-              <a:gd name="adj" fmla="val 9756"/>
-            </a:avLst>
-          </a:prstGeom>
-          <a:solidFill>
-            <a:schemeClr val="bg2"/>
-          </a:solidFill>
-          <a:ln w="12700">
-            <a:solidFill>
-              <a:schemeClr val="bg2"/>
-            </a:solidFill>
-            <a:prstDash val="solid"/>
-          </a:ln>
-        </p:spPr>
-      </p:sp>
-      <p:sp>
-        <p:nvSpPr>
-          <p:cNvPr id="24" name="Badge 2"/>
-          <p:cNvSpPr/>
-          <p:nvPr/>
-        </p:nvSpPr>
-        <p:spPr>
-          <a:xfrm>
-            <a:off x="4800600" y="2734056"/>
-            <a:ext cx="310896" cy="310896"/>
-          </a:xfrm>
-          <a:prstGeom prst="ellipse">
-            <a:avLst/>
-          </a:prstGeom>
-          <a:solidFill>
-            <a:schemeClr val="accent3"/>
-          </a:solidFill>
-          <a:ln w="12700">
-            <a:solidFill>
-              <a:schemeClr val="accent3"/>
-            </a:solidFill>
-            <a:prstDash val="solid"/>
-          </a:ln>
-        </p:spPr>
-      </p:sp>
-      <p:sp>
-        <p:nvSpPr>
-          <p:cNvPr id="25" name="Badge text 2"/>
-          <p:cNvSpPr txBox="1"/>
-          <p:nvPr/>
-        </p:nvSpPr>
-        <p:spPr>
-          <a:xfrm>
-            <a:off x="4800600" y="2734056"/>
-            <a:ext cx="310896" cy="310896"/>
-          </a:xfrm>
-          <a:prstGeom prst="rect">
-            <a:avLst/>
-          </a:prstGeom>
-          <a:noFill/>
-          <a:ln/>
-        </p:spPr>
-        <p:txBody>
-          <a:bodyPr wrap="square" lIns="0" tIns="0" rIns="0" bIns="0" rtlCol="0" anchor="ctr"/>
-          <a:lstStyle/>
-          <a:p>
-            <a:pPr algn="ctr" indent="0" marL="0">
-              <a:buNone/>
-            </a:pPr>
-            <a:r>
-              <a:rPr lang="en-US" sz="1200" b="1" dirty="0">
-                <a:solidFill>
-                  <a:schemeClr val="bg1"/>
-                </a:solidFill>
-              </a:rPr>
-              <a:t>2</a:t>
-            </a:r>
-            <a:endParaRPr lang="en-US" sz="1200" dirty="0"/>
-          </a:p>
-        </p:txBody>
-      </p:sp>
-      <p:sp>
-        <p:nvSpPr>
-          <p:cNvPr id="26" name="Rule text 2"/>
-          <p:cNvSpPr txBox="1"/>
-          <p:nvPr/>
-        </p:nvSpPr>
-        <p:spPr>
-          <a:xfrm>
-            <a:off x="5230368" y="2560320"/>
-            <a:ext cx="3383280" cy="658368"/>
-          </a:xfrm>
-          <a:prstGeom prst="rect">
-            <a:avLst/>
-          </a:prstGeom>
-          <a:noFill/>
-          <a:ln/>
-        </p:spPr>
-        <p:txBody>
-          <a:bodyPr wrap="square" lIns="0" tIns="0" rIns="0" bIns="0" rtlCol="0" anchor="ctr"/>
-          <a:lstStyle/>
-          <a:p>
-            <a:pPr indent="0" marL="0">
-              <a:buNone/>
-            </a:pPr>
-            <a:r>
-              <a:rPr lang="en-US" sz="1300" b="1" dirty="0">
-                <a:solidFill>
-                  <a:schemeClr val="tx1"/>
-                </a:solidFill>
-              </a:rPr>
-              <a:t>Train-only scaling: </a:t>
-            </a:r>
-            <a:pPr indent="0" marL="0">
-              <a:buNone/>
-            </a:pPr>
-            <a:r>
-              <a:rPr lang="en-US" sz="1300" dirty="0">
-                <a:solidFill>
-                  <a:schemeClr val="tx1"/>
-                </a:solidFill>
-              </a:rPr>
-              <a:t>Mean 58.6 mph and std 12.8 mph from training timestamps only.</a:t>
-            </a:r>
-            <a:endParaRPr lang="en-US" sz="1300" dirty="0"/>
-          </a:p>
-        </p:txBody>
-      </p:sp>
-      <p:sp>
-        <p:nvSpPr>
-          <p:cNvPr id="27" name="Rule card 3"/>
-          <p:cNvSpPr/>
-          <p:nvPr/>
-        </p:nvSpPr>
-        <p:spPr>
-          <a:xfrm>
-            <a:off x="457200" y="3355848"/>
-            <a:ext cx="4023360" cy="749808"/>
-          </a:xfrm>
-          <a:prstGeom prst="roundRect">
-            <a:avLst>
-              <a:gd name="adj" fmla="val 9756"/>
-            </a:avLst>
-          </a:prstGeom>
-          <a:solidFill>
-            <a:schemeClr val="bg2"/>
-          </a:solidFill>
-          <a:ln w="12700">
-            <a:solidFill>
-              <a:schemeClr val="bg2"/>
-            </a:solidFill>
-            <a:prstDash val="solid"/>
-          </a:ln>
-        </p:spPr>
-      </p:sp>
-      <p:sp>
-        <p:nvSpPr>
-          <p:cNvPr id="28" name="Badge 3"/>
-          <p:cNvSpPr/>
-          <p:nvPr/>
-        </p:nvSpPr>
-        <p:spPr>
-          <a:xfrm>
-            <a:off x="594360" y="3575304"/>
-            <a:ext cx="310896" cy="310896"/>
-          </a:xfrm>
-          <a:prstGeom prst="ellipse">
-            <a:avLst/>
-          </a:prstGeom>
-          <a:solidFill>
-            <a:schemeClr val="accent3"/>
-          </a:solidFill>
-          <a:ln w="12700">
-            <a:solidFill>
-              <a:schemeClr val="accent3"/>
-            </a:solidFill>
-            <a:prstDash val="solid"/>
-          </a:ln>
-        </p:spPr>
-      </p:sp>
-      <p:sp>
-        <p:nvSpPr>
-          <p:cNvPr id="29" name="Badge text 3"/>
-          <p:cNvSpPr txBox="1"/>
-          <p:nvPr/>
-        </p:nvSpPr>
-        <p:spPr>
-          <a:xfrm>
-            <a:off x="594360" y="3575304"/>
-            <a:ext cx="310896" cy="310896"/>
-          </a:xfrm>
-          <a:prstGeom prst="rect">
-            <a:avLst/>
-          </a:prstGeom>
-          <a:noFill/>
-          <a:ln/>
-        </p:spPr>
-        <p:txBody>
-          <a:bodyPr wrap="square" lIns="0" tIns="0" rIns="0" bIns="0" rtlCol="0" anchor="ctr"/>
-          <a:lstStyle/>
-          <a:p>
-            <a:pPr algn="ctr" indent="0" marL="0">
-              <a:buNone/>
-            </a:pPr>
-            <a:r>
-              <a:rPr lang="en-US" sz="1200" b="1" dirty="0">
-                <a:solidFill>
-                  <a:schemeClr val="bg1"/>
-                </a:solidFill>
-              </a:rPr>
-              <a:t>3</a:t>
-            </a:r>
-            <a:endParaRPr lang="en-US" sz="1200" dirty="0"/>
-          </a:p>
-        </p:txBody>
-      </p:sp>
-      <p:sp>
-        <p:nvSpPr>
-          <p:cNvPr id="30" name="Rule text 3"/>
-          <p:cNvSpPr txBox="1"/>
-          <p:nvPr/>
-        </p:nvSpPr>
-        <p:spPr>
-          <a:xfrm>
-            <a:off x="1024128" y="3401568"/>
-            <a:ext cx="3383280" cy="658368"/>
-          </a:xfrm>
-          <a:prstGeom prst="rect">
-            <a:avLst/>
-          </a:prstGeom>
-          <a:noFill/>
-          <a:ln/>
-        </p:spPr>
-        <p:txBody>
-          <a:bodyPr wrap="square" lIns="0" tIns="0" rIns="0" bIns="0" rtlCol="0" anchor="ctr"/>
-          <a:lstStyle/>
-          <a:p>
-            <a:pPr indent="0" marL="0">
-              <a:buNone/>
-            </a:pPr>
-            <a:r>
-              <a:rPr lang="en-US" sz="1300" b="1" dirty="0">
-                <a:solidFill>
-                  <a:schemeClr val="tx1"/>
-                </a:solidFill>
-              </a:rPr>
-              <a:t>Outages masked: </a:t>
-            </a:r>
-            <a:pPr indent="0" marL="0">
-              <a:buNone/>
-            </a:pPr>
-            <a:r>
-              <a:rPr lang="en-US" sz="1300" dirty="0">
-                <a:solidFill>
-                  <a:schemeClr val="tx1"/>
-                </a:solidFill>
-              </a:rPr>
-              <a:t>Missing is NaN, never 0 mph: mask channel, masked loss and masked metrics.</a:t>
-            </a:r>
-            <a:endParaRPr lang="en-US" sz="1300" dirty="0"/>
-          </a:p>
-        </p:txBody>
-      </p:sp>
-      <p:sp>
-        <p:nvSpPr>
-          <p:cNvPr id="31" name="Rule card 4"/>
-          <p:cNvSpPr/>
-          <p:nvPr/>
-        </p:nvSpPr>
-        <p:spPr>
-          <a:xfrm>
-            <a:off x="4663440" y="3355848"/>
-            <a:ext cx="4023360" cy="749808"/>
-          </a:xfrm>
-          <a:prstGeom prst="roundRect">
-            <a:avLst>
-              <a:gd name="adj" fmla="val 9756"/>
-            </a:avLst>
-          </a:prstGeom>
-          <a:solidFill>
-            <a:schemeClr val="bg2"/>
-          </a:solidFill>
-          <a:ln w="12700">
-            <a:solidFill>
-              <a:schemeClr val="bg2"/>
-            </a:solidFill>
-            <a:prstDash val="solid"/>
-          </a:ln>
-        </p:spPr>
-      </p:sp>
-      <p:sp>
-        <p:nvSpPr>
-          <p:cNvPr id="32" name="Badge 4"/>
-          <p:cNvSpPr/>
-          <p:nvPr/>
-        </p:nvSpPr>
-        <p:spPr>
-          <a:xfrm>
-            <a:off x="4800600" y="3575304"/>
-            <a:ext cx="310896" cy="310896"/>
-          </a:xfrm>
-          <a:prstGeom prst="ellipse">
-            <a:avLst/>
-          </a:prstGeom>
-          <a:solidFill>
-            <a:schemeClr val="accent3"/>
-          </a:solidFill>
-          <a:ln w="12700">
-            <a:solidFill>
-              <a:schemeClr val="accent3"/>
-            </a:solidFill>
-            <a:prstDash val="solid"/>
-          </a:ln>
-        </p:spPr>
-      </p:sp>
-      <p:sp>
-        <p:nvSpPr>
-          <p:cNvPr id="33" name="Badge text 4"/>
-          <p:cNvSpPr txBox="1"/>
-          <p:nvPr/>
-        </p:nvSpPr>
-        <p:spPr>
-          <a:xfrm>
-            <a:off x="4800600" y="3575304"/>
-            <a:ext cx="310896" cy="310896"/>
-          </a:xfrm>
-          <a:prstGeom prst="rect">
-            <a:avLst/>
-          </a:prstGeom>
-          <a:noFill/>
-          <a:ln/>
-        </p:spPr>
-        <p:txBody>
-          <a:bodyPr wrap="square" lIns="0" tIns="0" rIns="0" bIns="0" rtlCol="0" anchor="ctr"/>
-          <a:lstStyle/>
-          <a:p>
-            <a:pPr algn="ctr" indent="0" marL="0">
-              <a:buNone/>
-            </a:pPr>
-            <a:r>
-              <a:rPr lang="en-US" sz="1200" b="1" dirty="0">
-                <a:solidFill>
-                  <a:schemeClr val="bg1"/>
-                </a:solidFill>
-              </a:rPr>
-              <a:t>4</a:t>
-            </a:r>
-            <a:endParaRPr lang="en-US" sz="1200" dirty="0"/>
-          </a:p>
-        </p:txBody>
-      </p:sp>
-      <p:sp>
-        <p:nvSpPr>
-          <p:cNvPr id="34" name="Rule text 4"/>
-          <p:cNvSpPr txBox="1"/>
-          <p:nvPr/>
-        </p:nvSpPr>
-        <p:spPr>
-          <a:xfrm>
-            <a:off x="5230368" y="3401568"/>
-            <a:ext cx="3383280" cy="658368"/>
-          </a:xfrm>
-          <a:prstGeom prst="rect">
-            <a:avLst/>
-          </a:prstGeom>
-          <a:noFill/>
-          <a:ln/>
-        </p:spPr>
-        <p:txBody>
-          <a:bodyPr wrap="square" lIns="0" tIns="0" rIns="0" bIns="0" rtlCol="0" anchor="ctr"/>
-          <a:lstStyle/>
-          <a:p>
-            <a:pPr indent="0" marL="0">
-              <a:buNone/>
-            </a:pPr>
-            <a:r>
-              <a:rPr lang="en-US" sz="1300" b="1" dirty="0">
-                <a:solidFill>
-                  <a:schemeClr val="tx1"/>
-                </a:solidFill>
-              </a:rPr>
-              <a:t>Equal history: </a:t>
-            </a:r>
-            <a:pPr indent="0" marL="0">
-              <a:buNone/>
-            </a:pPr>
-            <a:r>
-              <a:rPr lang="en-US" sz="1300" dirty="0">
-                <a:solidFill>
-                  <a:schemeClr val="tx1"/>
-                </a:solidFill>
-              </a:rPr>
-              <a:t>Every model sees the same 12 steps (60 min) and forecasts 12 (5 to 60 min).</a:t>
-            </a:r>
-            <a:endParaRPr lang="en-US" sz="1300" dirty="0"/>
-          </a:p>
-        </p:txBody>
-      </p:sp>
-      <p:sp>
-        <p:nvSpPr>
-          <p:cNvPr id="35" name="Leak note"/>
-          <p:cNvSpPr txBox="1"/>
-          <p:nvPr/>
-        </p:nvSpPr>
-        <p:spPr>
-          <a:xfrm>
-            <a:off x="457200" y="4251960"/>
-            <a:ext cx="8229600" cy="365760"/>
-          </a:xfrm>
-          <a:prstGeom prst="rect">
-            <a:avLst/>
-          </a:prstGeom>
-          <a:noFill/>
-          <a:ln/>
-        </p:spPr>
-        <p:txBody>
-          <a:bodyPr wrap="square" lIns="0" tIns="0" rIns="0" bIns="0" rtlCol="0" anchor="t"/>
-          <a:lstStyle/>
-          <a:p>
-            <a:pPr indent="0" marL="0">
-              <a:buNone/>
-            </a:pPr>
-            <a:r>
-              <a:rPr lang="en-US" sz="1400" b="1" dirty="0">
-                <a:solidFill>
-                  <a:schemeClr val="accent5"/>
-                </a:solidFill>
-              </a:rPr>
-              <a:t>The reference DCRNN split overlaps train and val targets by 50 minutes. Ours does not: 12 leakage tests pass.</a:t>
+              <a:t>Only 27% of 1,515 links are two-way. The downstream sensor slows first about 4 times more often, so a per-sensor model cannot see a jam coming.</a:t>
             </a:r>
             <a:endParaRPr lang="en-US" sz="1400" dirty="0"/>
           </a:p>
@@ -10248,7 +11741,7 @@
                 <a:ea typeface="+mj-lt" pitchFamily="34" charset="-122"/>
                 <a:cs typeface="+mj-lt" pitchFamily="34" charset="-120"/>
               </a:rPr>
-              <a:t>Six baselines, one fair protocol</a:t>
+              <a:t>Leak-free by design</a:t>
             </a:r>
             <a:endParaRPr lang="en-US" sz="3000" dirty="0"/>
           </a:p>
@@ -10359,7 +11852,7 @@
                   <a:schemeClr val="accent6"/>
                 </a:solidFill>
               </a:rPr>
-              <a:t>From trivial to strong, on the same windows, masks and metrics</a:t>
+              <a:t>Nothing the model is scored on may influence anything it is trained on</a:t>
             </a:r>
             <a:endParaRPr lang="en-US" sz="1600" dirty="0"/>
           </a:p>
@@ -10367,18 +11860,417 @@
       </p:sp>
       <p:sp>
         <p:nvSpPr>
-          <p:cNvPr id="7" name="Model card 0"/>
+          <p:cNvPr id="7" name="Split bar Train 70%"/>
           <p:cNvSpPr/>
           <p:nvPr/>
         </p:nvSpPr>
         <p:spPr>
           <a:xfrm>
             <a:off x="457200" y="1371600"/>
-            <a:ext cx="2560320" cy="1325880"/>
+            <a:ext cx="5683910" cy="502920"/>
+          </a:xfrm>
+          <a:prstGeom prst="rect">
+            <a:avLst/>
+          </a:prstGeom>
+          <a:solidFill>
+            <a:schemeClr val="accent1"/>
+          </a:solidFill>
+          <a:ln w="12700">
+            <a:solidFill>
+              <a:schemeClr val="accent1"/>
+            </a:solidFill>
+            <a:prstDash val="solid"/>
+          </a:ln>
+        </p:spPr>
+      </p:sp>
+      <p:sp>
+        <p:nvSpPr>
+          <p:cNvPr id="8" name="Split label Train 70%"/>
+          <p:cNvSpPr txBox="1"/>
+          <p:nvPr/>
+        </p:nvSpPr>
+        <p:spPr>
+          <a:xfrm>
+            <a:off x="457200" y="1371600"/>
+            <a:ext cx="5683910" cy="502920"/>
+          </a:xfrm>
+          <a:prstGeom prst="rect">
+            <a:avLst/>
+          </a:prstGeom>
+          <a:noFill/>
+          <a:ln/>
+        </p:spPr>
+        <p:txBody>
+          <a:bodyPr wrap="square" lIns="0" tIns="0" rIns="0" bIns="0" rtlCol="0" anchor="ctr"/>
+          <a:lstStyle/>
+          <a:p>
+            <a:pPr algn="ctr" indent="0" marL="0">
+              <a:buNone/>
+            </a:pPr>
+            <a:r>
+              <a:rPr lang="en-US" sz="1300" b="1" dirty="0">
+                <a:solidFill>
+                  <a:schemeClr val="bg1"/>
+                </a:solidFill>
+              </a:rPr>
+              <a:t>Train 70%</a:t>
+            </a:r>
+            <a:endParaRPr lang="en-US" sz="1300" dirty="0"/>
+          </a:p>
+        </p:txBody>
+      </p:sp>
+      <p:sp>
+        <p:nvSpPr>
+          <p:cNvPr id="9" name="Split bar Val"/>
+          <p:cNvSpPr/>
+          <p:nvPr/>
+        </p:nvSpPr>
+        <p:spPr>
+          <a:xfrm>
+            <a:off x="6195974" y="1371600"/>
+            <a:ext cx="811987" cy="502920"/>
+          </a:xfrm>
+          <a:prstGeom prst="rect">
+            <a:avLst/>
+          </a:prstGeom>
+          <a:solidFill>
+            <a:schemeClr val="accent4"/>
+          </a:solidFill>
+          <a:ln w="12700">
+            <a:solidFill>
+              <a:schemeClr val="accent4"/>
+            </a:solidFill>
+            <a:prstDash val="solid"/>
+          </a:ln>
+        </p:spPr>
+      </p:sp>
+      <p:sp>
+        <p:nvSpPr>
+          <p:cNvPr id="10" name="Split label Val"/>
+          <p:cNvSpPr txBox="1"/>
+          <p:nvPr/>
+        </p:nvSpPr>
+        <p:spPr>
+          <a:xfrm>
+            <a:off x="6195974" y="1371600"/>
+            <a:ext cx="811987" cy="502920"/>
+          </a:xfrm>
+          <a:prstGeom prst="rect">
+            <a:avLst/>
+          </a:prstGeom>
+          <a:noFill/>
+          <a:ln/>
+        </p:spPr>
+        <p:txBody>
+          <a:bodyPr wrap="square" lIns="0" tIns="0" rIns="0" bIns="0" rtlCol="0" anchor="ctr"/>
+          <a:lstStyle/>
+          <a:p>
+            <a:pPr algn="ctr" indent="0" marL="0">
+              <a:buNone/>
+            </a:pPr>
+            <a:r>
+              <a:rPr lang="en-US" sz="1300" b="1" dirty="0">
+                <a:solidFill>
+                  <a:schemeClr val="tx1"/>
+                </a:solidFill>
+              </a:rPr>
+              <a:t>Val</a:t>
+            </a:r>
+            <a:endParaRPr lang="en-US" sz="1300" dirty="0"/>
+          </a:p>
+        </p:txBody>
+      </p:sp>
+      <p:sp>
+        <p:nvSpPr>
+          <p:cNvPr id="11" name="Split bar Test 20%"/>
+          <p:cNvSpPr/>
+          <p:nvPr/>
+        </p:nvSpPr>
+        <p:spPr>
+          <a:xfrm>
+            <a:off x="7062826" y="1371600"/>
+            <a:ext cx="1623974" cy="502920"/>
+          </a:xfrm>
+          <a:prstGeom prst="rect">
+            <a:avLst/>
+          </a:prstGeom>
+          <a:solidFill>
+            <a:schemeClr val="accent2"/>
+          </a:solidFill>
+          <a:ln w="12700">
+            <a:solidFill>
+              <a:schemeClr val="accent2"/>
+            </a:solidFill>
+            <a:prstDash val="solid"/>
+          </a:ln>
+        </p:spPr>
+      </p:sp>
+      <p:sp>
+        <p:nvSpPr>
+          <p:cNvPr id="12" name="Split label Test 20%"/>
+          <p:cNvSpPr txBox="1"/>
+          <p:nvPr/>
+        </p:nvSpPr>
+        <p:spPr>
+          <a:xfrm>
+            <a:off x="7062826" y="1371600"/>
+            <a:ext cx="1623974" cy="502920"/>
+          </a:xfrm>
+          <a:prstGeom prst="rect">
+            <a:avLst/>
+          </a:prstGeom>
+          <a:noFill/>
+          <a:ln/>
+        </p:spPr>
+        <p:txBody>
+          <a:bodyPr wrap="square" lIns="0" tIns="0" rIns="0" bIns="0" rtlCol="0" anchor="ctr"/>
+          <a:lstStyle/>
+          <a:p>
+            <a:pPr algn="ctr" indent="0" marL="0">
+              <a:buNone/>
+            </a:pPr>
+            <a:r>
+              <a:rPr lang="en-US" sz="1300" b="1" dirty="0">
+                <a:solidFill>
+                  <a:schemeClr val="bg1"/>
+                </a:solidFill>
+              </a:rPr>
+              <a:t>Test 20%</a:t>
+            </a:r>
+            <a:endParaRPr lang="en-US" sz="1300" dirty="0"/>
+          </a:p>
+        </p:txBody>
+      </p:sp>
+      <p:sp>
+        <p:nvSpPr>
+          <p:cNvPr id="13" name="Legend swatch Train"/>
+          <p:cNvSpPr/>
+          <p:nvPr/>
+        </p:nvSpPr>
+        <p:spPr>
+          <a:xfrm>
+            <a:off x="457200" y="2084832"/>
+            <a:ext cx="146304" cy="146304"/>
+          </a:xfrm>
+          <a:prstGeom prst="rect">
+            <a:avLst/>
+          </a:prstGeom>
+          <a:solidFill>
+            <a:schemeClr val="accent1"/>
+          </a:solidFill>
+          <a:ln w="12700">
+            <a:solidFill>
+              <a:schemeClr val="accent1"/>
+            </a:solidFill>
+            <a:prstDash val="solid"/>
+          </a:ln>
+        </p:spPr>
+      </p:sp>
+      <p:sp>
+        <p:nvSpPr>
+          <p:cNvPr id="14" name="Legend Train"/>
+          <p:cNvSpPr txBox="1"/>
+          <p:nvPr/>
+        </p:nvSpPr>
+        <p:spPr>
+          <a:xfrm>
+            <a:off x="685800" y="2011680"/>
+            <a:ext cx="2560320" cy="292608"/>
+          </a:xfrm>
+          <a:prstGeom prst="rect">
+            <a:avLst/>
+          </a:prstGeom>
+          <a:noFill/>
+          <a:ln/>
+        </p:spPr>
+        <p:txBody>
+          <a:bodyPr wrap="square" lIns="0" tIns="0" rIns="0" bIns="0" rtlCol="0" anchor="ctr"/>
+          <a:lstStyle/>
+          <a:p>
+            <a:pPr indent="0" marL="0">
+              <a:buNone/>
+            </a:pPr>
+            <a:r>
+              <a:rPr lang="en-US" sz="1200" b="1" dirty="0">
+                <a:solidFill>
+                  <a:schemeClr val="tx1"/>
+                </a:solidFill>
+              </a:rPr>
+              <a:t>Train  </a:t>
+            </a:r>
+            <a:pPr indent="0" marL="0">
+              <a:buNone/>
+            </a:pPr>
+            <a:r>
+              <a:rPr lang="en-US" sz="1200" dirty="0">
+                <a:solidFill>
+                  <a:schemeClr val="tx1"/>
+                </a:solidFill>
+              </a:rPr>
+              <a:t>22,933 windows, 1 Mar to 23 May</a:t>
+            </a:r>
+            <a:endParaRPr lang="en-US" sz="1200" dirty="0"/>
+          </a:p>
+        </p:txBody>
+      </p:sp>
+      <p:sp>
+        <p:nvSpPr>
+          <p:cNvPr id="15" name="Legend swatch Val"/>
+          <p:cNvSpPr/>
+          <p:nvPr/>
+        </p:nvSpPr>
+        <p:spPr>
+          <a:xfrm>
+            <a:off x="3291840" y="2084832"/>
+            <a:ext cx="146304" cy="146304"/>
+          </a:xfrm>
+          <a:prstGeom prst="rect">
+            <a:avLst/>
+          </a:prstGeom>
+          <a:solidFill>
+            <a:schemeClr val="accent4"/>
+          </a:solidFill>
+          <a:ln w="12700">
+            <a:solidFill>
+              <a:schemeClr val="accent4"/>
+            </a:solidFill>
+            <a:prstDash val="solid"/>
+          </a:ln>
+        </p:spPr>
+      </p:sp>
+      <p:sp>
+        <p:nvSpPr>
+          <p:cNvPr id="16" name="Legend Val"/>
+          <p:cNvSpPr txBox="1"/>
+          <p:nvPr/>
+        </p:nvSpPr>
+        <p:spPr>
+          <a:xfrm>
+            <a:off x="3520440" y="2011680"/>
+            <a:ext cx="2560320" cy="292608"/>
+          </a:xfrm>
+          <a:prstGeom prst="rect">
+            <a:avLst/>
+          </a:prstGeom>
+          <a:noFill/>
+          <a:ln/>
+        </p:spPr>
+        <p:txBody>
+          <a:bodyPr wrap="square" lIns="0" tIns="0" rIns="0" bIns="0" rtlCol="0" anchor="ctr"/>
+          <a:lstStyle/>
+          <a:p>
+            <a:pPr indent="0" marL="0">
+              <a:buNone/>
+            </a:pPr>
+            <a:r>
+              <a:rPr lang="en-US" sz="1200" b="1" dirty="0">
+                <a:solidFill>
+                  <a:schemeClr val="tx1"/>
+                </a:solidFill>
+              </a:rPr>
+              <a:t>Val  </a:t>
+            </a:r>
+            <a:pPr indent="0" marL="0">
+              <a:buNone/>
+            </a:pPr>
+            <a:r>
+              <a:rPr lang="en-US" sz="1200" dirty="0">
+                <a:solidFill>
+                  <a:schemeClr val="tx1"/>
+                </a:solidFill>
+              </a:rPr>
+              <a:t>3,417 windows, to 4 Jun</a:t>
+            </a:r>
+            <a:endParaRPr lang="en-US" sz="1200" dirty="0"/>
+          </a:p>
+        </p:txBody>
+      </p:sp>
+      <p:sp>
+        <p:nvSpPr>
+          <p:cNvPr id="17" name="Legend swatch Test"/>
+          <p:cNvSpPr/>
+          <p:nvPr/>
+        </p:nvSpPr>
+        <p:spPr>
+          <a:xfrm>
+            <a:off x="6126480" y="2084832"/>
+            <a:ext cx="146304" cy="146304"/>
+          </a:xfrm>
+          <a:prstGeom prst="rect">
+            <a:avLst/>
+          </a:prstGeom>
+          <a:solidFill>
+            <a:schemeClr val="accent2"/>
+          </a:solidFill>
+          <a:ln w="12700">
+            <a:solidFill>
+              <a:schemeClr val="accent2"/>
+            </a:solidFill>
+            <a:prstDash val="solid"/>
+          </a:ln>
+        </p:spPr>
+      </p:sp>
+      <p:sp>
+        <p:nvSpPr>
+          <p:cNvPr id="18" name="Legend Test"/>
+          <p:cNvSpPr txBox="1"/>
+          <p:nvPr/>
+        </p:nvSpPr>
+        <p:spPr>
+          <a:xfrm>
+            <a:off x="6355080" y="2011680"/>
+            <a:ext cx="2560320" cy="292608"/>
+          </a:xfrm>
+          <a:prstGeom prst="rect">
+            <a:avLst/>
+          </a:prstGeom>
+          <a:noFill/>
+          <a:ln/>
+        </p:spPr>
+        <p:txBody>
+          <a:bodyPr wrap="square" lIns="0" tIns="0" rIns="0" bIns="0" rtlCol="0" anchor="ctr"/>
+          <a:lstStyle/>
+          <a:p>
+            <a:pPr indent="0" marL="0">
+              <a:buNone/>
+            </a:pPr>
+            <a:r>
+              <a:rPr lang="en-US" sz="1200" b="1" dirty="0">
+                <a:solidFill>
+                  <a:schemeClr val="tx1"/>
+                </a:solidFill>
+              </a:rPr>
+              <a:t>Test  </a:t>
+            </a:r>
+            <a:pPr indent="0" marL="0">
+              <a:buNone/>
+            </a:pPr>
+            <a:r>
+              <a:rPr lang="en-US" sz="1200" dirty="0">
+                <a:solidFill>
+                  <a:schemeClr val="tx1"/>
+                </a:solidFill>
+              </a:rPr>
+              <a:t>6,843 windows, 4 to 27 Jun</a:t>
+            </a:r>
+            <a:endParaRPr lang="en-US" sz="1200" dirty="0"/>
+          </a:p>
+        </p:txBody>
+      </p:sp>
+      <p:sp>
+        <p:nvSpPr>
+          <p:cNvPr id="19" name="Rule card 1"/>
+          <p:cNvSpPr/>
+          <p:nvPr/>
+        </p:nvSpPr>
+        <p:spPr>
+          <a:xfrm>
+            <a:off x="457200" y="2514600"/>
+            <a:ext cx="4023360" cy="749808"/>
           </a:xfrm>
           <a:prstGeom prst="roundRect">
             <a:avLst>
-              <a:gd name="adj" fmla="val 5517"/>
+              <a:gd name="adj" fmla="val 9756"/>
             </a:avLst>
           </a:prstGeom>
           <a:solidFill>
@@ -10394,24 +12286,24 @@
       </p:sp>
       <p:sp>
         <p:nvSpPr>
-          <p:cNvPr id="8" name="Badge 0"/>
+          <p:cNvPr id="20" name="Badge 1"/>
           <p:cNvSpPr/>
           <p:nvPr/>
         </p:nvSpPr>
         <p:spPr>
           <a:xfrm>
-            <a:off x="621792" y="1517904"/>
-            <a:ext cx="329184" cy="329184"/>
+            <a:off x="594360" y="2734056"/>
+            <a:ext cx="310896" cy="310896"/>
           </a:xfrm>
           <a:prstGeom prst="ellipse">
             <a:avLst/>
           </a:prstGeom>
           <a:solidFill>
-            <a:schemeClr val="accent1"/>
+            <a:schemeClr val="accent3"/>
           </a:solidFill>
           <a:ln w="12700">
             <a:solidFill>
-              <a:schemeClr val="accent1"/>
+              <a:schemeClr val="accent3"/>
             </a:solidFill>
             <a:prstDash val="solid"/>
           </a:ln>
@@ -10419,14 +12311,14 @@
       </p:sp>
       <p:sp>
         <p:nvSpPr>
-          <p:cNvPr id="9" name="Badge text 0"/>
+          <p:cNvPr id="21" name="Badge text 1"/>
           <p:cNvSpPr txBox="1"/>
           <p:nvPr/>
         </p:nvSpPr>
         <p:spPr>
           <a:xfrm>
-            <a:off x="621792" y="1517904"/>
-            <a:ext cx="329184" cy="329184"/>
+            <a:off x="594360" y="2734056"/>
+            <a:ext cx="310896" cy="310896"/>
           </a:xfrm>
           <a:prstGeom prst="rect">
             <a:avLst/>
@@ -10442,27 +12334,27 @@
               <a:buNone/>
             </a:pPr>
             <a:r>
-              <a:rPr lang="en-US" sz="1300" b="1" dirty="0">
+              <a:rPr lang="en-US" sz="1200" b="1" dirty="0">
                 <a:solidFill>
                   <a:schemeClr val="bg1"/>
                 </a:solidFill>
               </a:rPr>
-              <a:t>0</a:t>
+              <a:t>1</a:t>
             </a:r>
-            <a:endParaRPr lang="en-US" sz="1300" dirty="0"/>
+            <a:endParaRPr lang="en-US" sz="1200" dirty="0"/>
           </a:p>
         </p:txBody>
       </p:sp>
       <p:sp>
         <p:nvSpPr>
-          <p:cNvPr id="10" name="Model name 0"/>
+          <p:cNvPr id="22" name="Rule text 1"/>
           <p:cNvSpPr txBox="1"/>
           <p:nvPr/>
         </p:nvSpPr>
         <p:spPr>
           <a:xfrm>
-            <a:off x="1051560" y="1517904"/>
-            <a:ext cx="1874520" cy="329184"/>
+            <a:off x="1024128" y="2560320"/>
+            <a:ext cx="3383280" cy="658368"/>
           </a:xfrm>
           <a:prstGeom prst="rect">
             <a:avLst/>
@@ -10478,41 +12370,13 @@
               <a:buNone/>
             </a:pPr>
             <a:r>
-              <a:rPr lang="en-US" sz="1500" b="1" dirty="0">
+              <a:rPr lang="en-US" sz="1300" b="1" dirty="0">
                 <a:solidFill>
                   <a:schemeClr val="tx1"/>
                 </a:solidFill>
-                <a:latin typeface="+mj-lt" pitchFamily="34" charset="0"/>
-                <a:ea typeface="+mj-lt" pitchFamily="34" charset="-122"/>
-                <a:cs typeface="+mj-lt" pitchFamily="34" charset="-120"/>
               </a:rPr>
-              <a:t>Persistence</a:t>
+              <a:t>Purge gap: </a:t>
             </a:r>
-            <a:endParaRPr lang="en-US" sz="1500" dirty="0"/>
-          </a:p>
-        </p:txBody>
-      </p:sp>
-      <p:sp>
-        <p:nvSpPr>
-          <p:cNvPr id="11" name="Model text 0"/>
-          <p:cNvSpPr txBox="1"/>
-          <p:nvPr/>
-        </p:nvSpPr>
-        <p:spPr>
-          <a:xfrm>
-            <a:off x="621792" y="1938528"/>
-            <a:ext cx="2240280" cy="713232"/>
-          </a:xfrm>
-          <a:prstGeom prst="rect">
-            <a:avLst/>
-          </a:prstGeom>
-          <a:noFill/>
-          <a:ln/>
-        </p:spPr>
-        <p:txBody>
-          <a:bodyPr wrap="square" lIns="0" tIns="0" rIns="0" bIns="0" rtlCol="0" anchor="t"/>
-          <a:lstStyle/>
-          <a:p>
             <a:pPr indent="0" marL="0">
               <a:buNone/>
             </a:pPr>
@@ -10522,7 +12386,7 @@
                   <a:schemeClr val="tx1"/>
                 </a:solidFill>
               </a:rPr>
-              <a:t>Repeat the last speed. The floor.</a:t>
+              <a:t>11 boundary windows dropped per split, so no target lies in two splits.</a:t>
             </a:r>
             <a:endParaRPr lang="en-US" sz="1300" dirty="0"/>
           </a:p>
@@ -10530,18 +12394,18 @@
       </p:sp>
       <p:sp>
         <p:nvSpPr>
-          <p:cNvPr id="12" name="Model card 1"/>
+          <p:cNvPr id="23" name="Rule card 2"/>
           <p:cNvSpPr/>
           <p:nvPr/>
         </p:nvSpPr>
         <p:spPr>
           <a:xfrm>
-            <a:off x="3291840" y="1371600"/>
-            <a:ext cx="2560320" cy="1325880"/>
+            <a:off x="4663440" y="2514600"/>
+            <a:ext cx="4023360" cy="749808"/>
           </a:xfrm>
           <a:prstGeom prst="roundRect">
             <a:avLst>
-              <a:gd name="adj" fmla="val 5517"/>
+              <a:gd name="adj" fmla="val 9756"/>
             </a:avLst>
           </a:prstGeom>
           <a:solidFill>
@@ -10557,24 +12421,24 @@
       </p:sp>
       <p:sp>
         <p:nvSpPr>
-          <p:cNvPr id="13" name="Badge 1"/>
+          <p:cNvPr id="24" name="Badge 2"/>
           <p:cNvSpPr/>
           <p:nvPr/>
         </p:nvSpPr>
         <p:spPr>
           <a:xfrm>
-            <a:off x="3456432" y="1517904"/>
-            <a:ext cx="329184" cy="329184"/>
+            <a:off x="4800600" y="2734056"/>
+            <a:ext cx="310896" cy="310896"/>
           </a:xfrm>
           <a:prstGeom prst="ellipse">
             <a:avLst/>
           </a:prstGeom>
           <a:solidFill>
-            <a:schemeClr val="accent1"/>
+            <a:schemeClr val="accent3"/>
           </a:solidFill>
           <a:ln w="12700">
             <a:solidFill>
-              <a:schemeClr val="accent1"/>
+              <a:schemeClr val="accent3"/>
             </a:solidFill>
             <a:prstDash val="solid"/>
           </a:ln>
@@ -10582,14 +12446,14 @@
       </p:sp>
       <p:sp>
         <p:nvSpPr>
-          <p:cNvPr id="14" name="Badge text 1"/>
+          <p:cNvPr id="25" name="Badge text 2"/>
           <p:cNvSpPr txBox="1"/>
           <p:nvPr/>
         </p:nvSpPr>
         <p:spPr>
           <a:xfrm>
-            <a:off x="3456432" y="1517904"/>
-            <a:ext cx="329184" cy="329184"/>
+            <a:off x="4800600" y="2734056"/>
+            <a:ext cx="310896" cy="310896"/>
           </a:xfrm>
           <a:prstGeom prst="rect">
             <a:avLst/>
@@ -10605,27 +12469,27 @@
               <a:buNone/>
             </a:pPr>
             <a:r>
-              <a:rPr lang="en-US" sz="1300" b="1" dirty="0">
+              <a:rPr lang="en-US" sz="1200" b="1" dirty="0">
                 <a:solidFill>
                   <a:schemeClr val="bg1"/>
                 </a:solidFill>
               </a:rPr>
-              <a:t>1</a:t>
+              <a:t>2</a:t>
             </a:r>
-            <a:endParaRPr lang="en-US" sz="1300" dirty="0"/>
+            <a:endParaRPr lang="en-US" sz="1200" dirty="0"/>
           </a:p>
         </p:txBody>
       </p:sp>
       <p:sp>
         <p:nvSpPr>
-          <p:cNvPr id="15" name="Model name 1"/>
+          <p:cNvPr id="26" name="Rule text 2"/>
           <p:cNvSpPr txBox="1"/>
           <p:nvPr/>
         </p:nvSpPr>
         <p:spPr>
           <a:xfrm>
-            <a:off x="3886200" y="1517904"/>
-            <a:ext cx="1874520" cy="329184"/>
+            <a:off x="5230368" y="2560320"/>
+            <a:ext cx="3383280" cy="658368"/>
           </a:xfrm>
           <a:prstGeom prst="rect">
             <a:avLst/>
@@ -10641,41 +12505,13 @@
               <a:buNone/>
             </a:pPr>
             <a:r>
-              <a:rPr lang="en-US" sz="1500" b="1" dirty="0">
+              <a:rPr lang="en-US" sz="1300" b="1" dirty="0">
                 <a:solidFill>
                   <a:schemeClr val="tx1"/>
                 </a:solidFill>
-                <a:latin typeface="+mj-lt" pitchFamily="34" charset="0"/>
-                <a:ea typeface="+mj-lt" pitchFamily="34" charset="-122"/>
-                <a:cs typeface="+mj-lt" pitchFamily="34" charset="-120"/>
               </a:rPr>
-              <a:t>Historical average</a:t>
+              <a:t>Train-only scaling: </a:t>
             </a:r>
-            <a:endParaRPr lang="en-US" sz="1500" dirty="0"/>
-          </a:p>
-        </p:txBody>
-      </p:sp>
-      <p:sp>
-        <p:nvSpPr>
-          <p:cNvPr id="16" name="Model text 1"/>
-          <p:cNvSpPr txBox="1"/>
-          <p:nvPr/>
-        </p:nvSpPr>
-        <p:spPr>
-          <a:xfrm>
-            <a:off x="3456432" y="1938528"/>
-            <a:ext cx="2240280" cy="713232"/>
-          </a:xfrm>
-          <a:prstGeom prst="rect">
-            <a:avLst/>
-          </a:prstGeom>
-          <a:noFill/>
-          <a:ln/>
-        </p:spPr>
-        <p:txBody>
-          <a:bodyPr wrap="square" lIns="0" tIns="0" rIns="0" bIns="0" rtlCol="0" anchor="t"/>
-          <a:lstStyle/>
-          <a:p>
             <a:pPr indent="0" marL="0">
               <a:buNone/>
             </a:pPr>
@@ -10685,7 +12521,7 @@
                   <a:schemeClr val="tx1"/>
                 </a:solidFill>
               </a:rPr>
-              <a:t>Mean per weekday or weekend and 5-minute slot.</a:t>
+              <a:t>Mean 58.6 mph and std 12.8 mph from training timestamps only.</a:t>
             </a:r>
             <a:endParaRPr lang="en-US" sz="1300" dirty="0"/>
           </a:p>
@@ -10693,18 +12529,18 @@
       </p:sp>
       <p:sp>
         <p:nvSpPr>
-          <p:cNvPr id="17" name="Model card 2"/>
+          <p:cNvPr id="27" name="Rule card 3"/>
           <p:cNvSpPr/>
           <p:nvPr/>
         </p:nvSpPr>
         <p:spPr>
           <a:xfrm>
-            <a:off x="6126480" y="1371600"/>
-            <a:ext cx="2560320" cy="1325880"/>
+            <a:off x="457200" y="3355848"/>
+            <a:ext cx="4023360" cy="749808"/>
           </a:xfrm>
           <a:prstGeom prst="roundRect">
             <a:avLst>
-              <a:gd name="adj" fmla="val 5517"/>
+              <a:gd name="adj" fmla="val 9756"/>
             </a:avLst>
           </a:prstGeom>
           <a:solidFill>
@@ -10720,24 +12556,24 @@
       </p:sp>
       <p:sp>
         <p:nvSpPr>
-          <p:cNvPr id="18" name="Badge 2"/>
+          <p:cNvPr id="28" name="Badge 3"/>
           <p:cNvSpPr/>
           <p:nvPr/>
         </p:nvSpPr>
         <p:spPr>
           <a:xfrm>
-            <a:off x="6291072" y="1517904"/>
-            <a:ext cx="329184" cy="329184"/>
+            <a:off x="594360" y="3575304"/>
+            <a:ext cx="310896" cy="310896"/>
           </a:xfrm>
           <a:prstGeom prst="ellipse">
             <a:avLst/>
           </a:prstGeom>
           <a:solidFill>
-            <a:schemeClr val="accent1"/>
+            <a:schemeClr val="accent3"/>
           </a:solidFill>
           <a:ln w="12700">
             <a:solidFill>
-              <a:schemeClr val="accent1"/>
+              <a:schemeClr val="accent3"/>
             </a:solidFill>
             <a:prstDash val="solid"/>
           </a:ln>
@@ -10745,14 +12581,14 @@
       </p:sp>
       <p:sp>
         <p:nvSpPr>
-          <p:cNvPr id="19" name="Badge text 2"/>
+          <p:cNvPr id="29" name="Badge text 3"/>
           <p:cNvSpPr txBox="1"/>
           <p:nvPr/>
         </p:nvSpPr>
         <p:spPr>
           <a:xfrm>
-            <a:off x="6291072" y="1517904"/>
-            <a:ext cx="329184" cy="329184"/>
+            <a:off x="594360" y="3575304"/>
+            <a:ext cx="310896" cy="310896"/>
           </a:xfrm>
           <a:prstGeom prst="rect">
             <a:avLst/>
@@ -10768,27 +12604,27 @@
               <a:buNone/>
             </a:pPr>
             <a:r>
-              <a:rPr lang="en-US" sz="1300" b="1" dirty="0">
+              <a:rPr lang="en-US" sz="1200" b="1" dirty="0">
                 <a:solidFill>
                   <a:schemeClr val="bg1"/>
                 </a:solidFill>
               </a:rPr>
-              <a:t>2</a:t>
+              <a:t>3</a:t>
             </a:r>
-            <a:endParaRPr lang="en-US" sz="1300" dirty="0"/>
+            <a:endParaRPr lang="en-US" sz="1200" dirty="0"/>
           </a:p>
         </p:txBody>
       </p:sp>
       <p:sp>
         <p:nvSpPr>
-          <p:cNvPr id="20" name="Model name 2"/>
+          <p:cNvPr id="30" name="Rule text 3"/>
           <p:cNvSpPr txBox="1"/>
           <p:nvPr/>
         </p:nvSpPr>
         <p:spPr>
           <a:xfrm>
-            <a:off x="6720840" y="1517904"/>
-            <a:ext cx="1874520" cy="329184"/>
+            <a:off x="1024128" y="3401568"/>
+            <a:ext cx="3383280" cy="658368"/>
           </a:xfrm>
           <a:prstGeom prst="rect">
             <a:avLst/>
@@ -10804,41 +12640,13 @@
               <a:buNone/>
             </a:pPr>
             <a:r>
-              <a:rPr lang="en-US" sz="1500" b="1" dirty="0">
+              <a:rPr lang="en-US" sz="1300" b="1" dirty="0">
                 <a:solidFill>
                   <a:schemeClr val="tx1"/>
                 </a:solidFill>
-                <a:latin typeface="+mj-lt" pitchFamily="34" charset="0"/>
-                <a:ea typeface="+mj-lt" pitchFamily="34" charset="-122"/>
-                <a:cs typeface="+mj-lt" pitchFamily="34" charset="-120"/>
               </a:rPr>
-              <a:t>Ridge per sensor</a:t>
+              <a:t>Outages masked: </a:t>
             </a:r>
-            <a:endParaRPr lang="en-US" sz="1500" dirty="0"/>
-          </a:p>
-        </p:txBody>
-      </p:sp>
-      <p:sp>
-        <p:nvSpPr>
-          <p:cNvPr id="21" name="Model text 2"/>
-          <p:cNvSpPr txBox="1"/>
-          <p:nvPr/>
-        </p:nvSpPr>
-        <p:spPr>
-          <a:xfrm>
-            <a:off x="6291072" y="1938528"/>
-            <a:ext cx="2240280" cy="713232"/>
-          </a:xfrm>
-          <a:prstGeom prst="rect">
-            <a:avLst/>
-          </a:prstGeom>
-          <a:noFill/>
-          <a:ln/>
-        </p:spPr>
-        <p:txBody>
-          <a:bodyPr wrap="square" lIns="0" tIns="0" rIns="0" bIns="0" rtlCol="0" anchor="t"/>
-          <a:lstStyle/>
-          <a:p>
             <a:pPr indent="0" marL="0">
               <a:buNone/>
             </a:pPr>
@@ -10848,7 +12656,7 @@
                   <a:schemeClr val="tx1"/>
                 </a:solidFill>
               </a:rPr>
-              <a:t>207 x 12 linear models on each sensor's own history.</a:t>
+              <a:t>Missing is NaN, never 0 mph: mask channel, masked loss and masked metrics.</a:t>
             </a:r>
             <a:endParaRPr lang="en-US" sz="1300" dirty="0"/>
           </a:p>
@@ -10856,181 +12664,18 @@
       </p:sp>
       <p:sp>
         <p:nvSpPr>
-          <p:cNvPr id="22" name="Model card 3"/>
+          <p:cNvPr id="31" name="Rule card 4"/>
           <p:cNvSpPr/>
           <p:nvPr/>
         </p:nvSpPr>
         <p:spPr>
           <a:xfrm>
-            <a:off x="457200" y="2834640"/>
-            <a:ext cx="2560320" cy="1325880"/>
+            <a:off x="4663440" y="3355848"/>
+            <a:ext cx="4023360" cy="749808"/>
           </a:xfrm>
           <a:prstGeom prst="roundRect">
             <a:avLst>
-              <a:gd name="adj" fmla="val 5517"/>
-            </a:avLst>
-          </a:prstGeom>
-          <a:solidFill>
-            <a:schemeClr val="tx1"/>
-          </a:solidFill>
-          <a:ln w="12700">
-            <a:solidFill>
-              <a:schemeClr val="tx1"/>
-            </a:solidFill>
-            <a:prstDash val="solid"/>
-          </a:ln>
-        </p:spPr>
-      </p:sp>
-      <p:sp>
-        <p:nvSpPr>
-          <p:cNvPr id="23" name="Badge 3"/>
-          <p:cNvSpPr/>
-          <p:nvPr/>
-        </p:nvSpPr>
-        <p:spPr>
-          <a:xfrm>
-            <a:off x="621792" y="2980944"/>
-            <a:ext cx="329184" cy="329184"/>
-          </a:xfrm>
-          <a:prstGeom prst="ellipse">
-            <a:avLst/>
-          </a:prstGeom>
-          <a:solidFill>
-            <a:schemeClr val="accent4"/>
-          </a:solidFill>
-          <a:ln w="12700">
-            <a:solidFill>
-              <a:schemeClr val="accent4"/>
-            </a:solidFill>
-            <a:prstDash val="solid"/>
-          </a:ln>
-        </p:spPr>
-      </p:sp>
-      <p:sp>
-        <p:nvSpPr>
-          <p:cNvPr id="24" name="Badge text 3"/>
-          <p:cNvSpPr txBox="1"/>
-          <p:nvPr/>
-        </p:nvSpPr>
-        <p:spPr>
-          <a:xfrm>
-            <a:off x="621792" y="2980944"/>
-            <a:ext cx="329184" cy="329184"/>
-          </a:xfrm>
-          <a:prstGeom prst="rect">
-            <a:avLst/>
-          </a:prstGeom>
-          <a:noFill/>
-          <a:ln/>
-        </p:spPr>
-        <p:txBody>
-          <a:bodyPr wrap="square" lIns="0" tIns="0" rIns="0" bIns="0" rtlCol="0" anchor="ctr"/>
-          <a:lstStyle/>
-          <a:p>
-            <a:pPr algn="ctr" indent="0" marL="0">
-              <a:buNone/>
-            </a:pPr>
-            <a:r>
-              <a:rPr lang="en-US" sz="1300" b="1" dirty="0">
-                <a:solidFill>
-                  <a:schemeClr val="tx1"/>
-                </a:solidFill>
-              </a:rPr>
-              <a:t>3</a:t>
-            </a:r>
-            <a:endParaRPr lang="en-US" sz="1300" dirty="0"/>
-          </a:p>
-        </p:txBody>
-      </p:sp>
-      <p:sp>
-        <p:nvSpPr>
-          <p:cNvPr id="25" name="Model name 3"/>
-          <p:cNvSpPr txBox="1"/>
-          <p:nvPr/>
-        </p:nvSpPr>
-        <p:spPr>
-          <a:xfrm>
-            <a:off x="1051560" y="2980944"/>
-            <a:ext cx="1874520" cy="329184"/>
-          </a:xfrm>
-          <a:prstGeom prst="rect">
-            <a:avLst/>
-          </a:prstGeom>
-          <a:noFill/>
-          <a:ln/>
-        </p:spPr>
-        <p:txBody>
-          <a:bodyPr wrap="square" lIns="0" tIns="0" rIns="0" bIns="0" rtlCol="0" anchor="ctr"/>
-          <a:lstStyle/>
-          <a:p>
-            <a:pPr indent="0" marL="0">
-              <a:buNone/>
-            </a:pPr>
-            <a:r>
-              <a:rPr lang="en-US" sz="1500" b="1" dirty="0">
-                <a:solidFill>
-                  <a:schemeClr val="bg1"/>
-                </a:solidFill>
-                <a:latin typeface="+mj-lt" pitchFamily="34" charset="0"/>
-                <a:ea typeface="+mj-lt" pitchFamily="34" charset="-122"/>
-                <a:cs typeface="+mj-lt" pitchFamily="34" charset="-120"/>
-              </a:rPr>
-              <a:t>XGBoost per horizon</a:t>
-            </a:r>
-            <a:endParaRPr lang="en-US" sz="1500" dirty="0"/>
-          </a:p>
-        </p:txBody>
-      </p:sp>
-      <p:sp>
-        <p:nvSpPr>
-          <p:cNvPr id="26" name="Model text 3"/>
-          <p:cNvSpPr txBox="1"/>
-          <p:nvPr/>
-        </p:nvSpPr>
-        <p:spPr>
-          <a:xfrm>
-            <a:off x="621792" y="3401568"/>
-            <a:ext cx="2240280" cy="713232"/>
-          </a:xfrm>
-          <a:prstGeom prst="rect">
-            <a:avLst/>
-          </a:prstGeom>
-          <a:noFill/>
-          <a:ln/>
-        </p:spPr>
-        <p:txBody>
-          <a:bodyPr wrap="square" lIns="0" tIns="0" rIns="0" bIns="0" rtlCol="0" anchor="t"/>
-          <a:lstStyle/>
-          <a:p>
-            <a:pPr indent="0" marL="0">
-              <a:buNone/>
-            </a:pPr>
-            <a:r>
-              <a:rPr lang="en-US" sz="1300" dirty="0">
-                <a:solidFill>
-                  <a:schemeClr val="bg2"/>
-                </a:solidFill>
-              </a:rPr>
-              <a:t>One model per horizon, all sensors stacked. The brief's baseline.</a:t>
-            </a:r>
-            <a:endParaRPr lang="en-US" sz="1300" dirty="0"/>
-          </a:p>
-        </p:txBody>
-      </p:sp>
-      <p:sp>
-        <p:nvSpPr>
-          <p:cNvPr id="27" name="Model card 4"/>
-          <p:cNvSpPr/>
-          <p:nvPr/>
-        </p:nvSpPr>
-        <p:spPr>
-          <a:xfrm>
-            <a:off x="3291840" y="2834640"/>
-            <a:ext cx="2560320" cy="1325880"/>
-          </a:xfrm>
-          <a:prstGeom prst="roundRect">
-            <a:avLst>
-              <a:gd name="adj" fmla="val 5517"/>
+              <a:gd name="adj" fmla="val 9756"/>
             </a:avLst>
           </a:prstGeom>
           <a:solidFill>
@@ -11046,24 +12691,24 @@
       </p:sp>
       <p:sp>
         <p:nvSpPr>
-          <p:cNvPr id="28" name="Badge 4"/>
+          <p:cNvPr id="32" name="Badge 4"/>
           <p:cNvSpPr/>
           <p:nvPr/>
         </p:nvSpPr>
         <p:spPr>
           <a:xfrm>
-            <a:off x="3456432" y="2980944"/>
-            <a:ext cx="329184" cy="329184"/>
+            <a:off x="4800600" y="3575304"/>
+            <a:ext cx="310896" cy="310896"/>
           </a:xfrm>
           <a:prstGeom prst="ellipse">
             <a:avLst/>
           </a:prstGeom>
           <a:solidFill>
-            <a:schemeClr val="accent1"/>
+            <a:schemeClr val="accent3"/>
           </a:solidFill>
           <a:ln w="12700">
             <a:solidFill>
-              <a:schemeClr val="accent1"/>
+              <a:schemeClr val="accent3"/>
             </a:solidFill>
             <a:prstDash val="solid"/>
           </a:ln>
@@ -11071,14 +12716,14 @@
       </p:sp>
       <p:sp>
         <p:nvSpPr>
-          <p:cNvPr id="29" name="Badge text 4"/>
+          <p:cNvPr id="33" name="Badge text 4"/>
           <p:cNvSpPr txBox="1"/>
           <p:nvPr/>
         </p:nvSpPr>
         <p:spPr>
           <a:xfrm>
-            <a:off x="3456432" y="2980944"/>
-            <a:ext cx="329184" cy="329184"/>
+            <a:off x="4800600" y="3575304"/>
+            <a:ext cx="310896" cy="310896"/>
           </a:xfrm>
           <a:prstGeom prst="rect">
             <a:avLst/>
@@ -11094,27 +12739,27 @@
               <a:buNone/>
             </a:pPr>
             <a:r>
-              <a:rPr lang="en-US" sz="1300" b="1" dirty="0">
+              <a:rPr lang="en-US" sz="1200" b="1" dirty="0">
                 <a:solidFill>
                   <a:schemeClr val="bg1"/>
                 </a:solidFill>
               </a:rPr>
               <a:t>4</a:t>
             </a:r>
-            <a:endParaRPr lang="en-US" sz="1300" dirty="0"/>
+            <a:endParaRPr lang="en-US" sz="1200" dirty="0"/>
           </a:p>
         </p:txBody>
       </p:sp>
       <p:sp>
         <p:nvSpPr>
-          <p:cNvPr id="30" name="Model name 4"/>
+          <p:cNvPr id="34" name="Rule text 4"/>
           <p:cNvSpPr txBox="1"/>
           <p:nvPr/>
         </p:nvSpPr>
         <p:spPr>
           <a:xfrm>
-            <a:off x="3886200" y="2980944"/>
-            <a:ext cx="1874520" cy="329184"/>
+            <a:off x="5230368" y="3401568"/>
+            <a:ext cx="3383280" cy="658368"/>
           </a:xfrm>
           <a:prstGeom prst="rect">
             <a:avLst/>
@@ -11130,41 +12775,13 @@
               <a:buNone/>
             </a:pPr>
             <a:r>
-              <a:rPr lang="en-US" sz="1500" b="1" dirty="0">
+              <a:rPr lang="en-US" sz="1300" b="1" dirty="0">
                 <a:solidFill>
                   <a:schemeClr val="tx1"/>
                 </a:solidFill>
-                <a:latin typeface="+mj-lt" pitchFamily="34" charset="0"/>
-                <a:ea typeface="+mj-lt" pitchFamily="34" charset="-122"/>
-                <a:cs typeface="+mj-lt" pitchFamily="34" charset="-120"/>
               </a:rPr>
-              <a:t>Random Forest</a:t>
+              <a:t>Equal history: </a:t>
             </a:r>
-            <a:endParaRPr lang="en-US" sz="1500" dirty="0"/>
-          </a:p>
-        </p:txBody>
-      </p:sp>
-      <p:sp>
-        <p:nvSpPr>
-          <p:cNvPr id="31" name="Model text 4"/>
-          <p:cNvSpPr txBox="1"/>
-          <p:nvPr/>
-        </p:nvSpPr>
-        <p:spPr>
-          <a:xfrm>
-            <a:off x="3456432" y="3401568"/>
-            <a:ext cx="2240280" cy="713232"/>
-          </a:xfrm>
-          <a:prstGeom prst="rect">
-            <a:avLst/>
-          </a:prstGeom>
-          <a:noFill/>
-          <a:ln/>
-        </p:spPr>
-        <p:txBody>
-          <a:bodyPr wrap="square" lIns="0" tIns="0" rIns="0" bIns="0" rtlCol="0" anchor="t"/>
-          <a:lstStyle/>
-          <a:p>
             <a:pPr indent="0" marL="0">
               <a:buNone/>
             </a:pPr>
@@ -11174,7 +12791,7 @@
                   <a:schemeClr val="tx1"/>
                 </a:solidFill>
               </a:rPr>
-              <a:t>One multi-output forest predicting all 12 horizons.</a:t>
+              <a:t>Every model sees the same 12 steps (60 min) and forecasts 12 (5 to 60 min).</a:t>
             </a:r>
             <a:endParaRPr lang="en-US" sz="1300" dirty="0"/>
           </a:p>
@@ -11182,66 +12799,14 @@
       </p:sp>
       <p:sp>
         <p:nvSpPr>
-          <p:cNvPr id="32" name="Model card 5"/>
-          <p:cNvSpPr/>
-          <p:nvPr/>
-        </p:nvSpPr>
-        <p:spPr>
-          <a:xfrm>
-            <a:off x="6126480" y="2834640"/>
-            <a:ext cx="2560320" cy="1325880"/>
-          </a:xfrm>
-          <a:prstGeom prst="roundRect">
-            <a:avLst>
-              <a:gd name="adj" fmla="val 5517"/>
-            </a:avLst>
-          </a:prstGeom>
-          <a:solidFill>
-            <a:schemeClr val="bg2"/>
-          </a:solidFill>
-          <a:ln w="12700">
-            <a:solidFill>
-              <a:schemeClr val="bg2"/>
-            </a:solidFill>
-            <a:prstDash val="solid"/>
-          </a:ln>
-        </p:spPr>
-      </p:sp>
-      <p:sp>
-        <p:nvSpPr>
-          <p:cNvPr id="33" name="Badge 5"/>
-          <p:cNvSpPr/>
-          <p:nvPr/>
-        </p:nvSpPr>
-        <p:spPr>
-          <a:xfrm>
-            <a:off x="6291072" y="2980944"/>
-            <a:ext cx="329184" cy="329184"/>
-          </a:xfrm>
-          <a:prstGeom prst="ellipse">
-            <a:avLst/>
-          </a:prstGeom>
-          <a:solidFill>
-            <a:schemeClr val="accent1"/>
-          </a:solidFill>
-          <a:ln w="12700">
-            <a:solidFill>
-              <a:schemeClr val="accent1"/>
-            </a:solidFill>
-            <a:prstDash val="solid"/>
-          </a:ln>
-        </p:spPr>
-      </p:sp>
-      <p:sp>
-        <p:nvSpPr>
-          <p:cNvPr id="34" name="Badge text 5"/>
+          <p:cNvPr id="35" name="Leak note"/>
           <p:cNvSpPr txBox="1"/>
           <p:nvPr/>
         </p:nvSpPr>
         <p:spPr>
           <a:xfrm>
-            <a:off x="6291072" y="2980944"/>
-            <a:ext cx="329184" cy="329184"/>
+            <a:off x="457200" y="4251960"/>
+            <a:ext cx="8229600" cy="365760"/>
           </a:xfrm>
           <a:prstGeom prst="rect">
             <a:avLst/>
@@ -11250,132 +12815,21 @@
           <a:ln/>
         </p:spPr>
         <p:txBody>
-          <a:bodyPr wrap="square" lIns="0" tIns="0" rIns="0" bIns="0" rtlCol="0" anchor="ctr"/>
-          <a:lstStyle/>
-          <a:p>
-            <a:pPr algn="ctr" indent="0" marL="0">
-              <a:buNone/>
-            </a:pPr>
-            <a:r>
-              <a:rPr lang="en-US" sz="1300" b="1" dirty="0">
-                <a:solidFill>
-                  <a:schemeClr val="bg1"/>
-                </a:solidFill>
-              </a:rPr>
-              <a:t>5</a:t>
-            </a:r>
-            <a:endParaRPr lang="en-US" sz="1300" dirty="0"/>
-          </a:p>
-        </p:txBody>
-      </p:sp>
-      <p:sp>
-        <p:nvSpPr>
-          <p:cNvPr id="35" name="Model name 5"/>
-          <p:cNvSpPr txBox="1"/>
-          <p:nvPr/>
-        </p:nvSpPr>
-        <p:spPr>
-          <a:xfrm>
-            <a:off x="6720840" y="2980944"/>
-            <a:ext cx="1874520" cy="329184"/>
-          </a:xfrm>
-          <a:prstGeom prst="rect">
-            <a:avLst/>
-          </a:prstGeom>
-          <a:noFill/>
-          <a:ln/>
-        </p:spPr>
-        <p:txBody>
-          <a:bodyPr wrap="square" lIns="0" tIns="0" rIns="0" bIns="0" rtlCol="0" anchor="ctr"/>
+          <a:bodyPr wrap="square" lIns="0" tIns="0" rIns="0" bIns="0" rtlCol="0" anchor="t"/>
           <a:lstStyle/>
           <a:p>
             <a:pPr indent="0" marL="0">
               <a:buNone/>
             </a:pPr>
             <a:r>
-              <a:rPr lang="en-US" sz="1500" b="1" dirty="0">
-                <a:solidFill>
-                  <a:schemeClr val="tx1"/>
-                </a:solidFill>
-                <a:latin typeface="+mj-lt" pitchFamily="34" charset="0"/>
-                <a:ea typeface="+mj-lt" pitchFamily="34" charset="-122"/>
-                <a:cs typeface="+mj-lt" pitchFamily="34" charset="-120"/>
+              <a:rPr lang="en-US" sz="1400" b="1" dirty="0">
+                <a:solidFill>
+                  <a:schemeClr val="accent5"/>
+                </a:solidFill>
               </a:rPr>
-              <a:t>LSTM, no graph</a:t>
+              <a:t>The reference DCRNN split overlaps train and val targets by 50 minutes. Ours does not: 12 leakage tests pass.</a:t>
             </a:r>
-            <a:endParaRPr lang="en-US" sz="1500" dirty="0"/>
-          </a:p>
-        </p:txBody>
-      </p:sp>
-      <p:sp>
-        <p:nvSpPr>
-          <p:cNvPr id="36" name="Model text 5"/>
-          <p:cNvSpPr txBox="1"/>
-          <p:nvPr/>
-        </p:nvSpPr>
-        <p:spPr>
-          <a:xfrm>
-            <a:off x="6291072" y="3401568"/>
-            <a:ext cx="2240280" cy="713232"/>
-          </a:xfrm>
-          <a:prstGeom prst="rect">
-            <a:avLst/>
-          </a:prstGeom>
-          <a:noFill/>
-          <a:ln/>
-        </p:spPr>
-        <p:txBody>
-          <a:bodyPr wrap="square" lIns="0" tIns="0" rIns="0" bIns="0" rtlCol="0" anchor="t"/>
-          <a:lstStyle/>
-          <a:p>
-            <a:pPr indent="0" marL="0">
-              <a:buNone/>
-            </a:pPr>
-            <a:r>
-              <a:rPr lang="en-US" sz="1300" dirty="0">
-                <a:solidFill>
-                  <a:schemeClr val="tx1"/>
-                </a:solidFill>
-              </a:rPr>
-              <a:t>Weights shared across sensors: isolates deep learning from the graph.</a:t>
-            </a:r>
-            <a:endParaRPr lang="en-US" sz="1300" dirty="0"/>
-          </a:p>
-        </p:txBody>
-      </p:sp>
-      <p:sp>
-        <p:nvSpPr>
-          <p:cNvPr id="37" name="Feature note"/>
-          <p:cNvSpPr txBox="1"/>
-          <p:nvPr/>
-        </p:nvSpPr>
-        <p:spPr>
-          <a:xfrm>
-            <a:off x="457200" y="4297680"/>
-            <a:ext cx="8229600" cy="411480"/>
-          </a:xfrm>
-          <a:prstGeom prst="rect">
-            <a:avLst/>
-          </a:prstGeom>
-          <a:noFill/>
-          <a:ln/>
-        </p:spPr>
-        <p:txBody>
-          <a:bodyPr wrap="square" lIns="0" tIns="0" rIns="0" bIns="0" rtlCol="0" anchor="t"/>
-          <a:lstStyle/>
-          <a:p>
-            <a:pPr indent="0" marL="0">
-              <a:buNone/>
-            </a:pPr>
-            <a:r>
-              <a:rPr lang="en-US" sz="1200" dirty="0">
-                <a:solidFill>
-                  <a:schemeClr val="accent6"/>
-                </a:solidFill>
-              </a:rPr>
-              <a:t>46 features per sensor and time: 12 lags, rolling stats, changes, missing flags, time of day and week, segment descriptors. Tuned on validation only. METR-LA has speed only, so flow and occupancy wait for PeMS (Phase 9).</a:t>
-            </a:r>
-            <a:endParaRPr lang="en-US" sz="1200" dirty="0"/>
+            <a:endParaRPr lang="en-US" sz="1400" dirty="0"/>
           </a:p>
         </p:txBody>
       </p:sp>
@@ -11484,7 +12938,7 @@
                 <a:ea typeface="+mj-lt" pitchFamily="34" charset="-122"/>
                 <a:cs typeface="+mj-lt" pitchFamily="34" charset="-120"/>
               </a:rPr>
-              <a:t>XGBoost is the strongest baseline</a:t>
+              <a:t>Six baselines, one fair protocol</a:t>
             </a:r>
             <a:endParaRPr lang="en-US" sz="3000" dirty="0"/>
           </a:p>
@@ -11595,42 +13049,26 @@
                   <a:schemeClr val="accent6"/>
                 </a:solidFill>
               </a:rPr>
-              <a:t>Test MAE (mph) by forecast horizon, lower is better</a:t>
+              <a:t>From trivial to strong, on the same windows, masks and metrics</a:t>
             </a:r>
             <a:endParaRPr lang="en-US" sz="1600" dirty="0"/>
           </a:p>
         </p:txBody>
       </p:sp>
-      <p:graphicFrame>
-        <p:nvGraphicFramePr>
-          <p:cNvPr id="7" name="MAE by horizon chart" descr=""/>
-          <p:cNvGraphicFramePr/>
-          <p:nvPr/>
-        </p:nvGraphicFramePr>
-        <p:xfrm>
-          <a:off x="365760" y="1280160"/>
-          <a:ext cx="5669280" cy="3383280"/>
-        </p:xfrm>
-        <a:graphic xmlns:a="http://schemas.openxmlformats.org/drawingml/2006/main">
-          <a:graphicData uri="http://schemas.openxmlformats.org/drawingml/2006/chart">
-            <c:chart xmlns:c="http://schemas.openxmlformats.org/drawingml/2006/chart" r:id="rId1"/>
-          </a:graphicData>
-        </a:graphic>
-      </p:graphicFrame>
-      <p:sp>
-        <p:nvSpPr>
-          <p:cNvPr id="8" name="Result card 1"/>
+      <p:sp>
+        <p:nvSpPr>
+          <p:cNvPr id="7" name="Model card 0"/>
           <p:cNvSpPr/>
           <p:nvPr/>
         </p:nvSpPr>
         <p:spPr>
           <a:xfrm>
-            <a:off x="6217920" y="1325880"/>
-            <a:ext cx="2468880" cy="1005840"/>
+            <a:off x="457200" y="1371600"/>
+            <a:ext cx="2560320" cy="1325880"/>
           </a:xfrm>
           <a:prstGeom prst="roundRect">
             <a:avLst>
-              <a:gd name="adj" fmla="val 7273"/>
+              <a:gd name="adj" fmla="val 5517"/>
             </a:avLst>
           </a:prstGeom>
           <a:solidFill>
@@ -11646,14 +13084,75 @@
       </p:sp>
       <p:sp>
         <p:nvSpPr>
-          <p:cNvPr id="9" name="Result number 1"/>
+          <p:cNvPr id="8" name="Badge 0"/>
+          <p:cNvSpPr/>
+          <p:nvPr/>
+        </p:nvSpPr>
+        <p:spPr>
+          <a:xfrm>
+            <a:off x="621792" y="1517904"/>
+            <a:ext cx="329184" cy="329184"/>
+          </a:xfrm>
+          <a:prstGeom prst="ellipse">
+            <a:avLst/>
+          </a:prstGeom>
+          <a:solidFill>
+            <a:schemeClr val="accent1"/>
+          </a:solidFill>
+          <a:ln w="12700">
+            <a:solidFill>
+              <a:schemeClr val="accent1"/>
+            </a:solidFill>
+            <a:prstDash val="solid"/>
+          </a:ln>
+        </p:spPr>
+      </p:sp>
+      <p:sp>
+        <p:nvSpPr>
+          <p:cNvPr id="9" name="Badge text 0"/>
           <p:cNvSpPr txBox="1"/>
           <p:nvPr/>
         </p:nvSpPr>
         <p:spPr>
           <a:xfrm>
-            <a:off x="6355080" y="1399032"/>
-            <a:ext cx="2240280" cy="411480"/>
+            <a:off x="621792" y="1517904"/>
+            <a:ext cx="329184" cy="329184"/>
+          </a:xfrm>
+          <a:prstGeom prst="rect">
+            <a:avLst/>
+          </a:prstGeom>
+          <a:noFill/>
+          <a:ln/>
+        </p:spPr>
+        <p:txBody>
+          <a:bodyPr wrap="square" lIns="0" tIns="0" rIns="0" bIns="0" rtlCol="0" anchor="ctr"/>
+          <a:lstStyle/>
+          <a:p>
+            <a:pPr algn="ctr" indent="0" marL="0">
+              <a:buNone/>
+            </a:pPr>
+            <a:r>
+              <a:rPr lang="en-US" sz="1300" b="1" dirty="0">
+                <a:solidFill>
+                  <a:schemeClr val="bg1"/>
+                </a:solidFill>
+              </a:rPr>
+              <a:t>0</a:t>
+            </a:r>
+            <a:endParaRPr lang="en-US" sz="1300" dirty="0"/>
+          </a:p>
+        </p:txBody>
+      </p:sp>
+      <p:sp>
+        <p:nvSpPr>
+          <p:cNvPr id="10" name="Model name 0"/>
+          <p:cNvSpPr txBox="1"/>
+          <p:nvPr/>
+        </p:nvSpPr>
+        <p:spPr>
+          <a:xfrm>
+            <a:off x="1051560" y="1517904"/>
+            <a:ext cx="1874520" cy="329184"/>
           </a:xfrm>
           <a:prstGeom prst="rect">
             <a:avLst/>
@@ -11669,30 +13168,30 @@
               <a:buNone/>
             </a:pPr>
             <a:r>
-              <a:rPr lang="en-US" sz="2000" b="1" dirty="0">
-                <a:solidFill>
-                  <a:schemeClr val="accent1"/>
+              <a:rPr lang="en-US" sz="1500" b="1" dirty="0">
+                <a:solidFill>
+                  <a:schemeClr val="tx1"/>
                 </a:solidFill>
                 <a:latin typeface="+mj-lt" pitchFamily="34" charset="0"/>
                 <a:ea typeface="+mj-lt" pitchFamily="34" charset="-122"/>
                 <a:cs typeface="+mj-lt" pitchFamily="34" charset="-120"/>
               </a:rPr>
-              <a:t>3.02  |  3.51  |  4.01</a:t>
+              <a:t>Persistence</a:t>
             </a:r>
-            <a:endParaRPr lang="en-US" sz="2000" dirty="0"/>
+            <a:endParaRPr lang="en-US" sz="1500" dirty="0"/>
           </a:p>
         </p:txBody>
       </p:sp>
       <p:sp>
         <p:nvSpPr>
-          <p:cNvPr id="10" name="Result label 1"/>
+          <p:cNvPr id="11" name="Model text 0"/>
           <p:cNvSpPr txBox="1"/>
           <p:nvPr/>
         </p:nvSpPr>
         <p:spPr>
           <a:xfrm>
-            <a:off x="6355080" y="1837944"/>
-            <a:ext cx="2240280" cy="457200"/>
+            <a:off x="621792" y="1938528"/>
+            <a:ext cx="2240280" cy="713232"/>
           </a:xfrm>
           <a:prstGeom prst="rect">
             <a:avLst/>
@@ -11708,31 +13207,31 @@
               <a:buNone/>
             </a:pPr>
             <a:r>
-              <a:rPr lang="en-US" sz="1200" dirty="0">
+              <a:rPr lang="en-US" sz="1300" dirty="0">
                 <a:solidFill>
                   <a:schemeClr val="tx1"/>
                 </a:solidFill>
               </a:rPr>
-              <a:t>XGBoost MAE (mph) at 15, 30, 60 min</a:t>
+              <a:t>Repeat the last speed. The floor.</a:t>
             </a:r>
-            <a:endParaRPr lang="en-US" sz="1200" dirty="0"/>
+            <a:endParaRPr lang="en-US" sz="1300" dirty="0"/>
           </a:p>
         </p:txBody>
       </p:sp>
       <p:sp>
         <p:nvSpPr>
-          <p:cNvPr id="11" name="Result card 2"/>
+          <p:cNvPr id="12" name="Model card 1"/>
           <p:cNvSpPr/>
           <p:nvPr/>
         </p:nvSpPr>
         <p:spPr>
           <a:xfrm>
-            <a:off x="6217920" y="2441448"/>
-            <a:ext cx="2468880" cy="1005840"/>
+            <a:off x="3291840" y="1371600"/>
+            <a:ext cx="2560320" cy="1325880"/>
           </a:xfrm>
           <a:prstGeom prst="roundRect">
             <a:avLst>
-              <a:gd name="adj" fmla="val 7273"/>
+              <a:gd name="adj" fmla="val 5517"/>
             </a:avLst>
           </a:prstGeom>
           <a:solidFill>
@@ -11748,14 +13247,75 @@
       </p:sp>
       <p:sp>
         <p:nvSpPr>
-          <p:cNvPr id="12" name="Result number 2"/>
+          <p:cNvPr id="13" name="Badge 1"/>
+          <p:cNvSpPr/>
+          <p:nvPr/>
+        </p:nvSpPr>
+        <p:spPr>
+          <a:xfrm>
+            <a:off x="3456432" y="1517904"/>
+            <a:ext cx="329184" cy="329184"/>
+          </a:xfrm>
+          <a:prstGeom prst="ellipse">
+            <a:avLst/>
+          </a:prstGeom>
+          <a:solidFill>
+            <a:schemeClr val="accent1"/>
+          </a:solidFill>
+          <a:ln w="12700">
+            <a:solidFill>
+              <a:schemeClr val="accent1"/>
+            </a:solidFill>
+            <a:prstDash val="solid"/>
+          </a:ln>
+        </p:spPr>
+      </p:sp>
+      <p:sp>
+        <p:nvSpPr>
+          <p:cNvPr id="14" name="Badge text 1"/>
           <p:cNvSpPr txBox="1"/>
           <p:nvPr/>
         </p:nvSpPr>
         <p:spPr>
           <a:xfrm>
-            <a:off x="6355080" y="2514600"/>
-            <a:ext cx="2240280" cy="411480"/>
+            <a:off x="3456432" y="1517904"/>
+            <a:ext cx="329184" cy="329184"/>
+          </a:xfrm>
+          <a:prstGeom prst="rect">
+            <a:avLst/>
+          </a:prstGeom>
+          <a:noFill/>
+          <a:ln/>
+        </p:spPr>
+        <p:txBody>
+          <a:bodyPr wrap="square" lIns="0" tIns="0" rIns="0" bIns="0" rtlCol="0" anchor="ctr"/>
+          <a:lstStyle/>
+          <a:p>
+            <a:pPr algn="ctr" indent="0" marL="0">
+              <a:buNone/>
+            </a:pPr>
+            <a:r>
+              <a:rPr lang="en-US" sz="1300" b="1" dirty="0">
+                <a:solidFill>
+                  <a:schemeClr val="bg1"/>
+                </a:solidFill>
+              </a:rPr>
+              <a:t>1</a:t>
+            </a:r>
+            <a:endParaRPr lang="en-US" sz="1300" dirty="0"/>
+          </a:p>
+        </p:txBody>
+      </p:sp>
+      <p:sp>
+        <p:nvSpPr>
+          <p:cNvPr id="15" name="Model name 1"/>
+          <p:cNvSpPr txBox="1"/>
+          <p:nvPr/>
+        </p:nvSpPr>
+        <p:spPr>
+          <a:xfrm>
+            <a:off x="3886200" y="1517904"/>
+            <a:ext cx="1874520" cy="329184"/>
           </a:xfrm>
           <a:prstGeom prst="rect">
             <a:avLst/>
@@ -11771,30 +13331,30 @@
               <a:buNone/>
             </a:pPr>
             <a:r>
-              <a:rPr lang="en-US" sz="2600" b="1" dirty="0">
-                <a:solidFill>
-                  <a:schemeClr val="accent3"/>
+              <a:rPr lang="en-US" sz="1500" b="1" dirty="0">
+                <a:solidFill>
+                  <a:schemeClr val="tx1"/>
                 </a:solidFill>
                 <a:latin typeface="+mj-lt" pitchFamily="34" charset="0"/>
                 <a:ea typeface="+mj-lt" pitchFamily="34" charset="-122"/>
                 <a:cs typeface="+mj-lt" pitchFamily="34" charset="-120"/>
               </a:rPr>
-              <a:t>-25%</a:t>
+              <a:t>Historical average</a:t>
             </a:r>
-            <a:endParaRPr lang="en-US" sz="2600" dirty="0"/>
+            <a:endParaRPr lang="en-US" sz="1500" dirty="0"/>
           </a:p>
         </p:txBody>
       </p:sp>
       <p:sp>
         <p:nvSpPr>
-          <p:cNvPr id="13" name="Result label 2"/>
+          <p:cNvPr id="16" name="Model text 1"/>
           <p:cNvSpPr txBox="1"/>
           <p:nvPr/>
         </p:nvSpPr>
         <p:spPr>
           <a:xfrm>
-            <a:off x="6355080" y="2953512"/>
-            <a:ext cx="2240280" cy="457200"/>
+            <a:off x="3456432" y="1938528"/>
+            <a:ext cx="2240280" cy="713232"/>
           </a:xfrm>
           <a:prstGeom prst="rect">
             <a:avLst/>
@@ -11810,31 +13370,31 @@
               <a:buNone/>
             </a:pPr>
             <a:r>
-              <a:rPr lang="en-US" sz="1200" dirty="0">
+              <a:rPr lang="en-US" sz="1300" dirty="0">
                 <a:solidFill>
                   <a:schemeClr val="tx1"/>
                 </a:solidFill>
               </a:rPr>
-              <a:t>MAE vs persistence at 60 min (4.01 vs 5.37)</a:t>
+              <a:t>Mean per weekday or weekend and 5-minute slot.</a:t>
             </a:r>
-            <a:endParaRPr lang="en-US" sz="1200" dirty="0"/>
+            <a:endParaRPr lang="en-US" sz="1300" dirty="0"/>
           </a:p>
         </p:txBody>
       </p:sp>
       <p:sp>
         <p:nvSpPr>
-          <p:cNvPr id="14" name="Result card 3"/>
+          <p:cNvPr id="17" name="Model card 2"/>
           <p:cNvSpPr/>
           <p:nvPr/>
         </p:nvSpPr>
         <p:spPr>
           <a:xfrm>
-            <a:off x="6217920" y="3557016"/>
-            <a:ext cx="2468880" cy="1005840"/>
+            <a:off x="6126480" y="1371600"/>
+            <a:ext cx="2560320" cy="1325880"/>
           </a:xfrm>
           <a:prstGeom prst="roundRect">
             <a:avLst>
-              <a:gd name="adj" fmla="val 7273"/>
+              <a:gd name="adj" fmla="val 5517"/>
             </a:avLst>
           </a:prstGeom>
           <a:solidFill>
@@ -11850,14 +13410,75 @@
       </p:sp>
       <p:sp>
         <p:nvSpPr>
-          <p:cNvPr id="15" name="Result number 3"/>
+          <p:cNvPr id="18" name="Badge 2"/>
+          <p:cNvSpPr/>
+          <p:nvPr/>
+        </p:nvSpPr>
+        <p:spPr>
+          <a:xfrm>
+            <a:off x="6291072" y="1517904"/>
+            <a:ext cx="329184" cy="329184"/>
+          </a:xfrm>
+          <a:prstGeom prst="ellipse">
+            <a:avLst/>
+          </a:prstGeom>
+          <a:solidFill>
+            <a:schemeClr val="accent1"/>
+          </a:solidFill>
+          <a:ln w="12700">
+            <a:solidFill>
+              <a:schemeClr val="accent1"/>
+            </a:solidFill>
+            <a:prstDash val="solid"/>
+          </a:ln>
+        </p:spPr>
+      </p:sp>
+      <p:sp>
+        <p:nvSpPr>
+          <p:cNvPr id="19" name="Badge text 2"/>
           <p:cNvSpPr txBox="1"/>
           <p:nvPr/>
         </p:nvSpPr>
         <p:spPr>
           <a:xfrm>
-            <a:off x="6355080" y="3630168"/>
-            <a:ext cx="2240280" cy="411480"/>
+            <a:off x="6291072" y="1517904"/>
+            <a:ext cx="329184" cy="329184"/>
+          </a:xfrm>
+          <a:prstGeom prst="rect">
+            <a:avLst/>
+          </a:prstGeom>
+          <a:noFill/>
+          <a:ln/>
+        </p:spPr>
+        <p:txBody>
+          <a:bodyPr wrap="square" lIns="0" tIns="0" rIns="0" bIns="0" rtlCol="0" anchor="ctr"/>
+          <a:lstStyle/>
+          <a:p>
+            <a:pPr algn="ctr" indent="0" marL="0">
+              <a:buNone/>
+            </a:pPr>
+            <a:r>
+              <a:rPr lang="en-US" sz="1300" b="1" dirty="0">
+                <a:solidFill>
+                  <a:schemeClr val="bg1"/>
+                </a:solidFill>
+              </a:rPr>
+              <a:t>2</a:t>
+            </a:r>
+            <a:endParaRPr lang="en-US" sz="1300" dirty="0"/>
+          </a:p>
+        </p:txBody>
+      </p:sp>
+      <p:sp>
+        <p:nvSpPr>
+          <p:cNvPr id="20" name="Model name 2"/>
+          <p:cNvSpPr txBox="1"/>
+          <p:nvPr/>
+        </p:nvSpPr>
+        <p:spPr>
+          <a:xfrm>
+            <a:off x="6720840" y="1517904"/>
+            <a:ext cx="1874520" cy="329184"/>
           </a:xfrm>
           <a:prstGeom prst="rect">
             <a:avLst/>
@@ -11873,30 +13494,555 @@
               <a:buNone/>
             </a:pPr>
             <a:r>
-              <a:rPr lang="en-US" sz="2600" b="1" dirty="0">
-                <a:solidFill>
-                  <a:schemeClr val="accent2"/>
+              <a:rPr lang="en-US" sz="1500" b="1" dirty="0">
+                <a:solidFill>
+                  <a:schemeClr val="tx1"/>
                 </a:solidFill>
                 <a:latin typeface="+mj-lt" pitchFamily="34" charset="0"/>
                 <a:ea typeface="+mj-lt" pitchFamily="34" charset="-122"/>
                 <a:cs typeface="+mj-lt" pitchFamily="34" charset="-120"/>
               </a:rPr>
-              <a:t>2.97</a:t>
+              <a:t>Ridge per sensor</a:t>
             </a:r>
-            <a:endParaRPr lang="en-US" sz="2600" dirty="0"/>
+            <a:endParaRPr lang="en-US" sz="1500" dirty="0"/>
           </a:p>
         </p:txBody>
       </p:sp>
       <p:sp>
         <p:nvSpPr>
-          <p:cNvPr id="16" name="Result label 3"/>
+          <p:cNvPr id="21" name="Model text 2"/>
           <p:cNvSpPr txBox="1"/>
           <p:nvPr/>
         </p:nvSpPr>
         <p:spPr>
           <a:xfrm>
-            <a:off x="6355080" y="4069080"/>
-            <a:ext cx="2240280" cy="457200"/>
+            <a:off x="6291072" y="1938528"/>
+            <a:ext cx="2240280" cy="713232"/>
+          </a:xfrm>
+          <a:prstGeom prst="rect">
+            <a:avLst/>
+          </a:prstGeom>
+          <a:noFill/>
+          <a:ln/>
+        </p:spPr>
+        <p:txBody>
+          <a:bodyPr wrap="square" lIns="0" tIns="0" rIns="0" bIns="0" rtlCol="0" anchor="t"/>
+          <a:lstStyle/>
+          <a:p>
+            <a:pPr indent="0" marL="0">
+              <a:buNone/>
+            </a:pPr>
+            <a:r>
+              <a:rPr lang="en-US" sz="1300" dirty="0">
+                <a:solidFill>
+                  <a:schemeClr val="tx1"/>
+                </a:solidFill>
+              </a:rPr>
+              <a:t>207 x 12 linear models on each sensor's own history.</a:t>
+            </a:r>
+            <a:endParaRPr lang="en-US" sz="1300" dirty="0"/>
+          </a:p>
+        </p:txBody>
+      </p:sp>
+      <p:sp>
+        <p:nvSpPr>
+          <p:cNvPr id="22" name="Model card 3"/>
+          <p:cNvSpPr/>
+          <p:nvPr/>
+        </p:nvSpPr>
+        <p:spPr>
+          <a:xfrm>
+            <a:off x="457200" y="2834640"/>
+            <a:ext cx="2560320" cy="1325880"/>
+          </a:xfrm>
+          <a:prstGeom prst="roundRect">
+            <a:avLst>
+              <a:gd name="adj" fmla="val 5517"/>
+            </a:avLst>
+          </a:prstGeom>
+          <a:solidFill>
+            <a:schemeClr val="tx1"/>
+          </a:solidFill>
+          <a:ln w="12700">
+            <a:solidFill>
+              <a:schemeClr val="tx1"/>
+            </a:solidFill>
+            <a:prstDash val="solid"/>
+          </a:ln>
+        </p:spPr>
+      </p:sp>
+      <p:sp>
+        <p:nvSpPr>
+          <p:cNvPr id="23" name="Badge 3"/>
+          <p:cNvSpPr/>
+          <p:nvPr/>
+        </p:nvSpPr>
+        <p:spPr>
+          <a:xfrm>
+            <a:off x="621792" y="2980944"/>
+            <a:ext cx="329184" cy="329184"/>
+          </a:xfrm>
+          <a:prstGeom prst="ellipse">
+            <a:avLst/>
+          </a:prstGeom>
+          <a:solidFill>
+            <a:schemeClr val="accent4"/>
+          </a:solidFill>
+          <a:ln w="12700">
+            <a:solidFill>
+              <a:schemeClr val="accent4"/>
+            </a:solidFill>
+            <a:prstDash val="solid"/>
+          </a:ln>
+        </p:spPr>
+      </p:sp>
+      <p:sp>
+        <p:nvSpPr>
+          <p:cNvPr id="24" name="Badge text 3"/>
+          <p:cNvSpPr txBox="1"/>
+          <p:nvPr/>
+        </p:nvSpPr>
+        <p:spPr>
+          <a:xfrm>
+            <a:off x="621792" y="2980944"/>
+            <a:ext cx="329184" cy="329184"/>
+          </a:xfrm>
+          <a:prstGeom prst="rect">
+            <a:avLst/>
+          </a:prstGeom>
+          <a:noFill/>
+          <a:ln/>
+        </p:spPr>
+        <p:txBody>
+          <a:bodyPr wrap="square" lIns="0" tIns="0" rIns="0" bIns="0" rtlCol="0" anchor="ctr"/>
+          <a:lstStyle/>
+          <a:p>
+            <a:pPr algn="ctr" indent="0" marL="0">
+              <a:buNone/>
+            </a:pPr>
+            <a:r>
+              <a:rPr lang="en-US" sz="1300" b="1" dirty="0">
+                <a:solidFill>
+                  <a:schemeClr val="tx1"/>
+                </a:solidFill>
+              </a:rPr>
+              <a:t>3</a:t>
+            </a:r>
+            <a:endParaRPr lang="en-US" sz="1300" dirty="0"/>
+          </a:p>
+        </p:txBody>
+      </p:sp>
+      <p:sp>
+        <p:nvSpPr>
+          <p:cNvPr id="25" name="Model name 3"/>
+          <p:cNvSpPr txBox="1"/>
+          <p:nvPr/>
+        </p:nvSpPr>
+        <p:spPr>
+          <a:xfrm>
+            <a:off x="1051560" y="2980944"/>
+            <a:ext cx="1874520" cy="329184"/>
+          </a:xfrm>
+          <a:prstGeom prst="rect">
+            <a:avLst/>
+          </a:prstGeom>
+          <a:noFill/>
+          <a:ln/>
+        </p:spPr>
+        <p:txBody>
+          <a:bodyPr wrap="square" lIns="0" tIns="0" rIns="0" bIns="0" rtlCol="0" anchor="ctr"/>
+          <a:lstStyle/>
+          <a:p>
+            <a:pPr indent="0" marL="0">
+              <a:buNone/>
+            </a:pPr>
+            <a:r>
+              <a:rPr lang="en-US" sz="1500" b="1" dirty="0">
+                <a:solidFill>
+                  <a:schemeClr val="bg1"/>
+                </a:solidFill>
+                <a:latin typeface="+mj-lt" pitchFamily="34" charset="0"/>
+                <a:ea typeface="+mj-lt" pitchFamily="34" charset="-122"/>
+                <a:cs typeface="+mj-lt" pitchFamily="34" charset="-120"/>
+              </a:rPr>
+              <a:t>XGBoost per horizon</a:t>
+            </a:r>
+            <a:endParaRPr lang="en-US" sz="1500" dirty="0"/>
+          </a:p>
+        </p:txBody>
+      </p:sp>
+      <p:sp>
+        <p:nvSpPr>
+          <p:cNvPr id="26" name="Model text 3"/>
+          <p:cNvSpPr txBox="1"/>
+          <p:nvPr/>
+        </p:nvSpPr>
+        <p:spPr>
+          <a:xfrm>
+            <a:off x="621792" y="3401568"/>
+            <a:ext cx="2240280" cy="713232"/>
+          </a:xfrm>
+          <a:prstGeom prst="rect">
+            <a:avLst/>
+          </a:prstGeom>
+          <a:noFill/>
+          <a:ln/>
+        </p:spPr>
+        <p:txBody>
+          <a:bodyPr wrap="square" lIns="0" tIns="0" rIns="0" bIns="0" rtlCol="0" anchor="t"/>
+          <a:lstStyle/>
+          <a:p>
+            <a:pPr indent="0" marL="0">
+              <a:buNone/>
+            </a:pPr>
+            <a:r>
+              <a:rPr lang="en-US" sz="1300" dirty="0">
+                <a:solidFill>
+                  <a:schemeClr val="bg2"/>
+                </a:solidFill>
+              </a:rPr>
+              <a:t>One model per horizon, all sensors stacked. The brief's baseline.</a:t>
+            </a:r>
+            <a:endParaRPr lang="en-US" sz="1300" dirty="0"/>
+          </a:p>
+        </p:txBody>
+      </p:sp>
+      <p:sp>
+        <p:nvSpPr>
+          <p:cNvPr id="27" name="Model card 4"/>
+          <p:cNvSpPr/>
+          <p:nvPr/>
+        </p:nvSpPr>
+        <p:spPr>
+          <a:xfrm>
+            <a:off x="3291840" y="2834640"/>
+            <a:ext cx="2560320" cy="1325880"/>
+          </a:xfrm>
+          <a:prstGeom prst="roundRect">
+            <a:avLst>
+              <a:gd name="adj" fmla="val 5517"/>
+            </a:avLst>
+          </a:prstGeom>
+          <a:solidFill>
+            <a:schemeClr val="bg2"/>
+          </a:solidFill>
+          <a:ln w="12700">
+            <a:solidFill>
+              <a:schemeClr val="bg2"/>
+            </a:solidFill>
+            <a:prstDash val="solid"/>
+          </a:ln>
+        </p:spPr>
+      </p:sp>
+      <p:sp>
+        <p:nvSpPr>
+          <p:cNvPr id="28" name="Badge 4"/>
+          <p:cNvSpPr/>
+          <p:nvPr/>
+        </p:nvSpPr>
+        <p:spPr>
+          <a:xfrm>
+            <a:off x="3456432" y="2980944"/>
+            <a:ext cx="329184" cy="329184"/>
+          </a:xfrm>
+          <a:prstGeom prst="ellipse">
+            <a:avLst/>
+          </a:prstGeom>
+          <a:solidFill>
+            <a:schemeClr val="accent1"/>
+          </a:solidFill>
+          <a:ln w="12700">
+            <a:solidFill>
+              <a:schemeClr val="accent1"/>
+            </a:solidFill>
+            <a:prstDash val="solid"/>
+          </a:ln>
+        </p:spPr>
+      </p:sp>
+      <p:sp>
+        <p:nvSpPr>
+          <p:cNvPr id="29" name="Badge text 4"/>
+          <p:cNvSpPr txBox="1"/>
+          <p:nvPr/>
+        </p:nvSpPr>
+        <p:spPr>
+          <a:xfrm>
+            <a:off x="3456432" y="2980944"/>
+            <a:ext cx="329184" cy="329184"/>
+          </a:xfrm>
+          <a:prstGeom prst="rect">
+            <a:avLst/>
+          </a:prstGeom>
+          <a:noFill/>
+          <a:ln/>
+        </p:spPr>
+        <p:txBody>
+          <a:bodyPr wrap="square" lIns="0" tIns="0" rIns="0" bIns="0" rtlCol="0" anchor="ctr"/>
+          <a:lstStyle/>
+          <a:p>
+            <a:pPr algn="ctr" indent="0" marL="0">
+              <a:buNone/>
+            </a:pPr>
+            <a:r>
+              <a:rPr lang="en-US" sz="1300" b="1" dirty="0">
+                <a:solidFill>
+                  <a:schemeClr val="bg1"/>
+                </a:solidFill>
+              </a:rPr>
+              <a:t>4</a:t>
+            </a:r>
+            <a:endParaRPr lang="en-US" sz="1300" dirty="0"/>
+          </a:p>
+        </p:txBody>
+      </p:sp>
+      <p:sp>
+        <p:nvSpPr>
+          <p:cNvPr id="30" name="Model name 4"/>
+          <p:cNvSpPr txBox="1"/>
+          <p:nvPr/>
+        </p:nvSpPr>
+        <p:spPr>
+          <a:xfrm>
+            <a:off x="3886200" y="2980944"/>
+            <a:ext cx="1874520" cy="329184"/>
+          </a:xfrm>
+          <a:prstGeom prst="rect">
+            <a:avLst/>
+          </a:prstGeom>
+          <a:noFill/>
+          <a:ln/>
+        </p:spPr>
+        <p:txBody>
+          <a:bodyPr wrap="square" lIns="0" tIns="0" rIns="0" bIns="0" rtlCol="0" anchor="ctr"/>
+          <a:lstStyle/>
+          <a:p>
+            <a:pPr indent="0" marL="0">
+              <a:buNone/>
+            </a:pPr>
+            <a:r>
+              <a:rPr lang="en-US" sz="1500" b="1" dirty="0">
+                <a:solidFill>
+                  <a:schemeClr val="tx1"/>
+                </a:solidFill>
+                <a:latin typeface="+mj-lt" pitchFamily="34" charset="0"/>
+                <a:ea typeface="+mj-lt" pitchFamily="34" charset="-122"/>
+                <a:cs typeface="+mj-lt" pitchFamily="34" charset="-120"/>
+              </a:rPr>
+              <a:t>Random Forest</a:t>
+            </a:r>
+            <a:endParaRPr lang="en-US" sz="1500" dirty="0"/>
+          </a:p>
+        </p:txBody>
+      </p:sp>
+      <p:sp>
+        <p:nvSpPr>
+          <p:cNvPr id="31" name="Model text 4"/>
+          <p:cNvSpPr txBox="1"/>
+          <p:nvPr/>
+        </p:nvSpPr>
+        <p:spPr>
+          <a:xfrm>
+            <a:off x="3456432" y="3401568"/>
+            <a:ext cx="2240280" cy="713232"/>
+          </a:xfrm>
+          <a:prstGeom prst="rect">
+            <a:avLst/>
+          </a:prstGeom>
+          <a:noFill/>
+          <a:ln/>
+        </p:spPr>
+        <p:txBody>
+          <a:bodyPr wrap="square" lIns="0" tIns="0" rIns="0" bIns="0" rtlCol="0" anchor="t"/>
+          <a:lstStyle/>
+          <a:p>
+            <a:pPr indent="0" marL="0">
+              <a:buNone/>
+            </a:pPr>
+            <a:r>
+              <a:rPr lang="en-US" sz="1300" dirty="0">
+                <a:solidFill>
+                  <a:schemeClr val="tx1"/>
+                </a:solidFill>
+              </a:rPr>
+              <a:t>One multi-output forest predicting all 12 horizons.</a:t>
+            </a:r>
+            <a:endParaRPr lang="en-US" sz="1300" dirty="0"/>
+          </a:p>
+        </p:txBody>
+      </p:sp>
+      <p:sp>
+        <p:nvSpPr>
+          <p:cNvPr id="32" name="Model card 5"/>
+          <p:cNvSpPr/>
+          <p:nvPr/>
+        </p:nvSpPr>
+        <p:spPr>
+          <a:xfrm>
+            <a:off x="6126480" y="2834640"/>
+            <a:ext cx="2560320" cy="1325880"/>
+          </a:xfrm>
+          <a:prstGeom prst="roundRect">
+            <a:avLst>
+              <a:gd name="adj" fmla="val 5517"/>
+            </a:avLst>
+          </a:prstGeom>
+          <a:solidFill>
+            <a:schemeClr val="bg2"/>
+          </a:solidFill>
+          <a:ln w="12700">
+            <a:solidFill>
+              <a:schemeClr val="bg2"/>
+            </a:solidFill>
+            <a:prstDash val="solid"/>
+          </a:ln>
+        </p:spPr>
+      </p:sp>
+      <p:sp>
+        <p:nvSpPr>
+          <p:cNvPr id="33" name="Badge 5"/>
+          <p:cNvSpPr/>
+          <p:nvPr/>
+        </p:nvSpPr>
+        <p:spPr>
+          <a:xfrm>
+            <a:off x="6291072" y="2980944"/>
+            <a:ext cx="329184" cy="329184"/>
+          </a:xfrm>
+          <a:prstGeom prst="ellipse">
+            <a:avLst/>
+          </a:prstGeom>
+          <a:solidFill>
+            <a:schemeClr val="accent1"/>
+          </a:solidFill>
+          <a:ln w="12700">
+            <a:solidFill>
+              <a:schemeClr val="accent1"/>
+            </a:solidFill>
+            <a:prstDash val="solid"/>
+          </a:ln>
+        </p:spPr>
+      </p:sp>
+      <p:sp>
+        <p:nvSpPr>
+          <p:cNvPr id="34" name="Badge text 5"/>
+          <p:cNvSpPr txBox="1"/>
+          <p:nvPr/>
+        </p:nvSpPr>
+        <p:spPr>
+          <a:xfrm>
+            <a:off x="6291072" y="2980944"/>
+            <a:ext cx="329184" cy="329184"/>
+          </a:xfrm>
+          <a:prstGeom prst="rect">
+            <a:avLst/>
+          </a:prstGeom>
+          <a:noFill/>
+          <a:ln/>
+        </p:spPr>
+        <p:txBody>
+          <a:bodyPr wrap="square" lIns="0" tIns="0" rIns="0" bIns="0" rtlCol="0" anchor="ctr"/>
+          <a:lstStyle/>
+          <a:p>
+            <a:pPr algn="ctr" indent="0" marL="0">
+              <a:buNone/>
+            </a:pPr>
+            <a:r>
+              <a:rPr lang="en-US" sz="1300" b="1" dirty="0">
+                <a:solidFill>
+                  <a:schemeClr val="bg1"/>
+                </a:solidFill>
+              </a:rPr>
+              <a:t>5</a:t>
+            </a:r>
+            <a:endParaRPr lang="en-US" sz="1300" dirty="0"/>
+          </a:p>
+        </p:txBody>
+      </p:sp>
+      <p:sp>
+        <p:nvSpPr>
+          <p:cNvPr id="35" name="Model name 5"/>
+          <p:cNvSpPr txBox="1"/>
+          <p:nvPr/>
+        </p:nvSpPr>
+        <p:spPr>
+          <a:xfrm>
+            <a:off x="6720840" y="2980944"/>
+            <a:ext cx="1874520" cy="329184"/>
+          </a:xfrm>
+          <a:prstGeom prst="rect">
+            <a:avLst/>
+          </a:prstGeom>
+          <a:noFill/>
+          <a:ln/>
+        </p:spPr>
+        <p:txBody>
+          <a:bodyPr wrap="square" lIns="0" tIns="0" rIns="0" bIns="0" rtlCol="0" anchor="ctr"/>
+          <a:lstStyle/>
+          <a:p>
+            <a:pPr indent="0" marL="0">
+              <a:buNone/>
+            </a:pPr>
+            <a:r>
+              <a:rPr lang="en-US" sz="1500" b="1" dirty="0">
+                <a:solidFill>
+                  <a:schemeClr val="tx1"/>
+                </a:solidFill>
+                <a:latin typeface="+mj-lt" pitchFamily="34" charset="0"/>
+                <a:ea typeface="+mj-lt" pitchFamily="34" charset="-122"/>
+                <a:cs typeface="+mj-lt" pitchFamily="34" charset="-120"/>
+              </a:rPr>
+              <a:t>LSTM, no graph</a:t>
+            </a:r>
+            <a:endParaRPr lang="en-US" sz="1500" dirty="0"/>
+          </a:p>
+        </p:txBody>
+      </p:sp>
+      <p:sp>
+        <p:nvSpPr>
+          <p:cNvPr id="36" name="Model text 5"/>
+          <p:cNvSpPr txBox="1"/>
+          <p:nvPr/>
+        </p:nvSpPr>
+        <p:spPr>
+          <a:xfrm>
+            <a:off x="6291072" y="3401568"/>
+            <a:ext cx="2240280" cy="713232"/>
+          </a:xfrm>
+          <a:prstGeom prst="rect">
+            <a:avLst/>
+          </a:prstGeom>
+          <a:noFill/>
+          <a:ln/>
+        </p:spPr>
+        <p:txBody>
+          <a:bodyPr wrap="square" lIns="0" tIns="0" rIns="0" bIns="0" rtlCol="0" anchor="t"/>
+          <a:lstStyle/>
+          <a:p>
+            <a:pPr indent="0" marL="0">
+              <a:buNone/>
+            </a:pPr>
+            <a:r>
+              <a:rPr lang="en-US" sz="1300" dirty="0">
+                <a:solidFill>
+                  <a:schemeClr val="tx1"/>
+                </a:solidFill>
+              </a:rPr>
+              <a:t>Weights shared across sensors: isolates deep learning from the graph.</a:t>
+            </a:r>
+            <a:endParaRPr lang="en-US" sz="1300" dirty="0"/>
+          </a:p>
+        </p:txBody>
+      </p:sp>
+      <p:sp>
+        <p:nvSpPr>
+          <p:cNvPr id="37" name="Feature note"/>
+          <p:cNvSpPr txBox="1"/>
+          <p:nvPr/>
+        </p:nvSpPr>
+        <p:spPr>
+          <a:xfrm>
+            <a:off x="457200" y="4297680"/>
+            <a:ext cx="8229600" cy="411480"/>
           </a:xfrm>
           <a:prstGeom prst="rect">
             <a:avLst/>
@@ -11914,10 +14060,10 @@
             <a:r>
               <a:rPr lang="en-US" sz="1200" dirty="0">
                 <a:solidFill>
-                  <a:schemeClr val="tx1"/>
+                  <a:schemeClr val="accent6"/>
                 </a:solidFill>
               </a:rPr>
-              <a:t>LSTM is best at 15 min but falls behind from 30 min on</a:t>
+              <a:t>46 features per sensor and time: 12 lags, rolling stats, changes, missing flags, time of day and week, segment descriptors. Tuned on validation only. METR-LA has speed only, so flow and occupancy wait for PeMS (Phase 9).</a:t>
             </a:r>
             <a:endParaRPr lang="en-US" sz="1200" dirty="0"/>
           </a:p>
@@ -12028,7 +14174,7 @@
                 <a:ea typeface="+mj-lt" pitchFamily="34" charset="-122"/>
                 <a:cs typeface="+mj-lt" pitchFamily="34" charset="-120"/>
               </a:rPr>
-              <a:t>All scores on the test block</a:t>
+              <a:t>XGBoost is the strongest baseline</a:t>
             </a:r>
             <a:endParaRPr lang="en-US" sz="3000" dirty="0"/>
           </a:p>
@@ -12139,6 +14285,550 @@
                   <a:schemeClr val="accent6"/>
                 </a:solidFill>
               </a:rPr>
+              <a:t>Test MAE (mph) by forecast horizon, lower is better</a:t>
+            </a:r>
+            <a:endParaRPr lang="en-US" sz="1600" dirty="0"/>
+          </a:p>
+        </p:txBody>
+      </p:sp>
+      <p:graphicFrame>
+        <p:nvGraphicFramePr>
+          <p:cNvPr id="7" name="MAE by horizon chart" descr=""/>
+          <p:cNvGraphicFramePr/>
+          <p:nvPr/>
+        </p:nvGraphicFramePr>
+        <p:xfrm>
+          <a:off x="365760" y="1280160"/>
+          <a:ext cx="5669280" cy="3383280"/>
+        </p:xfrm>
+        <a:graphic xmlns:a="http://schemas.openxmlformats.org/drawingml/2006/main">
+          <a:graphicData uri="http://schemas.openxmlformats.org/drawingml/2006/chart">
+            <c:chart xmlns:c="http://schemas.openxmlformats.org/drawingml/2006/chart" r:id="rId1"/>
+          </a:graphicData>
+        </a:graphic>
+      </p:graphicFrame>
+      <p:sp>
+        <p:nvSpPr>
+          <p:cNvPr id="8" name="Result card 1"/>
+          <p:cNvSpPr/>
+          <p:nvPr/>
+        </p:nvSpPr>
+        <p:spPr>
+          <a:xfrm>
+            <a:off x="6217920" y="1325880"/>
+            <a:ext cx="2468880" cy="1005840"/>
+          </a:xfrm>
+          <a:prstGeom prst="roundRect">
+            <a:avLst>
+              <a:gd name="adj" fmla="val 7273"/>
+            </a:avLst>
+          </a:prstGeom>
+          <a:solidFill>
+            <a:schemeClr val="bg2"/>
+          </a:solidFill>
+          <a:ln w="12700">
+            <a:solidFill>
+              <a:schemeClr val="bg2"/>
+            </a:solidFill>
+            <a:prstDash val="solid"/>
+          </a:ln>
+        </p:spPr>
+      </p:sp>
+      <p:sp>
+        <p:nvSpPr>
+          <p:cNvPr id="9" name="Result number 1"/>
+          <p:cNvSpPr txBox="1"/>
+          <p:nvPr/>
+        </p:nvSpPr>
+        <p:spPr>
+          <a:xfrm>
+            <a:off x="6355080" y="1399032"/>
+            <a:ext cx="2240280" cy="411480"/>
+          </a:xfrm>
+          <a:prstGeom prst="rect">
+            <a:avLst/>
+          </a:prstGeom>
+          <a:noFill/>
+          <a:ln/>
+        </p:spPr>
+        <p:txBody>
+          <a:bodyPr wrap="square" lIns="0" tIns="0" rIns="0" bIns="0" rtlCol="0" anchor="ctr"/>
+          <a:lstStyle/>
+          <a:p>
+            <a:pPr indent="0" marL="0">
+              <a:buNone/>
+            </a:pPr>
+            <a:r>
+              <a:rPr lang="en-US" sz="2000" b="1" dirty="0">
+                <a:solidFill>
+                  <a:schemeClr val="accent1"/>
+                </a:solidFill>
+                <a:latin typeface="+mj-lt" pitchFamily="34" charset="0"/>
+                <a:ea typeface="+mj-lt" pitchFamily="34" charset="-122"/>
+                <a:cs typeface="+mj-lt" pitchFamily="34" charset="-120"/>
+              </a:rPr>
+              <a:t>3.02  |  3.51  |  4.01</a:t>
+            </a:r>
+            <a:endParaRPr lang="en-US" sz="2000" dirty="0"/>
+          </a:p>
+        </p:txBody>
+      </p:sp>
+      <p:sp>
+        <p:nvSpPr>
+          <p:cNvPr id="10" name="Result label 1"/>
+          <p:cNvSpPr txBox="1"/>
+          <p:nvPr/>
+        </p:nvSpPr>
+        <p:spPr>
+          <a:xfrm>
+            <a:off x="6355080" y="1837944"/>
+            <a:ext cx="2240280" cy="457200"/>
+          </a:xfrm>
+          <a:prstGeom prst="rect">
+            <a:avLst/>
+          </a:prstGeom>
+          <a:noFill/>
+          <a:ln/>
+        </p:spPr>
+        <p:txBody>
+          <a:bodyPr wrap="square" lIns="0" tIns="0" rIns="0" bIns="0" rtlCol="0" anchor="t"/>
+          <a:lstStyle/>
+          <a:p>
+            <a:pPr indent="0" marL="0">
+              <a:buNone/>
+            </a:pPr>
+            <a:r>
+              <a:rPr lang="en-US" sz="1200" dirty="0">
+                <a:solidFill>
+                  <a:schemeClr val="tx1"/>
+                </a:solidFill>
+              </a:rPr>
+              <a:t>XGBoost MAE (mph) at 15, 30, 60 min</a:t>
+            </a:r>
+            <a:endParaRPr lang="en-US" sz="1200" dirty="0"/>
+          </a:p>
+        </p:txBody>
+      </p:sp>
+      <p:sp>
+        <p:nvSpPr>
+          <p:cNvPr id="11" name="Result card 2"/>
+          <p:cNvSpPr/>
+          <p:nvPr/>
+        </p:nvSpPr>
+        <p:spPr>
+          <a:xfrm>
+            <a:off x="6217920" y="2441448"/>
+            <a:ext cx="2468880" cy="1005840"/>
+          </a:xfrm>
+          <a:prstGeom prst="roundRect">
+            <a:avLst>
+              <a:gd name="adj" fmla="val 7273"/>
+            </a:avLst>
+          </a:prstGeom>
+          <a:solidFill>
+            <a:schemeClr val="bg2"/>
+          </a:solidFill>
+          <a:ln w="12700">
+            <a:solidFill>
+              <a:schemeClr val="bg2"/>
+            </a:solidFill>
+            <a:prstDash val="solid"/>
+          </a:ln>
+        </p:spPr>
+      </p:sp>
+      <p:sp>
+        <p:nvSpPr>
+          <p:cNvPr id="12" name="Result number 2"/>
+          <p:cNvSpPr txBox="1"/>
+          <p:nvPr/>
+        </p:nvSpPr>
+        <p:spPr>
+          <a:xfrm>
+            <a:off x="6355080" y="2514600"/>
+            <a:ext cx="2240280" cy="411480"/>
+          </a:xfrm>
+          <a:prstGeom prst="rect">
+            <a:avLst/>
+          </a:prstGeom>
+          <a:noFill/>
+          <a:ln/>
+        </p:spPr>
+        <p:txBody>
+          <a:bodyPr wrap="square" lIns="0" tIns="0" rIns="0" bIns="0" rtlCol="0" anchor="ctr"/>
+          <a:lstStyle/>
+          <a:p>
+            <a:pPr indent="0" marL="0">
+              <a:buNone/>
+            </a:pPr>
+            <a:r>
+              <a:rPr lang="en-US" sz="2600" b="1" dirty="0">
+                <a:solidFill>
+                  <a:schemeClr val="accent3"/>
+                </a:solidFill>
+                <a:latin typeface="+mj-lt" pitchFamily="34" charset="0"/>
+                <a:ea typeface="+mj-lt" pitchFamily="34" charset="-122"/>
+                <a:cs typeface="+mj-lt" pitchFamily="34" charset="-120"/>
+              </a:rPr>
+              <a:t>-25%</a:t>
+            </a:r>
+            <a:endParaRPr lang="en-US" sz="2600" dirty="0"/>
+          </a:p>
+        </p:txBody>
+      </p:sp>
+      <p:sp>
+        <p:nvSpPr>
+          <p:cNvPr id="13" name="Result label 2"/>
+          <p:cNvSpPr txBox="1"/>
+          <p:nvPr/>
+        </p:nvSpPr>
+        <p:spPr>
+          <a:xfrm>
+            <a:off x="6355080" y="2953512"/>
+            <a:ext cx="2240280" cy="457200"/>
+          </a:xfrm>
+          <a:prstGeom prst="rect">
+            <a:avLst/>
+          </a:prstGeom>
+          <a:noFill/>
+          <a:ln/>
+        </p:spPr>
+        <p:txBody>
+          <a:bodyPr wrap="square" lIns="0" tIns="0" rIns="0" bIns="0" rtlCol="0" anchor="t"/>
+          <a:lstStyle/>
+          <a:p>
+            <a:pPr indent="0" marL="0">
+              <a:buNone/>
+            </a:pPr>
+            <a:r>
+              <a:rPr lang="en-US" sz="1200" dirty="0">
+                <a:solidFill>
+                  <a:schemeClr val="tx1"/>
+                </a:solidFill>
+              </a:rPr>
+              <a:t>MAE vs persistence at 60 min (4.01 vs 5.37)</a:t>
+            </a:r>
+            <a:endParaRPr lang="en-US" sz="1200" dirty="0"/>
+          </a:p>
+        </p:txBody>
+      </p:sp>
+      <p:sp>
+        <p:nvSpPr>
+          <p:cNvPr id="14" name="Result card 3"/>
+          <p:cNvSpPr/>
+          <p:nvPr/>
+        </p:nvSpPr>
+        <p:spPr>
+          <a:xfrm>
+            <a:off x="6217920" y="3557016"/>
+            <a:ext cx="2468880" cy="1005840"/>
+          </a:xfrm>
+          <a:prstGeom prst="roundRect">
+            <a:avLst>
+              <a:gd name="adj" fmla="val 7273"/>
+            </a:avLst>
+          </a:prstGeom>
+          <a:solidFill>
+            <a:schemeClr val="bg2"/>
+          </a:solidFill>
+          <a:ln w="12700">
+            <a:solidFill>
+              <a:schemeClr val="bg2"/>
+            </a:solidFill>
+            <a:prstDash val="solid"/>
+          </a:ln>
+        </p:spPr>
+      </p:sp>
+      <p:sp>
+        <p:nvSpPr>
+          <p:cNvPr id="15" name="Result number 3"/>
+          <p:cNvSpPr txBox="1"/>
+          <p:nvPr/>
+        </p:nvSpPr>
+        <p:spPr>
+          <a:xfrm>
+            <a:off x="6355080" y="3630168"/>
+            <a:ext cx="2240280" cy="411480"/>
+          </a:xfrm>
+          <a:prstGeom prst="rect">
+            <a:avLst/>
+          </a:prstGeom>
+          <a:noFill/>
+          <a:ln/>
+        </p:spPr>
+        <p:txBody>
+          <a:bodyPr wrap="square" lIns="0" tIns="0" rIns="0" bIns="0" rtlCol="0" anchor="ctr"/>
+          <a:lstStyle/>
+          <a:p>
+            <a:pPr indent="0" marL="0">
+              <a:buNone/>
+            </a:pPr>
+            <a:r>
+              <a:rPr lang="en-US" sz="2600" b="1" dirty="0">
+                <a:solidFill>
+                  <a:schemeClr val="accent2"/>
+                </a:solidFill>
+                <a:latin typeface="+mj-lt" pitchFamily="34" charset="0"/>
+                <a:ea typeface="+mj-lt" pitchFamily="34" charset="-122"/>
+                <a:cs typeface="+mj-lt" pitchFamily="34" charset="-120"/>
+              </a:rPr>
+              <a:t>2.97</a:t>
+            </a:r>
+            <a:endParaRPr lang="en-US" sz="2600" dirty="0"/>
+          </a:p>
+        </p:txBody>
+      </p:sp>
+      <p:sp>
+        <p:nvSpPr>
+          <p:cNvPr id="16" name="Result label 3"/>
+          <p:cNvSpPr txBox="1"/>
+          <p:nvPr/>
+        </p:nvSpPr>
+        <p:spPr>
+          <a:xfrm>
+            <a:off x="6355080" y="4069080"/>
+            <a:ext cx="2240280" cy="457200"/>
+          </a:xfrm>
+          <a:prstGeom prst="rect">
+            <a:avLst/>
+          </a:prstGeom>
+          <a:noFill/>
+          <a:ln/>
+        </p:spPr>
+        <p:txBody>
+          <a:bodyPr wrap="square" lIns="0" tIns="0" rIns="0" bIns="0" rtlCol="0" anchor="t"/>
+          <a:lstStyle/>
+          <a:p>
+            <a:pPr indent="0" marL="0">
+              <a:buNone/>
+            </a:pPr>
+            <a:r>
+              <a:rPr lang="en-US" sz="1200" dirty="0">
+                <a:solidFill>
+                  <a:schemeClr val="tx1"/>
+                </a:solidFill>
+              </a:rPr>
+              <a:t>LSTM is best at 15 min but falls behind from 30 min on</a:t>
+            </a:r>
+            <a:endParaRPr lang="en-US" sz="1200" dirty="0"/>
+          </a:p>
+        </p:txBody>
+      </p:sp>
+      <p:sp>
+        <p:nvSpPr>
+          <p:cNvPr id="25" name="Slide Number Placeholder 0"/>
+          <p:cNvSpPr>
+            <a:spLocks noGrp="1"/>
+          </p:cNvSpPr>
+          <p:nvPr>
+            <p:ph type="sldNum" sz="quarter" idx="4294967295"/>
+          </p:nvPr>
+        </p:nvSpPr>
+        <p:spPr>
+          <a:xfrm>
+            <a:off x="8138160" y="4754880"/>
+            <a:ext cx="548640" cy="228600"/>
+          </a:xfrm>
+          <a:prstGeom prst="rect">
+            <a:avLst/>
+          </a:prstGeom>
+          <a:extLst>
+            <a:ext uri="{C572A759-6A51-4108-AA02-DFA0A04FC94B}">
+              <ma14:wrappingTextBoxFlag xmlns:ma14="http://schemas.microsoft.com/office/mac/drawingml/2011/main" val="0"/>
+            </a:ext>
+          </a:extLst>
+        </p:spPr>
+        <p:txBody>
+          <a:bodyPr/>
+          <a:lstStyle>
+            <a:lvl1pPr>
+              <a:defRPr sz="1000">
+                <a:solidFill>
+                  <a:schemeClr val="accent6"/>
+                </a:solidFill>
+              </a:defRPr>
+            </a:lvl1pPr>
+          </a:lstStyle>
+          <a:p>
+            <a:pPr algn="r"/>
+            <a:fld id="{F7021451-1387-4CA6-816F-3879F97B5CBC}" type="slidenum">
+              <a:rPr b="0" lang="en-US"/>
+              <a:t>7</a:t>
+            </a:fld>
+            <a:endParaRPr lang="en-US"/>
+          </a:p>
+        </p:txBody>
+      </p:sp>
+    </p:spTree>
+  </p:cSld>
+  <p:clrMapOvr>
+    <a:masterClrMapping/>
+  </p:clrMapOvr>
+</p:sld>
+</file>
+
+<file path=ppt/slides/slide8.xml><?xml version="1.0" encoding="utf-8"?>
+<p:sld xmlns:a="http://schemas.openxmlformats.org/drawingml/2006/main" xmlns:r="http://schemas.openxmlformats.org/officeDocument/2006/relationships" xmlns:p="http://schemas.openxmlformats.org/presentationml/2006/main">
+  <p:cSld name="Slide 8">
+    <p:spTree>
+      <p:nvGrpSpPr>
+        <p:cNvPr id="1" name=""/>
+        <p:cNvGrpSpPr/>
+        <p:nvPr/>
+      </p:nvGrpSpPr>
+      <p:grpSpPr>
+        <a:xfrm>
+          <a:off x="0" y="0"/>
+          <a:ext cx="0" cy="0"/>
+          <a:chOff x="0" y="0"/>
+          <a:chExt cx="0" cy="0"/>
+        </a:xfrm>
+      </p:grpSpPr>
+      <p:sp>
+        <p:nvSpPr>
+          <p:cNvPr id="2" name="Text 1"/>
+          <p:cNvSpPr/>
+          <p:nvPr>
+            <p:ph idx="101" type="title" hasCustomPrompt="1"/>
+          </p:nvPr>
+        </p:nvSpPr>
+        <p:spPr>
+          <a:xfrm>
+            <a:off x="457200" y="292608"/>
+            <a:ext cx="7406640" cy="566928"/>
+          </a:xfrm>
+          <a:prstGeom prst="rect">
+            <a:avLst/>
+          </a:prstGeom>
+          <a:noFill/>
+          <a:ln/>
+        </p:spPr>
+        <p:txBody>
+          <a:bodyPr wrap="square" lIns="0" tIns="0" rIns="0" bIns="0" rtlCol="0" anchor="ctr"/>
+          <a:lstStyle/>
+          <a:p>
+            <a:pPr algn="l" indent="0" marL="0">
+              <a:buNone/>
+            </a:pPr>
+            <a:r>
+              <a:rPr lang="en-US" sz="3000" b="1" dirty="0">
+                <a:solidFill>
+                  <a:schemeClr val="tx1"/>
+                </a:solidFill>
+                <a:latin typeface="+mj-lt" pitchFamily="34" charset="0"/>
+                <a:ea typeface="+mj-lt" pitchFamily="34" charset="-122"/>
+                <a:cs typeface="+mj-lt" pitchFamily="34" charset="-120"/>
+              </a:rPr>
+              <a:t>All scores on the test block</a:t>
+            </a:r>
+            <a:endParaRPr lang="en-US" sz="3000" dirty="0"/>
+          </a:p>
+        </p:txBody>
+      </p:sp>
+      <p:sp>
+        <p:nvSpPr>
+          <p:cNvPr id="3" name="Signal red"/>
+          <p:cNvSpPr/>
+          <p:nvPr/>
+        </p:nvSpPr>
+        <p:spPr>
+          <a:xfrm>
+            <a:off x="8028432" y="457200"/>
+            <a:ext cx="146304" cy="146304"/>
+          </a:xfrm>
+          <a:prstGeom prst="ellipse">
+            <a:avLst/>
+          </a:prstGeom>
+          <a:solidFill>
+            <a:schemeClr val="accent5"/>
+          </a:solidFill>
+          <a:ln w="12700">
+            <a:solidFill>
+              <a:schemeClr val="accent5"/>
+            </a:solidFill>
+            <a:prstDash val="solid"/>
+          </a:ln>
+        </p:spPr>
+      </p:sp>
+      <p:sp>
+        <p:nvSpPr>
+          <p:cNvPr id="4" name="Signal amber"/>
+          <p:cNvSpPr/>
+          <p:nvPr/>
+        </p:nvSpPr>
+        <p:spPr>
+          <a:xfrm>
+            <a:off x="8247888" y="457200"/>
+            <a:ext cx="146304" cy="146304"/>
+          </a:xfrm>
+          <a:prstGeom prst="ellipse">
+            <a:avLst/>
+          </a:prstGeom>
+          <a:solidFill>
+            <a:schemeClr val="accent4"/>
+          </a:solidFill>
+          <a:ln w="12700">
+            <a:solidFill>
+              <a:schemeClr val="accent4"/>
+            </a:solidFill>
+            <a:prstDash val="solid"/>
+          </a:ln>
+        </p:spPr>
+      </p:sp>
+      <p:sp>
+        <p:nvSpPr>
+          <p:cNvPr id="5" name="Signal green"/>
+          <p:cNvSpPr/>
+          <p:nvPr/>
+        </p:nvSpPr>
+        <p:spPr>
+          <a:xfrm>
+            <a:off x="8467344" y="457200"/>
+            <a:ext cx="146304" cy="146304"/>
+          </a:xfrm>
+          <a:prstGeom prst="ellipse">
+            <a:avLst/>
+          </a:prstGeom>
+          <a:solidFill>
+            <a:schemeClr val="accent3"/>
+          </a:solidFill>
+          <a:ln w="12700">
+            <a:solidFill>
+              <a:schemeClr val="accent3"/>
+            </a:solidFill>
+            <a:prstDash val="solid"/>
+          </a:ln>
+        </p:spPr>
+      </p:sp>
+      <p:sp>
+        <p:nvSpPr>
+          <p:cNvPr id="6" name="Subtitle"/>
+          <p:cNvSpPr txBox="1"/>
+          <p:nvPr/>
+        </p:nvSpPr>
+        <p:spPr>
+          <a:xfrm>
+            <a:off x="457200" y="896112"/>
+            <a:ext cx="8138160" cy="292608"/>
+          </a:xfrm>
+          <a:prstGeom prst="rect">
+            <a:avLst/>
+          </a:prstGeom>
+          <a:noFill/>
+          <a:ln/>
+        </p:spPr>
+        <p:txBody>
+          <a:bodyPr wrap="square" lIns="0" tIns="0" rIns="0" bIns="0" rtlCol="0" anchor="ctr"/>
+          <a:lstStyle/>
+          <a:p>
+            <a:pPr indent="0" marL="0">
+              <a:buNone/>
+            </a:pPr>
+            <a:r>
+              <a:rPr lang="en-US" sz="1600" dirty="0">
+                <a:solidFill>
+                  <a:schemeClr val="accent6"/>
+                </a:solidFill>
+              </a:rPr>
               <a:t>The last 24 days of data, never used for tuning</a:t>
             </a:r>
             <a:endParaRPr lang="en-US" sz="1600" dirty="0"/>
@@ -12147,7 +14837,7 @@
       </p:sp>
       <p:graphicFrame>
         <p:nvGraphicFramePr>
-          <p:cNvPr id="8" name="Scores table"/>
+          <p:cNvPr id="9" name="Scores table"/>
           <p:cNvGraphicFramePr>
             <a:graphicFrameLocks noGrp="1"/>
           </p:cNvGraphicFramePr>
@@ -17287,586 +19977,6 @@
             <a:pPr algn="r"/>
             <a:fld id="{F7021451-1387-4CA6-816F-3879F97B5CBC}" type="slidenum">
               <a:rPr b="0" lang="en-US"/>
-              <a:t>7</a:t>
-            </a:fld>
-            <a:endParaRPr lang="en-US"/>
-          </a:p>
-        </p:txBody>
-      </p:sp>
-    </p:spTree>
-  </p:cSld>
-  <p:clrMapOvr>
-    <a:masterClrMapping/>
-  </p:clrMapOvr>
-</p:sld>
-</file>
-
-<file path=ppt/slides/slide8.xml><?xml version="1.0" encoding="utf-8"?>
-<p:sld xmlns:a="http://schemas.openxmlformats.org/drawingml/2006/main" xmlns:r="http://schemas.openxmlformats.org/officeDocument/2006/relationships" xmlns:p="http://schemas.openxmlformats.org/presentationml/2006/main">
-  <p:cSld name="Slide 8">
-    <p:spTree>
-      <p:nvGrpSpPr>
-        <p:cNvPr id="1" name=""/>
-        <p:cNvGrpSpPr/>
-        <p:nvPr/>
-      </p:nvGrpSpPr>
-      <p:grpSpPr>
-        <a:xfrm>
-          <a:off x="0" y="0"/>
-          <a:ext cx="0" cy="0"/>
-          <a:chOff x="0" y="0"/>
-          <a:chExt cx="0" cy="0"/>
-        </a:xfrm>
-      </p:grpSpPr>
-      <p:sp>
-        <p:nvSpPr>
-          <p:cNvPr id="2" name="Text 1"/>
-          <p:cNvSpPr/>
-          <p:nvPr>
-            <p:ph idx="101" type="title" hasCustomPrompt="1"/>
-          </p:nvPr>
-        </p:nvSpPr>
-        <p:spPr>
-          <a:xfrm>
-            <a:off x="457200" y="292608"/>
-            <a:ext cx="7406640" cy="566928"/>
-          </a:xfrm>
-          <a:prstGeom prst="rect">
-            <a:avLst/>
-          </a:prstGeom>
-          <a:noFill/>
-          <a:ln/>
-        </p:spPr>
-        <p:txBody>
-          <a:bodyPr wrap="square" lIns="0" tIns="0" rIns="0" bIns="0" rtlCol="0" anchor="ctr"/>
-          <a:lstStyle/>
-          <a:p>
-            <a:pPr algn="l" indent="0" marL="0">
-              <a:buNone/>
-            </a:pPr>
-            <a:r>
-              <a:rPr lang="en-US" sz="3000" b="1" dirty="0">
-                <a:solidFill>
-                  <a:schemeClr val="tx1"/>
-                </a:solidFill>
-                <a:latin typeface="+mj-lt" pitchFamily="34" charset="0"/>
-                <a:ea typeface="+mj-lt" pitchFamily="34" charset="-122"/>
-                <a:cs typeface="+mj-lt" pitchFamily="34" charset="-120"/>
-              </a:rPr>
-              <a:t>Rush hour is the hard part</a:t>
-            </a:r>
-            <a:endParaRPr lang="en-US" sz="3000" dirty="0"/>
-          </a:p>
-        </p:txBody>
-      </p:sp>
-      <p:sp>
-        <p:nvSpPr>
-          <p:cNvPr id="3" name="Signal red"/>
-          <p:cNvSpPr/>
-          <p:nvPr/>
-        </p:nvSpPr>
-        <p:spPr>
-          <a:xfrm>
-            <a:off x="8028432" y="457200"/>
-            <a:ext cx="146304" cy="146304"/>
-          </a:xfrm>
-          <a:prstGeom prst="ellipse">
-            <a:avLst/>
-          </a:prstGeom>
-          <a:solidFill>
-            <a:schemeClr val="accent5"/>
-          </a:solidFill>
-          <a:ln w="12700">
-            <a:solidFill>
-              <a:schemeClr val="accent5"/>
-            </a:solidFill>
-            <a:prstDash val="solid"/>
-          </a:ln>
-        </p:spPr>
-      </p:sp>
-      <p:sp>
-        <p:nvSpPr>
-          <p:cNvPr id="4" name="Signal amber"/>
-          <p:cNvSpPr/>
-          <p:nvPr/>
-        </p:nvSpPr>
-        <p:spPr>
-          <a:xfrm>
-            <a:off x="8247888" y="457200"/>
-            <a:ext cx="146304" cy="146304"/>
-          </a:xfrm>
-          <a:prstGeom prst="ellipse">
-            <a:avLst/>
-          </a:prstGeom>
-          <a:solidFill>
-            <a:schemeClr val="accent4"/>
-          </a:solidFill>
-          <a:ln w="12700">
-            <a:solidFill>
-              <a:schemeClr val="accent4"/>
-            </a:solidFill>
-            <a:prstDash val="solid"/>
-          </a:ln>
-        </p:spPr>
-      </p:sp>
-      <p:sp>
-        <p:nvSpPr>
-          <p:cNvPr id="5" name="Signal green"/>
-          <p:cNvSpPr/>
-          <p:nvPr/>
-        </p:nvSpPr>
-        <p:spPr>
-          <a:xfrm>
-            <a:off x="8467344" y="457200"/>
-            <a:ext cx="146304" cy="146304"/>
-          </a:xfrm>
-          <a:prstGeom prst="ellipse">
-            <a:avLst/>
-          </a:prstGeom>
-          <a:solidFill>
-            <a:schemeClr val="accent3"/>
-          </a:solidFill>
-          <a:ln w="12700">
-            <a:solidFill>
-              <a:schemeClr val="accent3"/>
-            </a:solidFill>
-            <a:prstDash val="solid"/>
-          </a:ln>
-        </p:spPr>
-      </p:sp>
-      <p:sp>
-        <p:nvSpPr>
-          <p:cNvPr id="6" name="Subtitle"/>
-          <p:cNvSpPr txBox="1"/>
-          <p:nvPr/>
-        </p:nvSpPr>
-        <p:spPr>
-          <a:xfrm>
-            <a:off x="457200" y="896112"/>
-            <a:ext cx="8138160" cy="292608"/>
-          </a:xfrm>
-          <a:prstGeom prst="rect">
-            <a:avLst/>
-          </a:prstGeom>
-          <a:noFill/>
-          <a:ln/>
-        </p:spPr>
-        <p:txBody>
-          <a:bodyPr wrap="square" lIns="0" tIns="0" rIns="0" bIns="0" rtlCol="0" anchor="ctr"/>
-          <a:lstStyle/>
-          <a:p>
-            <a:pPr indent="0" marL="0">
-              <a:buNone/>
-            </a:pPr>
-            <a:r>
-              <a:rPr lang="en-US" sz="1600" dirty="0">
-                <a:solidFill>
-                  <a:schemeClr val="accent6"/>
-                </a:solidFill>
-              </a:rPr>
-              <a:t>Test MAE (mph) for 30-minute forecasts, by time of day</a:t>
-            </a:r>
-            <a:endParaRPr lang="en-US" sz="1600" dirty="0"/>
-          </a:p>
-        </p:txBody>
-      </p:sp>
-      <p:graphicFrame>
-        <p:nvGraphicFramePr>
-          <p:cNvPr id="7" name="Peak vs off-peak chart" descr=""/>
-          <p:cNvGraphicFramePr/>
-          <p:nvPr/>
-        </p:nvGraphicFramePr>
-        <p:xfrm>
-          <a:off x="365760" y="1280160"/>
-          <a:ext cx="5669280" cy="3200400"/>
-        </p:xfrm>
-        <a:graphic xmlns:a="http://schemas.openxmlformats.org/drawingml/2006/main">
-          <a:graphicData uri="http://schemas.openxmlformats.org/drawingml/2006/chart">
-            <c:chart xmlns:c="http://schemas.openxmlformats.org/drawingml/2006/chart" r:id="rId1"/>
-          </a:graphicData>
-        </a:graphic>
-      </p:graphicFrame>
-      <p:sp>
-        <p:nvSpPr>
-          <p:cNvPr id="8" name="Peak card 1"/>
-          <p:cNvSpPr/>
-          <p:nvPr/>
-        </p:nvSpPr>
-        <p:spPr>
-          <a:xfrm>
-            <a:off x="6217920" y="1325880"/>
-            <a:ext cx="2468880" cy="1005840"/>
-          </a:xfrm>
-          <a:prstGeom prst="roundRect">
-            <a:avLst>
-              <a:gd name="adj" fmla="val 7273"/>
-            </a:avLst>
-          </a:prstGeom>
-          <a:solidFill>
-            <a:schemeClr val="bg2"/>
-          </a:solidFill>
-          <a:ln w="12700">
-            <a:solidFill>
-              <a:schemeClr val="bg2"/>
-            </a:solidFill>
-            <a:prstDash val="solid"/>
-          </a:ln>
-        </p:spPr>
-      </p:sp>
-      <p:sp>
-        <p:nvSpPr>
-          <p:cNvPr id="9" name="Peak number 1"/>
-          <p:cNvSpPr txBox="1"/>
-          <p:nvPr/>
-        </p:nvSpPr>
-        <p:spPr>
-          <a:xfrm>
-            <a:off x="6355080" y="1399032"/>
-            <a:ext cx="2240280" cy="411480"/>
-          </a:xfrm>
-          <a:prstGeom prst="rect">
-            <a:avLst/>
-          </a:prstGeom>
-          <a:noFill/>
-          <a:ln/>
-        </p:spPr>
-        <p:txBody>
-          <a:bodyPr wrap="square" lIns="0" tIns="0" rIns="0" bIns="0" rtlCol="0" anchor="ctr"/>
-          <a:lstStyle/>
-          <a:p>
-            <a:pPr indent="0" marL="0">
-              <a:buNone/>
-            </a:pPr>
-            <a:r>
-              <a:rPr lang="en-US" sz="2200" b="1" dirty="0">
-                <a:solidFill>
-                  <a:schemeClr val="accent2"/>
-                </a:solidFill>
-                <a:latin typeface="+mj-lt" pitchFamily="34" charset="0"/>
-                <a:ea typeface="+mj-lt" pitchFamily="34" charset="-122"/>
-                <a:cs typeface="+mj-lt" pitchFamily="34" charset="-120"/>
-              </a:rPr>
-              <a:t>1.4 to 1.95x</a:t>
-            </a:r>
-            <a:endParaRPr lang="en-US" sz="2200" dirty="0"/>
-          </a:p>
-        </p:txBody>
-      </p:sp>
-      <p:sp>
-        <p:nvSpPr>
-          <p:cNvPr id="10" name="Peak label 1"/>
-          <p:cNvSpPr txBox="1"/>
-          <p:nvPr/>
-        </p:nvSpPr>
-        <p:spPr>
-          <a:xfrm>
-            <a:off x="6355080" y="1837944"/>
-            <a:ext cx="2240280" cy="457200"/>
-          </a:xfrm>
-          <a:prstGeom prst="rect">
-            <a:avLst/>
-          </a:prstGeom>
-          <a:noFill/>
-          <a:ln/>
-        </p:spPr>
-        <p:txBody>
-          <a:bodyPr wrap="square" lIns="0" tIns="0" rIns="0" bIns="0" rtlCol="0" anchor="t"/>
-          <a:lstStyle/>
-          <a:p>
-            <a:pPr indent="0" marL="0">
-              <a:buNone/>
-            </a:pPr>
-            <a:r>
-              <a:rPr lang="en-US" sz="1200" dirty="0">
-                <a:solidFill>
-                  <a:schemeClr val="tx1"/>
-                </a:solidFill>
-              </a:rPr>
-              <a:t>peak error vs off-peak, for every model and horizon</a:t>
-            </a:r>
-            <a:endParaRPr lang="en-US" sz="1200" dirty="0"/>
-          </a:p>
-        </p:txBody>
-      </p:sp>
-      <p:sp>
-        <p:nvSpPr>
-          <p:cNvPr id="11" name="Peak card 2"/>
-          <p:cNvSpPr/>
-          <p:nvPr/>
-        </p:nvSpPr>
-        <p:spPr>
-          <a:xfrm>
-            <a:off x="6217920" y="2441448"/>
-            <a:ext cx="2468880" cy="1005840"/>
-          </a:xfrm>
-          <a:prstGeom prst="roundRect">
-            <a:avLst>
-              <a:gd name="adj" fmla="val 7273"/>
-            </a:avLst>
-          </a:prstGeom>
-          <a:solidFill>
-            <a:schemeClr val="bg2"/>
-          </a:solidFill>
-          <a:ln w="12700">
-            <a:solidFill>
-              <a:schemeClr val="bg2"/>
-            </a:solidFill>
-            <a:prstDash val="solid"/>
-          </a:ln>
-        </p:spPr>
-      </p:sp>
-      <p:sp>
-        <p:nvSpPr>
-          <p:cNvPr id="12" name="Peak number 2"/>
-          <p:cNvSpPr txBox="1"/>
-          <p:nvPr/>
-        </p:nvSpPr>
-        <p:spPr>
-          <a:xfrm>
-            <a:off x="6355080" y="2514600"/>
-            <a:ext cx="2240280" cy="411480"/>
-          </a:xfrm>
-          <a:prstGeom prst="rect">
-            <a:avLst/>
-          </a:prstGeom>
-          <a:noFill/>
-          <a:ln/>
-        </p:spPr>
-        <p:txBody>
-          <a:bodyPr wrap="square" lIns="0" tIns="0" rIns="0" bIns="0" rtlCol="0" anchor="ctr"/>
-          <a:lstStyle/>
-          <a:p>
-            <a:pPr indent="0" marL="0">
-              <a:buNone/>
-            </a:pPr>
-            <a:r>
-              <a:rPr lang="en-US" sz="2200" b="1" dirty="0">
-                <a:solidFill>
-                  <a:schemeClr val="accent1"/>
-                </a:solidFill>
-                <a:latin typeface="+mj-lt" pitchFamily="34" charset="0"/>
-                <a:ea typeface="+mj-lt" pitchFamily="34" charset="-122"/>
-                <a:cs typeface="+mj-lt" pitchFamily="34" charset="-120"/>
-              </a:rPr>
-              <a:t>4.22 to 6.23</a:t>
-            </a:r>
-            <a:endParaRPr lang="en-US" sz="2200" dirty="0"/>
-          </a:p>
-        </p:txBody>
-      </p:sp>
-      <p:sp>
-        <p:nvSpPr>
-          <p:cNvPr id="13" name="Peak label 2"/>
-          <p:cNvSpPr txBox="1"/>
-          <p:nvPr/>
-        </p:nvSpPr>
-        <p:spPr>
-          <a:xfrm>
-            <a:off x="6355080" y="2953512"/>
-            <a:ext cx="2240280" cy="457200"/>
-          </a:xfrm>
-          <a:prstGeom prst="rect">
-            <a:avLst/>
-          </a:prstGeom>
-          <a:noFill/>
-          <a:ln/>
-        </p:spPr>
-        <p:txBody>
-          <a:bodyPr wrap="square" lIns="0" tIns="0" rIns="0" bIns="0" rtlCol="0" anchor="t"/>
-          <a:lstStyle/>
-          <a:p>
-            <a:pPr indent="0" marL="0">
-              <a:buNone/>
-            </a:pPr>
-            <a:r>
-              <a:rPr lang="en-US" sz="1200" dirty="0">
-                <a:solidFill>
-                  <a:schemeClr val="tx1"/>
-                </a:solidFill>
-              </a:rPr>
-              <a:t>XGBoost peak MAE (mph), 15 to 60 min</a:t>
-            </a:r>
-            <a:endParaRPr lang="en-US" sz="1200" dirty="0"/>
-          </a:p>
-        </p:txBody>
-      </p:sp>
-      <p:sp>
-        <p:nvSpPr>
-          <p:cNvPr id="14" name="Peak card 3"/>
-          <p:cNvSpPr/>
-          <p:nvPr/>
-        </p:nvSpPr>
-        <p:spPr>
-          <a:xfrm>
-            <a:off x="6217920" y="3557016"/>
-            <a:ext cx="2468880" cy="1005840"/>
-          </a:xfrm>
-          <a:prstGeom prst="roundRect">
-            <a:avLst>
-              <a:gd name="adj" fmla="val 7273"/>
-            </a:avLst>
-          </a:prstGeom>
-          <a:solidFill>
-            <a:schemeClr val="bg2"/>
-          </a:solidFill>
-          <a:ln w="12700">
-            <a:solidFill>
-              <a:schemeClr val="bg2"/>
-            </a:solidFill>
-            <a:prstDash val="solid"/>
-          </a:ln>
-        </p:spPr>
-      </p:sp>
-      <p:sp>
-        <p:nvSpPr>
-          <p:cNvPr id="15" name="Peak number 3"/>
-          <p:cNvSpPr txBox="1"/>
-          <p:nvPr/>
-        </p:nvSpPr>
-        <p:spPr>
-          <a:xfrm>
-            <a:off x="6355080" y="3630168"/>
-            <a:ext cx="2240280" cy="411480"/>
-          </a:xfrm>
-          <a:prstGeom prst="rect">
-            <a:avLst/>
-          </a:prstGeom>
-          <a:noFill/>
-          <a:ln/>
-        </p:spPr>
-        <p:txBody>
-          <a:bodyPr wrap="square" lIns="0" tIns="0" rIns="0" bIns="0" rtlCol="0" anchor="ctr"/>
-          <a:lstStyle/>
-          <a:p>
-            <a:pPr indent="0" marL="0">
-              <a:buNone/>
-            </a:pPr>
-            <a:r>
-              <a:rPr lang="en-US" sz="2200" b="1" dirty="0">
-                <a:solidFill>
-                  <a:schemeClr val="accent3"/>
-                </a:solidFill>
-                <a:latin typeface="+mj-lt" pitchFamily="34" charset="0"/>
-                <a:ea typeface="+mj-lt" pitchFamily="34" charset="-122"/>
-                <a:cs typeface="+mj-lt" pitchFamily="34" charset="-120"/>
-              </a:rPr>
-              <a:t>2.69 to 3.32</a:t>
-            </a:r>
-            <a:endParaRPr lang="en-US" sz="2200" dirty="0"/>
-          </a:p>
-        </p:txBody>
-      </p:sp>
-      <p:sp>
-        <p:nvSpPr>
-          <p:cNvPr id="16" name="Peak label 3"/>
-          <p:cNvSpPr txBox="1"/>
-          <p:nvPr/>
-        </p:nvSpPr>
-        <p:spPr>
-          <a:xfrm>
-            <a:off x="6355080" y="4069080"/>
-            <a:ext cx="2240280" cy="457200"/>
-          </a:xfrm>
-          <a:prstGeom prst="rect">
-            <a:avLst/>
-          </a:prstGeom>
-          <a:noFill/>
-          <a:ln/>
-        </p:spPr>
-        <p:txBody>
-          <a:bodyPr wrap="square" lIns="0" tIns="0" rIns="0" bIns="0" rtlCol="0" anchor="t"/>
-          <a:lstStyle/>
-          <a:p>
-            <a:pPr indent="0" marL="0">
-              <a:buNone/>
-            </a:pPr>
-            <a:r>
-              <a:rPr lang="en-US" sz="1200" dirty="0">
-                <a:solidFill>
-                  <a:schemeClr val="tx1"/>
-                </a:solidFill>
-              </a:rPr>
-              <a:t>XGBoost off-peak MAE (mph), 15 to 60 min</a:t>
-            </a:r>
-            <a:endParaRPr lang="en-US" sz="1200" dirty="0"/>
-          </a:p>
-        </p:txBody>
-      </p:sp>
-      <p:sp>
-        <p:nvSpPr>
-          <p:cNvPr id="17" name="Peak definition"/>
-          <p:cNvSpPr txBox="1"/>
-          <p:nvPr/>
-        </p:nvSpPr>
-        <p:spPr>
-          <a:xfrm>
-            <a:off x="457200" y="4526280"/>
-            <a:ext cx="5486400" cy="182880"/>
-          </a:xfrm>
-          <a:prstGeom prst="rect">
-            <a:avLst/>
-          </a:prstGeom>
-          <a:noFill/>
-          <a:ln/>
-        </p:spPr>
-        <p:txBody>
-          <a:bodyPr wrap="square" lIns="0" tIns="0" rIns="0" bIns="0" rtlCol="0" anchor="t"/>
-          <a:lstStyle/>
-          <a:p>
-            <a:pPr indent="0" marL="0">
-              <a:buNone/>
-            </a:pPr>
-            <a:r>
-              <a:rPr lang="en-US" sz="1000" dirty="0">
-                <a:solidFill>
-                  <a:schemeClr val="accent6"/>
-                </a:solidFill>
-              </a:rPr>
-              <a:t>Peak = weekdays 07:00 to 09:59 and 16:00 to 19:59, judged on the predicted timestamp.</a:t>
-            </a:r>
-            <a:endParaRPr lang="en-US" sz="1000" dirty="0"/>
-          </a:p>
-        </p:txBody>
-      </p:sp>
-      <p:sp>
-        <p:nvSpPr>
-          <p:cNvPr id="25" name="Slide Number Placeholder 0"/>
-          <p:cNvSpPr>
-            <a:spLocks noGrp="1"/>
-          </p:cNvSpPr>
-          <p:nvPr>
-            <p:ph type="sldNum" sz="quarter" idx="4294967295"/>
-          </p:nvPr>
-        </p:nvSpPr>
-        <p:spPr>
-          <a:xfrm>
-            <a:off x="8138160" y="4754880"/>
-            <a:ext cx="548640" cy="228600"/>
-          </a:xfrm>
-          <a:prstGeom prst="rect">
-            <a:avLst/>
-          </a:prstGeom>
-          <a:extLst>
-            <a:ext uri="{C572A759-6A51-4108-AA02-DFA0A04FC94B}">
-              <ma14:wrappingTextBoxFlag xmlns:ma14="http://schemas.microsoft.com/office/mac/drawingml/2011/main" val="0"/>
-            </a:ext>
-          </a:extLst>
-        </p:spPr>
-        <p:txBody>
-          <a:bodyPr/>
-          <a:lstStyle>
-            <a:lvl1pPr>
-              <a:defRPr sz="1000">
-                <a:solidFill>
-                  <a:schemeClr val="accent6"/>
-                </a:solidFill>
-              </a:defRPr>
-            </a:lvl1pPr>
-          </a:lstStyle>
-          <a:p>
-            <a:pPr algn="r"/>
-            <a:fld id="{F7021451-1387-4CA6-816F-3879F97B5CBC}" type="slidenum">
-              <a:rPr b="0" lang="en-US"/>
               <a:t>8</a:t>
             </a:fld>
             <a:endParaRPr lang="en-US"/>
@@ -17933,7 +20043,7 @@
                 <a:ea typeface="+mj-lt" pitchFamily="34" charset="-122"/>
                 <a:cs typeface="+mj-lt" pitchFamily="34" charset="-120"/>
               </a:rPr>
-              <a:t>The gap, measured</a:t>
+              <a:t>Rush hour is the hard part</a:t>
             </a:r>
             <a:endParaRPr lang="en-US" sz="3000" dirty="0"/>
           </a:p>
@@ -18044,7 +20154,7 @@
                   <a:schemeClr val="accent6"/>
                 </a:solidFill>
               </a:rPr>
-              <a:t>Where an independent per-sensor model fails (XGBoost, test block)</a:t>
+              <a:t>Test MAE (mph) for 30-minute forecasts, by time of day</a:t>
             </a:r>
             <a:endParaRPr lang="en-US" sz="1600" dirty="0"/>
           </a:p>
@@ -18052,13 +20162,13 @@
       </p:sp>
       <p:graphicFrame>
         <p:nvGraphicFramePr>
-          <p:cNvPr id="7" name="Onset error chart" descr=""/>
+          <p:cNvPr id="7" name="Peak vs off-peak chart" descr=""/>
           <p:cNvGraphicFramePr/>
           <p:nvPr/>
         </p:nvGraphicFramePr>
         <p:xfrm>
           <a:off x="365760" y="1280160"/>
-          <a:ext cx="5120640" cy="3383280"/>
+          <a:ext cx="5669280" cy="3200400"/>
         </p:xfrm>
         <a:graphic xmlns:a="http://schemas.openxmlformats.org/drawingml/2006/main">
           <a:graphicData uri="http://schemas.openxmlformats.org/drawingml/2006/chart">
@@ -18068,14 +20178,14 @@
       </p:graphicFrame>
       <p:sp>
         <p:nvSpPr>
-          <p:cNvPr id="8" name="Gap card 1"/>
+          <p:cNvPr id="8" name="Peak card 1"/>
           <p:cNvSpPr/>
           <p:nvPr/>
         </p:nvSpPr>
         <p:spPr>
           <a:xfrm>
-            <a:off x="5669280" y="1325880"/>
-            <a:ext cx="3017520" cy="1005840"/>
+            <a:off x="6217920" y="1325880"/>
+            <a:ext cx="2468880" cy="1005840"/>
           </a:xfrm>
           <a:prstGeom prst="roundRect">
             <a:avLst>
@@ -18095,14 +20205,14 @@
       </p:sp>
       <p:sp>
         <p:nvSpPr>
-          <p:cNvPr id="9" name="Gap number 1"/>
+          <p:cNvPr id="9" name="Peak number 1"/>
           <p:cNvSpPr txBox="1"/>
           <p:nvPr/>
         </p:nvSpPr>
         <p:spPr>
           <a:xfrm>
-            <a:off x="5806440" y="1389888"/>
-            <a:ext cx="2743200" cy="384048"/>
+            <a:off x="6355080" y="1399032"/>
+            <a:ext cx="2240280" cy="411480"/>
           </a:xfrm>
           <a:prstGeom prst="rect">
             <a:avLst/>
@@ -18120,13 +20230,13 @@
             <a:r>
               <a:rPr lang="en-US" sz="2200" b="1" dirty="0">
                 <a:solidFill>
-                  <a:schemeClr val="accent5"/>
+                  <a:schemeClr val="accent2"/>
                 </a:solidFill>
                 <a:latin typeface="+mj-lt" pitchFamily="34" charset="0"/>
                 <a:ea typeface="+mj-lt" pitchFamily="34" charset="-122"/>
                 <a:cs typeface="+mj-lt" pitchFamily="34" charset="-120"/>
               </a:rPr>
-              <a:t>5 to 6x</a:t>
+              <a:t>1.4 to 1.95x</a:t>
             </a:r>
             <a:endParaRPr lang="en-US" sz="2200" dirty="0"/>
           </a:p>
@@ -18134,14 +20244,14 @@
       </p:sp>
       <p:sp>
         <p:nvSpPr>
-          <p:cNvPr id="10" name="Gap label 1"/>
+          <p:cNvPr id="10" name="Peak label 1"/>
           <p:cNvSpPr txBox="1"/>
           <p:nvPr/>
         </p:nvSpPr>
         <p:spPr>
           <a:xfrm>
-            <a:off x="5806440" y="1801368"/>
-            <a:ext cx="2743200" cy="512064"/>
+            <a:off x="6355080" y="1837944"/>
+            <a:ext cx="2240280" cy="457200"/>
           </a:xfrm>
           <a:prstGeom prst="rect">
             <a:avLst/>
@@ -18162,7 +20272,7 @@
                   <a:schemeClr val="tx1"/>
                 </a:solidFill>
               </a:rPr>
-              <a:t>higher error right after a congestion onset: 16.2 vs 2.7 mph at 15 min (3,911 onsets)</a:t>
+              <a:t>peak error vs off-peak, for every model and horizon</a:t>
             </a:r>
             <a:endParaRPr lang="en-US" sz="1200" dirty="0"/>
           </a:p>
@@ -18170,14 +20280,14 @@
       </p:sp>
       <p:sp>
         <p:nvSpPr>
-          <p:cNvPr id="11" name="Gap card 2"/>
+          <p:cNvPr id="11" name="Peak card 2"/>
           <p:cNvSpPr/>
           <p:nvPr/>
         </p:nvSpPr>
         <p:spPr>
           <a:xfrm>
-            <a:off x="5669280" y="2441448"/>
-            <a:ext cx="3017520" cy="1005840"/>
+            <a:off x="6217920" y="2441448"/>
+            <a:ext cx="2468880" cy="1005840"/>
           </a:xfrm>
           <a:prstGeom prst="roundRect">
             <a:avLst>
@@ -18197,14 +20307,14 @@
       </p:sp>
       <p:sp>
         <p:nvSpPr>
-          <p:cNvPr id="12" name="Gap number 2"/>
+          <p:cNvPr id="12" name="Peak number 2"/>
           <p:cNvSpPr txBox="1"/>
           <p:nvPr/>
         </p:nvSpPr>
         <p:spPr>
           <a:xfrm>
-            <a:off x="5806440" y="2505456"/>
-            <a:ext cx="2743200" cy="384048"/>
+            <a:off x="6355080" y="2514600"/>
+            <a:ext cx="2240280" cy="411480"/>
           </a:xfrm>
           <a:prstGeom prst="rect">
             <a:avLst/>
@@ -18222,13 +20332,13 @@
             <a:r>
               <a:rPr lang="en-US" sz="2200" b="1" dirty="0">
                 <a:solidFill>
-                  <a:schemeClr val="accent2"/>
+                  <a:schemeClr val="accent1"/>
                 </a:solidFill>
                 <a:latin typeface="+mj-lt" pitchFamily="34" charset="0"/>
                 <a:ea typeface="+mj-lt" pitchFamily="34" charset="-122"/>
                 <a:cs typeface="+mj-lt" pitchFamily="34" charset="-120"/>
               </a:rPr>
-              <a:t>0.20 vs 0.00</a:t>
+              <a:t>4.22 to 6.23</a:t>
             </a:r>
             <a:endParaRPr lang="en-US" sz="2200" dirty="0"/>
           </a:p>
@@ -18236,14 +20346,14 @@
       </p:sp>
       <p:sp>
         <p:nvSpPr>
-          <p:cNvPr id="13" name="Gap label 2"/>
+          <p:cNvPr id="13" name="Peak label 2"/>
           <p:cNvSpPr txBox="1"/>
           <p:nvPr/>
         </p:nvSpPr>
         <p:spPr>
           <a:xfrm>
-            <a:off x="5806440" y="2916936"/>
-            <a:ext cx="2743200" cy="512064"/>
+            <a:off x="6355080" y="2953512"/>
+            <a:ext cx="2240280" cy="457200"/>
           </a:xfrm>
           <a:prstGeom prst="rect">
             <a:avLst/>
@@ -18264,7 +20374,7 @@
                   <a:schemeClr val="tx1"/>
                 </a:solidFill>
               </a:rPr>
-              <a:t>error correlation of linked vs unconnected sensors at 60 min</a:t>
+              <a:t>XGBoost peak MAE (mph), 15 to 60 min</a:t>
             </a:r>
             <a:endParaRPr lang="en-US" sz="1200" dirty="0"/>
           </a:p>
@@ -18272,14 +20382,14 @@
       </p:sp>
       <p:sp>
         <p:nvSpPr>
-          <p:cNvPr id="14" name="Gap card 3"/>
+          <p:cNvPr id="14" name="Peak card 3"/>
           <p:cNvSpPr/>
           <p:nvPr/>
         </p:nvSpPr>
         <p:spPr>
           <a:xfrm>
-            <a:off x="5669280" y="3557016"/>
-            <a:ext cx="3017520" cy="1005840"/>
+            <a:off x="6217920" y="3557016"/>
+            <a:ext cx="2468880" cy="1005840"/>
           </a:xfrm>
           <a:prstGeom prst="roundRect">
             <a:avLst>
@@ -18299,14 +20409,14 @@
       </p:sp>
       <p:sp>
         <p:nvSpPr>
-          <p:cNvPr id="15" name="Gap number 3"/>
+          <p:cNvPr id="15" name="Peak number 3"/>
           <p:cNvSpPr txBox="1"/>
           <p:nvPr/>
         </p:nvSpPr>
         <p:spPr>
           <a:xfrm>
-            <a:off x="5806440" y="3621024"/>
-            <a:ext cx="2743200" cy="384048"/>
+            <a:off x="6355080" y="3630168"/>
+            <a:ext cx="2240280" cy="411480"/>
           </a:xfrm>
           <a:prstGeom prst="rect">
             <a:avLst/>
@@ -18324,13 +20434,13 @@
             <a:r>
               <a:rPr lang="en-US" sz="2200" b="1" dirty="0">
                 <a:solidFill>
-                  <a:schemeClr val="accent1"/>
+                  <a:schemeClr val="accent3"/>
                 </a:solidFill>
                 <a:latin typeface="+mj-lt" pitchFamily="34" charset="0"/>
                 <a:ea typeface="+mj-lt" pitchFamily="34" charset="-122"/>
                 <a:cs typeface="+mj-lt" pitchFamily="34" charset="-120"/>
               </a:rPr>
-              <a:t>3.02 to 4.01</a:t>
+              <a:t>2.69 to 3.32</a:t>
             </a:r>
             <a:endParaRPr lang="en-US" sz="2200" dirty="0"/>
           </a:p>
@@ -18338,14 +20448,14 @@
       </p:sp>
       <p:sp>
         <p:nvSpPr>
-          <p:cNvPr id="16" name="Gap label 3"/>
+          <p:cNvPr id="16" name="Peak label 3"/>
           <p:cNvSpPr txBox="1"/>
           <p:nvPr/>
         </p:nvSpPr>
         <p:spPr>
           <a:xfrm>
-            <a:off x="5806440" y="4032504"/>
-            <a:ext cx="2743200" cy="512064"/>
+            <a:off x="6355080" y="4069080"/>
+            <a:ext cx="2240280" cy="457200"/>
           </a:xfrm>
           <a:prstGeom prst="rect">
             <a:avLst/>
@@ -18366,9 +20476,45 @@
                   <a:schemeClr val="tx1"/>
                 </a:solidFill>
               </a:rPr>
-              <a:t>XGBoost MAE (mph) rises from 15 to 60 min</a:t>
+              <a:t>XGBoost off-peak MAE (mph), 15 to 60 min</a:t>
             </a:r>
             <a:endParaRPr lang="en-US" sz="1200" dirty="0"/>
+          </a:p>
+        </p:txBody>
+      </p:sp>
+      <p:sp>
+        <p:nvSpPr>
+          <p:cNvPr id="17" name="Peak definition"/>
+          <p:cNvSpPr txBox="1"/>
+          <p:nvPr/>
+        </p:nvSpPr>
+        <p:spPr>
+          <a:xfrm>
+            <a:off x="457200" y="4526280"/>
+            <a:ext cx="5486400" cy="182880"/>
+          </a:xfrm>
+          <a:prstGeom prst="rect">
+            <a:avLst/>
+          </a:prstGeom>
+          <a:noFill/>
+          <a:ln/>
+        </p:spPr>
+        <p:txBody>
+          <a:bodyPr wrap="square" lIns="0" tIns="0" rIns="0" bIns="0" rtlCol="0" anchor="t"/>
+          <a:lstStyle/>
+          <a:p>
+            <a:pPr indent="0" marL="0">
+              <a:buNone/>
+            </a:pPr>
+            <a:r>
+              <a:rPr lang="en-US" sz="1000" dirty="0">
+                <a:solidFill>
+                  <a:schemeClr val="accent6"/>
+                </a:solidFill>
+              </a:rPr>
+              <a:t>Peak = weekdays 07:00 to 09:59 and 16:00 to 19:59, judged on the predicted timestamp.</a:t>
+            </a:r>
+            <a:endParaRPr lang="en-US" sz="1000" dirty="0"/>
           </a:p>
         </p:txBody>
       </p:sp>

--- a/docs/presentation/AML_Traffic_Flow_Forecasting.pptx
+++ b/docs/presentation/AML_Traffic_Flow_Forecasting.pptx
@@ -119,34 +119,34 @@
   <p:extLst>
     <p:ext uri="{521415D9-36F7-43E2-AB2F-B90AF26B5E84}">
       <p14:sectionLst xmlns:p14="http://schemas.microsoft.com/office/powerpoint/2010/main">
-        <p14:section name="Overview" id="{82155768-d959-20cf-fad9-3c7fff23891e}">
+        <p14:section name="Overview" id="{8c069451-d5d6-cbf5-46a0-1f50115a84b5}">
           <p14:sldIdLst>
             <p14:sldId id="256"/>
             <p14:sldId id="257"/>
             <p14:sldId id="258"/>
           </p14:sldIdLst>
         </p14:section>
-        <p14:section name="Method" id="{8825e7f3-9272-5af2-b62b-ecdae53fb614}">
+        <p14:section name="Method" id="{75c0e378-9eb1-4a71-3d56-74f2d675ca90}">
           <p14:sldIdLst>
             <p14:sldId id="259"/>
             <p14:sldId id="260"/>
             <p14:sldId id="261"/>
           </p14:sldIdLst>
         </p14:section>
-        <p14:section name="Results" id="{5e156301-5005-47bd-69c6-4e750d3d184c}">
+        <p14:section name="Results" id="{424004b2-d36f-c0e8-9064-75ae2f27eb0a}">
           <p14:sldIdLst>
             <p14:sldId id="262"/>
             <p14:sldId id="263"/>
             <p14:sldId id="264"/>
           </p14:sldIdLst>
         </p14:section>
-        <p14:section name="The gap" id="{51f5cc71-5a28-f5b6-d18a-f01d862a39ef}">
+        <p14:section name="The gap" id="{075e1788-49d8-ebd1-9220-11397a4fcac2}">
           <p14:sldIdLst>
             <p14:sldId id="265"/>
             <p14:sldId id="266"/>
           </p14:sldIdLst>
         </p14:section>
-        <p14:section name="Wrap-up" id="{6fc6f8e8-6a15-c5ef-43a7-b9109bdd0ffe}">
+        <p14:section name="Wrap-up" id="{c414c0ab-b749-8349-24fd-241f3a36a251}">
           <p14:sldIdLst>
             <p14:sldId id="267"/>
             <p14:sldId id="268"/>
